--- a/resources/Chapter_1_Information_Technology_and_Society_Teaching.pptx
+++ b/resources/Chapter_1_Information_Technology_and_Society_Teaching.pptx
@@ -5,56 +5,56 @@
     <p:sldMasterId id="2147483648" r:id="rId1"/>
   </p:sldMasterIdLst>
   <p:sldIdLst>
-    <p:sldId id="256" r:id="rId7"/>
-    <p:sldId id="257" r:id="rId8"/>
-    <p:sldId id="258" r:id="rId9"/>
-    <p:sldId id="259" r:id="rId10"/>
-    <p:sldId id="260" r:id="rId11"/>
-    <p:sldId id="261" r:id="rId12"/>
-    <p:sldId id="262" r:id="rId13"/>
-    <p:sldId id="263" r:id="rId14"/>
-    <p:sldId id="264" r:id="rId15"/>
-    <p:sldId id="265" r:id="rId16"/>
-    <p:sldId id="266" r:id="rId17"/>
-    <p:sldId id="267" r:id="rId18"/>
-    <p:sldId id="268" r:id="rId19"/>
-    <p:sldId id="269" r:id="rId20"/>
-    <p:sldId id="270" r:id="rId21"/>
-    <p:sldId id="271" r:id="rId22"/>
-    <p:sldId id="272" r:id="rId23"/>
-    <p:sldId id="273" r:id="rId24"/>
-    <p:sldId id="274" r:id="rId25"/>
-    <p:sldId id="275" r:id="rId26"/>
-    <p:sldId id="276" r:id="rId27"/>
-    <p:sldId id="277" r:id="rId28"/>
-    <p:sldId id="278" r:id="rId29"/>
-    <p:sldId id="279" r:id="rId30"/>
-    <p:sldId id="280" r:id="rId31"/>
-    <p:sldId id="281" r:id="rId32"/>
-    <p:sldId id="282" r:id="rId33"/>
-    <p:sldId id="283" r:id="rId34"/>
-    <p:sldId id="284" r:id="rId35"/>
-    <p:sldId id="285" r:id="rId36"/>
-    <p:sldId id="286" r:id="rId37"/>
-    <p:sldId id="287" r:id="rId38"/>
-    <p:sldId id="288" r:id="rId39"/>
-    <p:sldId id="289" r:id="rId40"/>
-    <p:sldId id="290" r:id="rId41"/>
-    <p:sldId id="291" r:id="rId42"/>
-    <p:sldId id="292" r:id="rId43"/>
-    <p:sldId id="293" r:id="rId44"/>
-    <p:sldId id="294" r:id="rId45"/>
-    <p:sldId id="295" r:id="rId46"/>
-    <p:sldId id="296" r:id="rId47"/>
-    <p:sldId id="297" r:id="rId48"/>
-    <p:sldId id="298" r:id="rId49"/>
-    <p:sldId id="299" r:id="rId50"/>
-    <p:sldId id="300" r:id="rId51"/>
-    <p:sldId id="301" r:id="rId52"/>
-    <p:sldId id="302" r:id="rId53"/>
-    <p:sldId id="303" r:id="rId54"/>
+    <p:sldId id="256" r:id="rId2"/>
+    <p:sldId id="257" r:id="rId3"/>
+    <p:sldId id="258" r:id="rId4"/>
+    <p:sldId id="259" r:id="rId5"/>
+    <p:sldId id="260" r:id="rId6"/>
+    <p:sldId id="261" r:id="rId7"/>
+    <p:sldId id="262" r:id="rId8"/>
+    <p:sldId id="263" r:id="rId9"/>
+    <p:sldId id="264" r:id="rId10"/>
+    <p:sldId id="265" r:id="rId11"/>
+    <p:sldId id="266" r:id="rId12"/>
+    <p:sldId id="267" r:id="rId13"/>
+    <p:sldId id="268" r:id="rId14"/>
+    <p:sldId id="269" r:id="rId15"/>
+    <p:sldId id="270" r:id="rId16"/>
+    <p:sldId id="271" r:id="rId17"/>
+    <p:sldId id="272" r:id="rId18"/>
+    <p:sldId id="273" r:id="rId19"/>
+    <p:sldId id="274" r:id="rId20"/>
+    <p:sldId id="275" r:id="rId21"/>
+    <p:sldId id="276" r:id="rId22"/>
+    <p:sldId id="277" r:id="rId23"/>
+    <p:sldId id="278" r:id="rId24"/>
+    <p:sldId id="279" r:id="rId25"/>
+    <p:sldId id="280" r:id="rId26"/>
+    <p:sldId id="281" r:id="rId27"/>
+    <p:sldId id="282" r:id="rId28"/>
+    <p:sldId id="283" r:id="rId29"/>
+    <p:sldId id="284" r:id="rId30"/>
+    <p:sldId id="285" r:id="rId31"/>
+    <p:sldId id="286" r:id="rId32"/>
+    <p:sldId id="287" r:id="rId33"/>
+    <p:sldId id="288" r:id="rId34"/>
+    <p:sldId id="289" r:id="rId35"/>
+    <p:sldId id="290" r:id="rId36"/>
+    <p:sldId id="291" r:id="rId37"/>
+    <p:sldId id="292" r:id="rId38"/>
+    <p:sldId id="293" r:id="rId39"/>
+    <p:sldId id="294" r:id="rId40"/>
+    <p:sldId id="295" r:id="rId41"/>
+    <p:sldId id="296" r:id="rId42"/>
+    <p:sldId id="297" r:id="rId43"/>
+    <p:sldId id="298" r:id="rId44"/>
+    <p:sldId id="299" r:id="rId45"/>
+    <p:sldId id="300" r:id="rId46"/>
+    <p:sldId id="301" r:id="rId47"/>
+    <p:sldId id="302" r:id="rId48"/>
+    <p:sldId id="303" r:id="rId49"/>
   </p:sldIdLst>
-  <p:sldSz cx="12191695" cy="6858000" type="screen4x3"/>
+  <p:sldSz cx="12192000" cy="6858000"/>
   <p:notesSz cx="6858000" cy="9144000"/>
   <p:defaultTextStyle>
     <a:defPPr>
@@ -151,6 +151,22 @@
       </a:defRPr>
     </a:lvl9pPr>
   </p:defaultTextStyle>
+  <p:extLst>
+    <p:ext uri="{EFAFB233-063F-42B5-8137-9DF3F51BA10A}">
+      <p15:sldGuideLst xmlns:p15="http://schemas.microsoft.com/office/powerpoint/2012/main">
+        <p15:guide id="1" orient="horz" pos="2160">
+          <p15:clr>
+            <a:srgbClr val="A4A3A4"/>
+          </p15:clr>
+        </p15:guide>
+        <p15:guide id="2" pos="2880">
+          <p15:clr>
+            <a:srgbClr val="A4A3A4"/>
+          </p15:clr>
+        </p15:guide>
+      </p15:sldGuideLst>
+    </p:ext>
+  </p:extLst>
 </p:presentation>
 </file>
 
@@ -192,10 +208,9 @@
           <a:lstStyle/>
           <a:p>
             <a:r>
-              <a:rPr lang="en-US" smtClean="0"/>
+              <a:rPr lang="en-US"/>
               <a:t>Click to edit Master title style</a:t>
             </a:r>
-            <a:endParaRPr lang="en-US"/>
           </a:p>
         </p:txBody>
       </p:sp>
@@ -311,10 +326,9 @@
           </a:lstStyle>
           <a:p>
             <a:r>
-              <a:rPr lang="en-US" smtClean="0"/>
+              <a:rPr lang="en-US"/>
               <a:t>Click to edit Master subtitle style</a:t>
             </a:r>
-            <a:endParaRPr lang="en-US"/>
           </a:p>
         </p:txBody>
       </p:sp>
@@ -335,7 +349,7 @@
           <a:p>
             <a:fld id="{5BCAD085-E8A6-8845-BD4E-CB4CCA059FC4}" type="datetimeFigureOut">
               <a:rPr lang="en-US" smtClean="0"/>
-              <a:t>1/27/13</a:t>
+              <a:t>9/26/2026</a:t>
             </a:fld>
             <a:endParaRPr lang="en-US"/>
           </a:p>
@@ -429,10 +443,9 @@
           <a:lstStyle/>
           <a:p>
             <a:r>
-              <a:rPr lang="en-US" smtClean="0"/>
+              <a:rPr lang="en-US"/>
               <a:t>Click to edit Master title style</a:t>
             </a:r>
-            <a:endParaRPr lang="en-US"/>
           </a:p>
         </p:txBody>
       </p:sp>
@@ -453,38 +466,37 @@
           <a:p>
             <a:pPr lvl="0"/>
             <a:r>
-              <a:rPr lang="en-US" smtClean="0"/>
+              <a:rPr lang="en-US"/>
               <a:t>Click to edit Master text styles</a:t>
             </a:r>
           </a:p>
           <a:p>
             <a:pPr lvl="1"/>
             <a:r>
-              <a:rPr lang="en-US" smtClean="0"/>
+              <a:rPr lang="en-US"/>
               <a:t>Second level</a:t>
             </a:r>
           </a:p>
           <a:p>
             <a:pPr lvl="2"/>
             <a:r>
-              <a:rPr lang="en-US" smtClean="0"/>
+              <a:rPr lang="en-US"/>
               <a:t>Third level</a:t>
             </a:r>
           </a:p>
           <a:p>
             <a:pPr lvl="3"/>
             <a:r>
-              <a:rPr lang="en-US" smtClean="0"/>
+              <a:rPr lang="en-US"/>
               <a:t>Fourth level</a:t>
             </a:r>
           </a:p>
           <a:p>
             <a:pPr lvl="4"/>
             <a:r>
-              <a:rPr lang="en-US" smtClean="0"/>
+              <a:rPr lang="en-US"/>
               <a:t>Fifth level</a:t>
             </a:r>
-            <a:endParaRPr lang="en-US"/>
           </a:p>
         </p:txBody>
       </p:sp>
@@ -505,7 +517,7 @@
           <a:p>
             <a:fld id="{5BCAD085-E8A6-8845-BD4E-CB4CCA059FC4}" type="datetimeFigureOut">
               <a:rPr lang="en-US" smtClean="0"/>
-              <a:t>1/27/13</a:t>
+              <a:t>9/26/2026</a:t>
             </a:fld>
             <a:endParaRPr lang="en-US"/>
           </a:p>
@@ -604,10 +616,9 @@
           <a:lstStyle/>
           <a:p>
             <a:r>
-              <a:rPr lang="en-US" smtClean="0"/>
+              <a:rPr lang="en-US"/>
               <a:t>Click to edit Master title style</a:t>
             </a:r>
-            <a:endParaRPr lang="en-US"/>
           </a:p>
         </p:txBody>
       </p:sp>
@@ -633,38 +644,37 @@
           <a:p>
             <a:pPr lvl="0"/>
             <a:r>
-              <a:rPr lang="en-US" smtClean="0"/>
+              <a:rPr lang="en-US"/>
               <a:t>Click to edit Master text styles</a:t>
             </a:r>
           </a:p>
           <a:p>
             <a:pPr lvl="1"/>
             <a:r>
-              <a:rPr lang="en-US" smtClean="0"/>
+              <a:rPr lang="en-US"/>
               <a:t>Second level</a:t>
             </a:r>
           </a:p>
           <a:p>
             <a:pPr lvl="2"/>
             <a:r>
-              <a:rPr lang="en-US" smtClean="0"/>
+              <a:rPr lang="en-US"/>
               <a:t>Third level</a:t>
             </a:r>
           </a:p>
           <a:p>
             <a:pPr lvl="3"/>
             <a:r>
-              <a:rPr lang="en-US" smtClean="0"/>
+              <a:rPr lang="en-US"/>
               <a:t>Fourth level</a:t>
             </a:r>
           </a:p>
           <a:p>
             <a:pPr lvl="4"/>
             <a:r>
-              <a:rPr lang="en-US" smtClean="0"/>
+              <a:rPr lang="en-US"/>
               <a:t>Fifth level</a:t>
             </a:r>
-            <a:endParaRPr lang="en-US"/>
           </a:p>
         </p:txBody>
       </p:sp>
@@ -685,7 +695,7 @@
           <a:p>
             <a:fld id="{5BCAD085-E8A6-8845-BD4E-CB4CCA059FC4}" type="datetimeFigureOut">
               <a:rPr lang="en-US" smtClean="0"/>
-              <a:t>1/27/13</a:t>
+              <a:t>9/26/2026</a:t>
             </a:fld>
             <a:endParaRPr lang="en-US"/>
           </a:p>
@@ -779,10 +789,9 @@
           <a:lstStyle/>
           <a:p>
             <a:r>
-              <a:rPr lang="en-US" smtClean="0"/>
+              <a:rPr lang="en-US"/>
               <a:t>Click to edit Master title style</a:t>
             </a:r>
-            <a:endParaRPr lang="en-US"/>
           </a:p>
         </p:txBody>
       </p:sp>
@@ -803,38 +812,37 @@
           <a:p>
             <a:pPr lvl="0"/>
             <a:r>
-              <a:rPr lang="en-US" smtClean="0"/>
+              <a:rPr lang="en-US"/>
               <a:t>Click to edit Master text styles</a:t>
             </a:r>
           </a:p>
           <a:p>
             <a:pPr lvl="1"/>
             <a:r>
-              <a:rPr lang="en-US" smtClean="0"/>
+              <a:rPr lang="en-US"/>
               <a:t>Second level</a:t>
             </a:r>
           </a:p>
           <a:p>
             <a:pPr lvl="2"/>
             <a:r>
-              <a:rPr lang="en-US" smtClean="0"/>
+              <a:rPr lang="en-US"/>
               <a:t>Third level</a:t>
             </a:r>
           </a:p>
           <a:p>
             <a:pPr lvl="3"/>
             <a:r>
-              <a:rPr lang="en-US" smtClean="0"/>
+              <a:rPr lang="en-US"/>
               <a:t>Fourth level</a:t>
             </a:r>
           </a:p>
           <a:p>
             <a:pPr lvl="4"/>
             <a:r>
-              <a:rPr lang="en-US" smtClean="0"/>
+              <a:rPr lang="en-US"/>
               <a:t>Fifth level</a:t>
             </a:r>
-            <a:endParaRPr lang="en-US"/>
           </a:p>
         </p:txBody>
       </p:sp>
@@ -855,7 +863,7 @@
           <a:p>
             <a:fld id="{5BCAD085-E8A6-8845-BD4E-CB4CCA059FC4}" type="datetimeFigureOut">
               <a:rPr lang="en-US" smtClean="0"/>
-              <a:t>1/27/13</a:t>
+              <a:t>9/26/2026</a:t>
             </a:fld>
             <a:endParaRPr lang="en-US"/>
           </a:p>
@@ -958,10 +966,9 @@
           </a:lstStyle>
           <a:p>
             <a:r>
-              <a:rPr lang="en-US" smtClean="0"/>
+              <a:rPr lang="en-US"/>
               <a:t>Click to edit Master title style</a:t>
             </a:r>
-            <a:endParaRPr lang="en-US"/>
           </a:p>
         </p:txBody>
       </p:sp>
@@ -1078,7 +1085,7 @@
           <a:p>
             <a:pPr lvl="0"/>
             <a:r>
-              <a:rPr lang="en-US" smtClean="0"/>
+              <a:rPr lang="en-US"/>
               <a:t>Click to edit Master text styles</a:t>
             </a:r>
           </a:p>
@@ -1101,7 +1108,7 @@
           <a:p>
             <a:fld id="{5BCAD085-E8A6-8845-BD4E-CB4CCA059FC4}" type="datetimeFigureOut">
               <a:rPr lang="en-US" smtClean="0"/>
-              <a:t>1/27/13</a:t>
+              <a:t>9/26/2026</a:t>
             </a:fld>
             <a:endParaRPr lang="en-US"/>
           </a:p>
@@ -1195,10 +1202,9 @@
           <a:lstStyle/>
           <a:p>
             <a:r>
-              <a:rPr lang="en-US" smtClean="0"/>
+              <a:rPr lang="en-US"/>
               <a:t>Click to edit Master title style</a:t>
             </a:r>
-            <a:endParaRPr lang="en-US"/>
           </a:p>
         </p:txBody>
       </p:sp>
@@ -1252,38 +1258,37 @@
           <a:p>
             <a:pPr lvl="0"/>
             <a:r>
-              <a:rPr lang="en-US" smtClean="0"/>
+              <a:rPr lang="en-US"/>
               <a:t>Click to edit Master text styles</a:t>
             </a:r>
           </a:p>
           <a:p>
             <a:pPr lvl="1"/>
             <a:r>
-              <a:rPr lang="en-US" smtClean="0"/>
+              <a:rPr lang="en-US"/>
               <a:t>Second level</a:t>
             </a:r>
           </a:p>
           <a:p>
             <a:pPr lvl="2"/>
             <a:r>
-              <a:rPr lang="en-US" smtClean="0"/>
+              <a:rPr lang="en-US"/>
               <a:t>Third level</a:t>
             </a:r>
           </a:p>
           <a:p>
             <a:pPr lvl="3"/>
             <a:r>
-              <a:rPr lang="en-US" smtClean="0"/>
+              <a:rPr lang="en-US"/>
               <a:t>Fourth level</a:t>
             </a:r>
           </a:p>
           <a:p>
             <a:pPr lvl="4"/>
             <a:r>
-              <a:rPr lang="en-US" smtClean="0"/>
+              <a:rPr lang="en-US"/>
               <a:t>Fifth level</a:t>
             </a:r>
-            <a:endParaRPr lang="en-US"/>
           </a:p>
         </p:txBody>
       </p:sp>
@@ -1337,38 +1342,37 @@
           <a:p>
             <a:pPr lvl="0"/>
             <a:r>
-              <a:rPr lang="en-US" smtClean="0"/>
+              <a:rPr lang="en-US"/>
               <a:t>Click to edit Master text styles</a:t>
             </a:r>
           </a:p>
           <a:p>
             <a:pPr lvl="1"/>
             <a:r>
-              <a:rPr lang="en-US" smtClean="0"/>
+              <a:rPr lang="en-US"/>
               <a:t>Second level</a:t>
             </a:r>
           </a:p>
           <a:p>
             <a:pPr lvl="2"/>
             <a:r>
-              <a:rPr lang="en-US" smtClean="0"/>
+              <a:rPr lang="en-US"/>
               <a:t>Third level</a:t>
             </a:r>
           </a:p>
           <a:p>
             <a:pPr lvl="3"/>
             <a:r>
-              <a:rPr lang="en-US" smtClean="0"/>
+              <a:rPr lang="en-US"/>
               <a:t>Fourth level</a:t>
             </a:r>
           </a:p>
           <a:p>
             <a:pPr lvl="4"/>
             <a:r>
-              <a:rPr lang="en-US" smtClean="0"/>
+              <a:rPr lang="en-US"/>
               <a:t>Fifth level</a:t>
             </a:r>
-            <a:endParaRPr lang="en-US"/>
           </a:p>
         </p:txBody>
       </p:sp>
@@ -1389,7 +1393,7 @@
           <a:p>
             <a:fld id="{5BCAD085-E8A6-8845-BD4E-CB4CCA059FC4}" type="datetimeFigureOut">
               <a:rPr lang="en-US" smtClean="0"/>
-              <a:t>1/27/13</a:t>
+              <a:t>9/26/2026</a:t>
             </a:fld>
             <a:endParaRPr lang="en-US"/>
           </a:p>
@@ -1487,10 +1491,9 @@
           </a:lstStyle>
           <a:p>
             <a:r>
-              <a:rPr lang="en-US" smtClean="0"/>
+              <a:rPr lang="en-US"/>
               <a:t>Click to edit Master title style</a:t>
             </a:r>
-            <a:endParaRPr lang="en-US"/>
           </a:p>
         </p:txBody>
       </p:sp>
@@ -1553,7 +1556,7 @@
           <a:p>
             <a:pPr lvl="0"/>
             <a:r>
-              <a:rPr lang="en-US" smtClean="0"/>
+              <a:rPr lang="en-US"/>
               <a:t>Click to edit Master text styles</a:t>
             </a:r>
           </a:p>
@@ -1609,38 +1612,37 @@
           <a:p>
             <a:pPr lvl="0"/>
             <a:r>
-              <a:rPr lang="en-US" smtClean="0"/>
+              <a:rPr lang="en-US"/>
               <a:t>Click to edit Master text styles</a:t>
             </a:r>
           </a:p>
           <a:p>
             <a:pPr lvl="1"/>
             <a:r>
-              <a:rPr lang="en-US" smtClean="0"/>
+              <a:rPr lang="en-US"/>
               <a:t>Second level</a:t>
             </a:r>
           </a:p>
           <a:p>
             <a:pPr lvl="2"/>
             <a:r>
-              <a:rPr lang="en-US" smtClean="0"/>
+              <a:rPr lang="en-US"/>
               <a:t>Third level</a:t>
             </a:r>
           </a:p>
           <a:p>
             <a:pPr lvl="3"/>
             <a:r>
-              <a:rPr lang="en-US" smtClean="0"/>
+              <a:rPr lang="en-US"/>
               <a:t>Fourth level</a:t>
             </a:r>
           </a:p>
           <a:p>
             <a:pPr lvl="4"/>
             <a:r>
-              <a:rPr lang="en-US" smtClean="0"/>
+              <a:rPr lang="en-US"/>
               <a:t>Fifth level</a:t>
             </a:r>
-            <a:endParaRPr lang="en-US"/>
           </a:p>
         </p:txBody>
       </p:sp>
@@ -1703,7 +1705,7 @@
           <a:p>
             <a:pPr lvl="0"/>
             <a:r>
-              <a:rPr lang="en-US" smtClean="0"/>
+              <a:rPr lang="en-US"/>
               <a:t>Click to edit Master text styles</a:t>
             </a:r>
           </a:p>
@@ -1759,38 +1761,37 @@
           <a:p>
             <a:pPr lvl="0"/>
             <a:r>
-              <a:rPr lang="en-US" smtClean="0"/>
+              <a:rPr lang="en-US"/>
               <a:t>Click to edit Master text styles</a:t>
             </a:r>
           </a:p>
           <a:p>
             <a:pPr lvl="1"/>
             <a:r>
-              <a:rPr lang="en-US" smtClean="0"/>
+              <a:rPr lang="en-US"/>
               <a:t>Second level</a:t>
             </a:r>
           </a:p>
           <a:p>
             <a:pPr lvl="2"/>
             <a:r>
-              <a:rPr lang="en-US" smtClean="0"/>
+              <a:rPr lang="en-US"/>
               <a:t>Third level</a:t>
             </a:r>
           </a:p>
           <a:p>
             <a:pPr lvl="3"/>
             <a:r>
-              <a:rPr lang="en-US" smtClean="0"/>
+              <a:rPr lang="en-US"/>
               <a:t>Fourth level</a:t>
             </a:r>
           </a:p>
           <a:p>
             <a:pPr lvl="4"/>
             <a:r>
-              <a:rPr lang="en-US" smtClean="0"/>
+              <a:rPr lang="en-US"/>
               <a:t>Fifth level</a:t>
             </a:r>
-            <a:endParaRPr lang="en-US"/>
           </a:p>
         </p:txBody>
       </p:sp>
@@ -1811,7 +1812,7 @@
           <a:p>
             <a:fld id="{5BCAD085-E8A6-8845-BD4E-CB4CCA059FC4}" type="datetimeFigureOut">
               <a:rPr lang="en-US" smtClean="0"/>
-              <a:t>1/27/13</a:t>
+              <a:t>9/26/2026</a:t>
             </a:fld>
             <a:endParaRPr lang="en-US"/>
           </a:p>
@@ -1905,10 +1906,9 @@
           <a:lstStyle/>
           <a:p>
             <a:r>
-              <a:rPr lang="en-US" smtClean="0"/>
+              <a:rPr lang="en-US"/>
               <a:t>Click to edit Master title style</a:t>
             </a:r>
-            <a:endParaRPr lang="en-US"/>
           </a:p>
         </p:txBody>
       </p:sp>
@@ -1929,7 +1929,7 @@
           <a:p>
             <a:fld id="{5BCAD085-E8A6-8845-BD4E-CB4CCA059FC4}" type="datetimeFigureOut">
               <a:rPr lang="en-US" smtClean="0"/>
-              <a:t>1/27/13</a:t>
+              <a:t>9/26/2026</a:t>
             </a:fld>
             <a:endParaRPr lang="en-US"/>
           </a:p>
@@ -2024,7 +2024,7 @@
           <a:p>
             <a:fld id="{5BCAD085-E8A6-8845-BD4E-CB4CCA059FC4}" type="datetimeFigureOut">
               <a:rPr lang="en-US" smtClean="0"/>
-              <a:t>1/27/13</a:t>
+              <a:t>9/26/2026</a:t>
             </a:fld>
             <a:endParaRPr lang="en-US"/>
           </a:p>
@@ -2127,10 +2127,9 @@
           </a:lstStyle>
           <a:p>
             <a:r>
-              <a:rPr lang="en-US" smtClean="0"/>
+              <a:rPr lang="en-US"/>
               <a:t>Click to edit Master title style</a:t>
             </a:r>
-            <a:endParaRPr lang="en-US"/>
           </a:p>
         </p:txBody>
       </p:sp>
@@ -2184,38 +2183,37 @@
           <a:p>
             <a:pPr lvl="0"/>
             <a:r>
-              <a:rPr lang="en-US" smtClean="0"/>
+              <a:rPr lang="en-US"/>
               <a:t>Click to edit Master text styles</a:t>
             </a:r>
           </a:p>
           <a:p>
             <a:pPr lvl="1"/>
             <a:r>
-              <a:rPr lang="en-US" smtClean="0"/>
+              <a:rPr lang="en-US"/>
               <a:t>Second level</a:t>
             </a:r>
           </a:p>
           <a:p>
             <a:pPr lvl="2"/>
             <a:r>
-              <a:rPr lang="en-US" smtClean="0"/>
+              <a:rPr lang="en-US"/>
               <a:t>Third level</a:t>
             </a:r>
           </a:p>
           <a:p>
             <a:pPr lvl="3"/>
             <a:r>
-              <a:rPr lang="en-US" smtClean="0"/>
+              <a:rPr lang="en-US"/>
               <a:t>Fourth level</a:t>
             </a:r>
           </a:p>
           <a:p>
             <a:pPr lvl="4"/>
             <a:r>
-              <a:rPr lang="en-US" smtClean="0"/>
+              <a:rPr lang="en-US"/>
               <a:t>Fifth level</a:t>
             </a:r>
-            <a:endParaRPr lang="en-US"/>
           </a:p>
         </p:txBody>
       </p:sp>
@@ -2278,7 +2276,7 @@
           <a:p>
             <a:pPr lvl="0"/>
             <a:r>
-              <a:rPr lang="en-US" smtClean="0"/>
+              <a:rPr lang="en-US"/>
               <a:t>Click to edit Master text styles</a:t>
             </a:r>
           </a:p>
@@ -2301,7 +2299,7 @@
           <a:p>
             <a:fld id="{5BCAD085-E8A6-8845-BD4E-CB4CCA059FC4}" type="datetimeFigureOut">
               <a:rPr lang="en-US" smtClean="0"/>
-              <a:t>1/27/13</a:t>
+              <a:t>9/26/2026</a:t>
             </a:fld>
             <a:endParaRPr lang="en-US"/>
           </a:p>
@@ -2404,10 +2402,9 @@
           </a:lstStyle>
           <a:p>
             <a:r>
-              <a:rPr lang="en-US" smtClean="0"/>
+              <a:rPr lang="en-US"/>
               <a:t>Click to edit Master title style</a:t>
             </a:r>
-            <a:endParaRPr lang="en-US"/>
           </a:p>
         </p:txBody>
       </p:sp>
@@ -2531,7 +2528,7 @@
           <a:p>
             <a:pPr lvl="0"/>
             <a:r>
-              <a:rPr lang="en-US" smtClean="0"/>
+              <a:rPr lang="en-US"/>
               <a:t>Click to edit Master text styles</a:t>
             </a:r>
           </a:p>
@@ -2554,7 +2551,7 @@
           <a:p>
             <a:fld id="{5BCAD085-E8A6-8845-BD4E-CB4CCA059FC4}" type="datetimeFigureOut">
               <a:rPr lang="en-US" smtClean="0"/>
-              <a:t>1/27/13</a:t>
+              <a:t>9/26/2026</a:t>
             </a:fld>
             <a:endParaRPr lang="en-US"/>
           </a:p>
@@ -2663,10 +2660,9 @@
           <a:lstStyle/>
           <a:p>
             <a:r>
-              <a:rPr lang="en-US" smtClean="0"/>
+              <a:rPr lang="en-US"/>
               <a:t>Click to edit Master title style</a:t>
             </a:r>
-            <a:endParaRPr lang="en-US"/>
           </a:p>
         </p:txBody>
       </p:sp>
@@ -2697,38 +2693,37 @@
           <a:p>
             <a:pPr lvl="0"/>
             <a:r>
-              <a:rPr lang="en-US" smtClean="0"/>
+              <a:rPr lang="en-US"/>
               <a:t>Click to edit Master text styles</a:t>
             </a:r>
           </a:p>
           <a:p>
             <a:pPr lvl="1"/>
             <a:r>
-              <a:rPr lang="en-US" smtClean="0"/>
+              <a:rPr lang="en-US"/>
               <a:t>Second level</a:t>
             </a:r>
           </a:p>
           <a:p>
             <a:pPr lvl="2"/>
             <a:r>
-              <a:rPr lang="en-US" smtClean="0"/>
+              <a:rPr lang="en-US"/>
               <a:t>Third level</a:t>
             </a:r>
           </a:p>
           <a:p>
             <a:pPr lvl="3"/>
             <a:r>
-              <a:rPr lang="en-US" smtClean="0"/>
+              <a:rPr lang="en-US"/>
               <a:t>Fourth level</a:t>
             </a:r>
           </a:p>
           <a:p>
             <a:pPr lvl="4"/>
             <a:r>
-              <a:rPr lang="en-US" smtClean="0"/>
+              <a:rPr lang="en-US"/>
               <a:t>Fifth level</a:t>
             </a:r>
-            <a:endParaRPr lang="en-US"/>
           </a:p>
         </p:txBody>
       </p:sp>
@@ -2767,7 +2762,7 @@
           <a:p>
             <a:fld id="{5BCAD085-E8A6-8845-BD4E-CB4CCA059FC4}" type="datetimeFigureOut">
               <a:rPr lang="en-US" smtClean="0"/>
-              <a:t>1/27/13</a:t>
+              <a:t>9/26/2026</a:t>
             </a:fld>
             <a:endParaRPr lang="en-US"/>
           </a:p>
@@ -3126,7 +3121,7 @@
 </file>
 
 <file path=ppt/slides/slide1.xml><?xml version="1.0" encoding="utf-8"?>
-<p:sld xmlns:a="http://schemas.openxmlformats.org/drawingml/2006/main" xmlns:p="http://schemas.openxmlformats.org/presentationml/2006/main" xmlns:r="http://schemas.openxmlformats.org/officeDocument/2006/relationships">
+<p:sld xmlns:a="http://schemas.openxmlformats.org/drawingml/2006/main" xmlns:r="http://schemas.openxmlformats.org/officeDocument/2006/relationships" xmlns:p="http://schemas.openxmlformats.org/presentationml/2006/main">
   <p:cSld>
     <p:spTree>
       <p:nvGrpSpPr>
@@ -3134,7 +3129,14 @@
         <p:cNvGrpSpPr/>
         <p:nvPr/>
       </p:nvGrpSpPr>
-      <p:grpSpPr/>
+      <p:grpSpPr>
+        <a:xfrm>
+          <a:off x="0" y="0"/>
+          <a:ext cx="0" cy="0"/>
+          <a:chOff x="0" y="0"/>
+          <a:chExt cx="0" cy="0"/>
+        </a:xfrm>
+      </p:grpSpPr>
       <p:sp>
         <p:nvSpPr>
           <p:cNvPr id="2" name="Rectangle 1"/>
@@ -3175,6 +3177,7 @@
           <a:lstStyle/>
           <a:p>
             <a:pPr algn="ctr"/>
+            <a:endParaRPr/>
           </a:p>
         </p:txBody>
       </p:sp>
@@ -3218,6 +3221,7 @@
           <a:lstStyle/>
           <a:p>
             <a:pPr algn="ctr"/>
+            <a:endParaRPr/>
           </a:p>
         </p:txBody>
       </p:sp>
@@ -3261,6 +3265,7 @@
           <a:lstStyle/>
           <a:p>
             <a:pPr algn="ctr"/>
+            <a:endParaRPr/>
           </a:p>
         </p:txBody>
       </p:sp>
@@ -3304,6 +3309,7 @@
           <a:lstStyle/>
           <a:p>
             <a:pPr algn="ctr"/>
+            <a:endParaRPr/>
           </a:p>
         </p:txBody>
       </p:sp>
@@ -3324,7 +3330,7 @@
           <a:noFill/>
         </p:spPr>
         <p:txBody>
-          <a:bodyPr wrap="square" lIns="27432" rIns="27432" tIns="27432" bIns="27432" anchor="t">
+          <a:bodyPr wrap="square" lIns="27432" tIns="27432" rIns="27432" bIns="27432" anchor="t">
             <a:spAutoFit/>
           </a:bodyPr>
           <a:lstStyle/>
@@ -3359,7 +3365,7 @@
           <a:noFill/>
         </p:spPr>
         <p:txBody>
-          <a:bodyPr wrap="square" lIns="27432" rIns="27432" tIns="27432" bIns="27432" anchor="t">
+          <a:bodyPr wrap="square" lIns="27432" tIns="27432" rIns="27432" bIns="27432" anchor="t">
             <a:spAutoFit/>
           </a:bodyPr>
           <a:lstStyle/>
@@ -3395,7 +3401,7 @@
           <a:noFill/>
         </p:spPr>
         <p:txBody>
-          <a:bodyPr wrap="square" lIns="27432" rIns="27432" tIns="27432" bIns="27432" anchor="t">
+          <a:bodyPr wrap="square" lIns="27432" tIns="27432" rIns="27432" bIns="27432" anchor="t">
             <a:spAutoFit/>
           </a:bodyPr>
           <a:lstStyle/>
@@ -3430,7 +3436,7 @@
           <a:noFill/>
         </p:spPr>
         <p:txBody>
-          <a:bodyPr wrap="square" lIns="27432" rIns="27432" tIns="27432" bIns="27432" anchor="t">
+          <a:bodyPr wrap="square" lIns="27432" tIns="27432" rIns="27432" bIns="27432" anchor="t">
             <a:spAutoFit/>
           </a:bodyPr>
           <a:lstStyle/>
@@ -3488,6 +3494,7 @@
           <a:lstStyle/>
           <a:p>
             <a:pPr algn="ctr"/>
+            <a:endParaRPr/>
           </a:p>
         </p:txBody>
       </p:sp>
@@ -3508,7 +3515,7 @@
           <a:noFill/>
         </p:spPr>
         <p:txBody>
-          <a:bodyPr wrap="square" lIns="27432" rIns="27432" tIns="27432" bIns="27432" anchor="ctr">
+          <a:bodyPr wrap="square" lIns="27432" tIns="27432" rIns="27432" bIns="27432" anchor="ctr">
             <a:spAutoFit/>
           </a:bodyPr>
           <a:lstStyle/>
@@ -3543,7 +3550,7 @@
           <a:noFill/>
         </p:spPr>
         <p:txBody>
-          <a:bodyPr wrap="square" lIns="27432" rIns="27432" tIns="27432" bIns="27432" anchor="t">
+          <a:bodyPr wrap="square" lIns="27432" tIns="27432" rIns="27432" bIns="27432" anchor="t">
             <a:spAutoFit/>
           </a:bodyPr>
           <a:lstStyle/>
@@ -3570,7 +3577,7 @@
 </file>
 
 <file path=ppt/slides/slide10.xml><?xml version="1.0" encoding="utf-8"?>
-<p:sld xmlns:a="http://schemas.openxmlformats.org/drawingml/2006/main" xmlns:p="http://schemas.openxmlformats.org/presentationml/2006/main" xmlns:r="http://schemas.openxmlformats.org/officeDocument/2006/relationships">
+<p:sld xmlns:a="http://schemas.openxmlformats.org/drawingml/2006/main" xmlns:r="http://schemas.openxmlformats.org/officeDocument/2006/relationships" xmlns:p="http://schemas.openxmlformats.org/presentationml/2006/main">
   <p:cSld>
     <p:spTree>
       <p:nvGrpSpPr>
@@ -3578,7 +3585,14 @@
         <p:cNvGrpSpPr/>
         <p:nvPr/>
       </p:nvGrpSpPr>
-      <p:grpSpPr/>
+      <p:grpSpPr>
+        <a:xfrm>
+          <a:off x="0" y="0"/>
+          <a:ext cx="0" cy="0"/>
+          <a:chOff x="0" y="0"/>
+          <a:chExt cx="0" cy="0"/>
+        </a:xfrm>
+      </p:grpSpPr>
       <p:sp>
         <p:nvSpPr>
           <p:cNvPr id="2" name="Rectangle 1"/>
@@ -3619,6 +3633,7 @@
           <a:lstStyle/>
           <a:p>
             <a:pPr algn="ctr"/>
+            <a:endParaRPr/>
           </a:p>
         </p:txBody>
       </p:sp>
@@ -3662,6 +3677,7 @@
           <a:lstStyle/>
           <a:p>
             <a:pPr algn="ctr"/>
+            <a:endParaRPr/>
           </a:p>
         </p:txBody>
       </p:sp>
@@ -3810,6 +3826,7 @@
           <a:lstStyle/>
           <a:p>
             <a:pPr algn="ctr"/>
+            <a:endParaRPr/>
           </a:p>
         </p:txBody>
       </p:sp>
@@ -3853,6 +3870,7 @@
           <a:lstStyle/>
           <a:p>
             <a:pPr algn="ctr"/>
+            <a:endParaRPr/>
           </a:p>
         </p:txBody>
       </p:sp>
@@ -3873,7 +3891,7 @@
           <a:noFill/>
         </p:spPr>
         <p:txBody>
-          <a:bodyPr wrap="square" lIns="27432" rIns="27432" tIns="27432" bIns="27432" anchor="t">
+          <a:bodyPr wrap="square" lIns="27432" tIns="27432" rIns="27432" bIns="27432" anchor="t">
             <a:spAutoFit/>
           </a:bodyPr>
           <a:lstStyle/>
@@ -3908,7 +3926,7 @@
           <a:noFill/>
         </p:spPr>
         <p:txBody>
-          <a:bodyPr wrap="square" lIns="27432" rIns="27432" tIns="27432" bIns="27432" anchor="t">
+          <a:bodyPr wrap="square" lIns="27432" tIns="27432" rIns="27432" bIns="27432" anchor="t">
             <a:spAutoFit/>
           </a:bodyPr>
           <a:lstStyle/>
@@ -3968,6 +3986,7 @@
           <a:lstStyle/>
           <a:p>
             <a:pPr algn="ctr"/>
+            <a:endParaRPr/>
           </a:p>
         </p:txBody>
       </p:sp>
@@ -4011,6 +4030,7 @@
           <a:lstStyle/>
           <a:p>
             <a:pPr algn="ctr"/>
+            <a:endParaRPr/>
           </a:p>
         </p:txBody>
       </p:sp>
@@ -4031,7 +4051,7 @@
           <a:noFill/>
         </p:spPr>
         <p:txBody>
-          <a:bodyPr wrap="square" lIns="27432" rIns="27432" tIns="27432" bIns="27432" anchor="t">
+          <a:bodyPr wrap="square" lIns="27432" tIns="27432" rIns="27432" bIns="27432" anchor="t">
             <a:spAutoFit/>
           </a:bodyPr>
           <a:lstStyle/>
@@ -4066,7 +4086,7 @@
           <a:noFill/>
         </p:spPr>
         <p:txBody>
-          <a:bodyPr wrap="square" lIns="27432" rIns="27432" tIns="27432" bIns="27432" anchor="t">
+          <a:bodyPr wrap="square" lIns="27432" tIns="27432" rIns="27432" bIns="27432" anchor="t">
             <a:spAutoFit/>
           </a:bodyPr>
           <a:lstStyle/>
@@ -4126,6 +4146,7 @@
           <a:lstStyle/>
           <a:p>
             <a:pPr algn="ctr"/>
+            <a:endParaRPr/>
           </a:p>
         </p:txBody>
       </p:sp>
@@ -4169,6 +4190,7 @@
           <a:lstStyle/>
           <a:p>
             <a:pPr algn="ctr"/>
+            <a:endParaRPr/>
           </a:p>
         </p:txBody>
       </p:sp>
@@ -4189,7 +4211,7 @@
           <a:noFill/>
         </p:spPr>
         <p:txBody>
-          <a:bodyPr wrap="square" lIns="27432" rIns="27432" tIns="27432" bIns="27432" anchor="t">
+          <a:bodyPr wrap="square" lIns="27432" tIns="27432" rIns="27432" bIns="27432" anchor="t">
             <a:spAutoFit/>
           </a:bodyPr>
           <a:lstStyle/>
@@ -4224,7 +4246,7 @@
           <a:noFill/>
         </p:spPr>
         <p:txBody>
-          <a:bodyPr wrap="square" lIns="27432" rIns="27432" tIns="27432" bIns="27432" anchor="t">
+          <a:bodyPr wrap="square" lIns="27432" tIns="27432" rIns="27432" bIns="27432" anchor="t">
             <a:spAutoFit/>
           </a:bodyPr>
           <a:lstStyle/>
@@ -4259,7 +4281,7 @@
           <a:noFill/>
         </p:spPr>
         <p:txBody>
-          <a:bodyPr wrap="square" lIns="27432" rIns="27432" tIns="27432" bIns="27432" anchor="t">
+          <a:bodyPr wrap="square" lIns="27432" tIns="27432" rIns="27432" bIns="27432" anchor="t">
             <a:spAutoFit/>
           </a:bodyPr>
           <a:lstStyle/>
@@ -4320,7 +4342,7 @@
 </file>
 
 <file path=ppt/slides/slide11.xml><?xml version="1.0" encoding="utf-8"?>
-<p:sld xmlns:a="http://schemas.openxmlformats.org/drawingml/2006/main" xmlns:p="http://schemas.openxmlformats.org/presentationml/2006/main" xmlns:r="http://schemas.openxmlformats.org/officeDocument/2006/relationships">
+<p:sld xmlns:a="http://schemas.openxmlformats.org/drawingml/2006/main" xmlns:r="http://schemas.openxmlformats.org/officeDocument/2006/relationships" xmlns:p="http://schemas.openxmlformats.org/presentationml/2006/main">
   <p:cSld>
     <p:spTree>
       <p:nvGrpSpPr>
@@ -4328,7 +4350,14 @@
         <p:cNvGrpSpPr/>
         <p:nvPr/>
       </p:nvGrpSpPr>
-      <p:grpSpPr/>
+      <p:grpSpPr>
+        <a:xfrm>
+          <a:off x="0" y="0"/>
+          <a:ext cx="0" cy="0"/>
+          <a:chOff x="0" y="0"/>
+          <a:chExt cx="0" cy="0"/>
+        </a:xfrm>
+      </p:grpSpPr>
       <p:sp>
         <p:nvSpPr>
           <p:cNvPr id="2" name="Rectangle 1"/>
@@ -4369,6 +4398,7 @@
           <a:lstStyle/>
           <a:p>
             <a:pPr algn="ctr"/>
+            <a:endParaRPr/>
           </a:p>
         </p:txBody>
       </p:sp>
@@ -4412,6 +4442,7 @@
           <a:lstStyle/>
           <a:p>
             <a:pPr algn="ctr"/>
+            <a:endParaRPr/>
           </a:p>
         </p:txBody>
       </p:sp>
@@ -4558,6 +4589,7 @@
           <a:lstStyle/>
           <a:p>
             <a:pPr algn="ctr"/>
+            <a:endParaRPr/>
           </a:p>
         </p:txBody>
       </p:sp>
@@ -4578,7 +4610,7 @@
           <a:noFill/>
         </p:spPr>
         <p:txBody>
-          <a:bodyPr wrap="square" lIns="27432" rIns="27432" tIns="27432" bIns="27432" anchor="ctr">
+          <a:bodyPr wrap="square" lIns="27432" tIns="27432" rIns="27432" bIns="27432" anchor="ctr">
             <a:spAutoFit/>
           </a:bodyPr>
           <a:lstStyle/>
@@ -4613,7 +4645,7 @@
           <a:noFill/>
         </p:spPr>
         <p:txBody>
-          <a:bodyPr wrap="square" lIns="27432" rIns="27432" tIns="27432" bIns="27432" anchor="t">
+          <a:bodyPr wrap="square" lIns="27432" tIns="27432" rIns="27432" bIns="27432" anchor="t">
             <a:spAutoFit/>
           </a:bodyPr>
           <a:lstStyle/>
@@ -4648,15 +4680,13 @@
           <a:noFill/>
         </p:spPr>
         <p:txBody>
-          <a:bodyPr wrap="square" lIns="27432" rIns="27432" tIns="27432" bIns="27432" anchor="ctr">
+          <a:bodyPr wrap="square" lIns="27432" tIns="27432" rIns="27432" bIns="27432" anchor="ctr">
             <a:spAutoFit/>
           </a:bodyPr>
           <a:lstStyle/>
           <a:p>
             <a:pPr algn="l"/>
-            <a:r>
-              <a:t/>
-            </a:r>
+            <a:endParaRPr/>
           </a:p>
         </p:txBody>
       </p:sp>
@@ -4700,6 +4730,7 @@
           <a:lstStyle/>
           <a:p>
             <a:pPr algn="ctr"/>
+            <a:endParaRPr/>
           </a:p>
         </p:txBody>
       </p:sp>
@@ -4720,7 +4751,7 @@
           <a:noFill/>
         </p:spPr>
         <p:txBody>
-          <a:bodyPr wrap="square" lIns="27432" rIns="27432" tIns="27432" bIns="27432" anchor="ctr">
+          <a:bodyPr wrap="square" lIns="27432" tIns="27432" rIns="27432" bIns="27432" anchor="ctr">
             <a:spAutoFit/>
           </a:bodyPr>
           <a:lstStyle/>
@@ -4734,41 +4765,6 @@
                 <a:latin typeface="Aptos"/>
               </a:rPr>
               <a:t>BOOK QUESTION</a:t>
-            </a:r>
-          </a:p>
-        </p:txBody>
-      </p:sp>
-      <p:sp>
-        <p:nvSpPr>
-          <p:cNvPr id="13" name="TextBox 12"/>
-          <p:cNvSpPr txBox="1"/>
-          <p:nvPr/>
-        </p:nvSpPr>
-        <p:spPr>
-          <a:xfrm>
-            <a:off x="548640" y="1417320"/>
-            <a:ext cx="10972800" cy="731520"/>
-          </a:xfrm>
-          <a:prstGeom prst="rect">
-            <a:avLst/>
-          </a:prstGeom>
-          <a:noFill/>
-        </p:spPr>
-        <p:txBody>
-          <a:bodyPr wrap="square" lIns="27432" rIns="27432" tIns="27432" bIns="27432" anchor="t">
-            <a:spAutoFit/>
-          </a:bodyPr>
-          <a:lstStyle/>
-          <a:p>
-            <a:pPr algn="l"/>
-            <a:r>
-              <a:rPr sz="2200" b="1">
-                <a:solidFill>
-                  <a:srgbClr val="122A42"/>
-                </a:solidFill>
-                <a:latin typeface="Aptos"/>
-              </a:rPr>
-              <a:t>Which option gives the correct chronological order?</a:t>
             </a:r>
           </a:p>
         </p:txBody>
@@ -4815,6 +4811,7 @@
           <a:lstStyle/>
           <a:p>
             <a:pPr algn="ctr"/>
+            <a:endParaRPr/>
           </a:p>
         </p:txBody>
       </p:sp>
@@ -4835,7 +4832,7 @@
           <a:noFill/>
         </p:spPr>
         <p:txBody>
-          <a:bodyPr wrap="square" lIns="27432" rIns="27432" tIns="27432" bIns="27432" anchor="t">
+          <a:bodyPr wrap="square" lIns="27432" tIns="27432" rIns="27432" bIns="27432" anchor="t">
             <a:spAutoFit/>
           </a:bodyPr>
           <a:lstStyle/>
@@ -4870,7 +4867,7 @@
           <a:noFill/>
         </p:spPr>
         <p:txBody>
-          <a:bodyPr wrap="square" lIns="27432" rIns="27432" tIns="27432" bIns="27432" anchor="t">
+          <a:bodyPr wrap="square" lIns="27432" tIns="27432" rIns="27432" bIns="27432" anchor="t">
             <a:spAutoFit/>
           </a:bodyPr>
           <a:lstStyle/>
@@ -4930,6 +4927,7 @@
           <a:lstStyle/>
           <a:p>
             <a:pPr algn="ctr"/>
+            <a:endParaRPr/>
           </a:p>
         </p:txBody>
       </p:sp>
@@ -4950,7 +4948,7 @@
           <a:noFill/>
         </p:spPr>
         <p:txBody>
-          <a:bodyPr wrap="square" lIns="27432" rIns="27432" tIns="27432" bIns="27432" anchor="t">
+          <a:bodyPr wrap="square" lIns="27432" tIns="27432" rIns="27432" bIns="27432" anchor="t">
             <a:spAutoFit/>
           </a:bodyPr>
           <a:lstStyle/>
@@ -4985,7 +4983,7 @@
           <a:noFill/>
         </p:spPr>
         <p:txBody>
-          <a:bodyPr wrap="square" lIns="27432" rIns="27432" tIns="27432" bIns="27432" anchor="t">
+          <a:bodyPr wrap="square" lIns="27432" tIns="27432" rIns="27432" bIns="27432" anchor="t">
             <a:spAutoFit/>
           </a:bodyPr>
           <a:lstStyle/>
@@ -5045,6 +5043,7 @@
           <a:lstStyle/>
           <a:p>
             <a:pPr algn="ctr"/>
+            <a:endParaRPr/>
           </a:p>
         </p:txBody>
       </p:sp>
@@ -5065,7 +5064,7 @@
           <a:noFill/>
         </p:spPr>
         <p:txBody>
-          <a:bodyPr wrap="square" lIns="27432" rIns="27432" tIns="27432" bIns="27432" anchor="t">
+          <a:bodyPr wrap="square" lIns="27432" tIns="27432" rIns="27432" bIns="27432" anchor="t">
             <a:spAutoFit/>
           </a:bodyPr>
           <a:lstStyle/>
@@ -5100,7 +5099,7 @@
           <a:noFill/>
         </p:spPr>
         <p:txBody>
-          <a:bodyPr wrap="square" lIns="27432" rIns="27432" tIns="27432" bIns="27432" anchor="t">
+          <a:bodyPr wrap="square" lIns="27432" tIns="27432" rIns="27432" bIns="27432" anchor="t">
             <a:spAutoFit/>
           </a:bodyPr>
           <a:lstStyle/>
@@ -5160,6 +5159,7 @@
           <a:lstStyle/>
           <a:p>
             <a:pPr algn="ctr"/>
+            <a:endParaRPr/>
           </a:p>
         </p:txBody>
       </p:sp>
@@ -5180,7 +5180,7 @@
           <a:noFill/>
         </p:spPr>
         <p:txBody>
-          <a:bodyPr wrap="square" lIns="27432" rIns="27432" tIns="27432" bIns="27432" anchor="t">
+          <a:bodyPr wrap="square" lIns="27432" tIns="27432" rIns="27432" bIns="27432" anchor="t">
             <a:spAutoFit/>
           </a:bodyPr>
           <a:lstStyle/>
@@ -5215,7 +5215,7 @@
           <a:noFill/>
         </p:spPr>
         <p:txBody>
-          <a:bodyPr wrap="square" lIns="27432" rIns="27432" tIns="27432" bIns="27432" anchor="t">
+          <a:bodyPr wrap="square" lIns="27432" tIns="27432" rIns="27432" bIns="27432" anchor="t">
             <a:spAutoFit/>
           </a:bodyPr>
           <a:lstStyle/>
@@ -5276,7 +5276,7 @@
 </file>
 
 <file path=ppt/slides/slide12.xml><?xml version="1.0" encoding="utf-8"?>
-<p:sld xmlns:a="http://schemas.openxmlformats.org/drawingml/2006/main" xmlns:p="http://schemas.openxmlformats.org/presentationml/2006/main" xmlns:r="http://schemas.openxmlformats.org/officeDocument/2006/relationships">
+<p:sld xmlns:a="http://schemas.openxmlformats.org/drawingml/2006/main" xmlns:r="http://schemas.openxmlformats.org/officeDocument/2006/relationships" xmlns:p="http://schemas.openxmlformats.org/presentationml/2006/main">
   <p:cSld>
     <p:spTree>
       <p:nvGrpSpPr>
@@ -5284,7 +5284,14 @@
         <p:cNvGrpSpPr/>
         <p:nvPr/>
       </p:nvGrpSpPr>
-      <p:grpSpPr/>
+      <p:grpSpPr>
+        <a:xfrm>
+          <a:off x="0" y="0"/>
+          <a:ext cx="0" cy="0"/>
+          <a:chOff x="0" y="0"/>
+          <a:chExt cx="0" cy="0"/>
+        </a:xfrm>
+      </p:grpSpPr>
       <p:sp>
         <p:nvSpPr>
           <p:cNvPr id="2" name="Rectangle 1"/>
@@ -5325,6 +5332,7 @@
           <a:lstStyle/>
           <a:p>
             <a:pPr algn="ctr"/>
+            <a:endParaRPr/>
           </a:p>
         </p:txBody>
       </p:sp>
@@ -5368,6 +5376,7 @@
           <a:lstStyle/>
           <a:p>
             <a:pPr algn="ctr"/>
+            <a:endParaRPr/>
           </a:p>
         </p:txBody>
       </p:sp>
@@ -5514,6 +5523,7 @@
           <a:lstStyle/>
           <a:p>
             <a:pPr algn="ctr"/>
+            <a:endParaRPr/>
           </a:p>
         </p:txBody>
       </p:sp>
@@ -5534,7 +5544,7 @@
           <a:noFill/>
         </p:spPr>
         <p:txBody>
-          <a:bodyPr wrap="square" lIns="27432" rIns="27432" tIns="27432" bIns="27432" anchor="ctr">
+          <a:bodyPr wrap="square" lIns="27432" tIns="27432" rIns="27432" bIns="27432" anchor="ctr">
             <a:spAutoFit/>
           </a:bodyPr>
           <a:lstStyle/>
@@ -5569,7 +5579,7 @@
           <a:noFill/>
         </p:spPr>
         <p:txBody>
-          <a:bodyPr wrap="square" lIns="27432" rIns="27432" tIns="27432" bIns="27432" anchor="t">
+          <a:bodyPr wrap="square" lIns="27432" tIns="27432" rIns="27432" bIns="27432" anchor="t">
             <a:spAutoFit/>
           </a:bodyPr>
           <a:lstStyle/>
@@ -5629,6 +5639,7 @@
           <a:lstStyle/>
           <a:p>
             <a:pPr algn="ctr"/>
+            <a:endParaRPr/>
           </a:p>
         </p:txBody>
       </p:sp>
@@ -5672,6 +5683,7 @@
           <a:lstStyle/>
           <a:p>
             <a:pPr algn="ctr"/>
+            <a:endParaRPr/>
           </a:p>
         </p:txBody>
       </p:sp>
@@ -5692,7 +5704,7 @@
           <a:noFill/>
         </p:spPr>
         <p:txBody>
-          <a:bodyPr wrap="square" lIns="27432" rIns="27432" tIns="27432" bIns="27432" anchor="t">
+          <a:bodyPr wrap="square" lIns="27432" tIns="27432" rIns="27432" bIns="27432" anchor="t">
             <a:spAutoFit/>
           </a:bodyPr>
           <a:lstStyle/>
@@ -5727,7 +5739,7 @@
           <a:noFill/>
         </p:spPr>
         <p:txBody>
-          <a:bodyPr wrap="square" lIns="27432" rIns="27432" tIns="27432" bIns="27432" anchor="t">
+          <a:bodyPr wrap="square" lIns="27432" tIns="27432" rIns="27432" bIns="27432" anchor="t">
             <a:spAutoFit/>
           </a:bodyPr>
           <a:lstStyle/>
@@ -5762,7 +5774,7 @@
           <a:noFill/>
         </p:spPr>
         <p:txBody>
-          <a:bodyPr wrap="square" lIns="27432" rIns="27432" tIns="27432" bIns="27432" anchor="t">
+          <a:bodyPr wrap="square" lIns="27432" tIns="27432" rIns="27432" bIns="27432" anchor="t">
             <a:spAutoFit/>
           </a:bodyPr>
           <a:lstStyle/>
@@ -5823,7 +5835,7 @@
 </file>
 
 <file path=ppt/slides/slide13.xml><?xml version="1.0" encoding="utf-8"?>
-<p:sld xmlns:a="http://schemas.openxmlformats.org/drawingml/2006/main" xmlns:p="http://schemas.openxmlformats.org/presentationml/2006/main" xmlns:r="http://schemas.openxmlformats.org/officeDocument/2006/relationships">
+<p:sld xmlns:a="http://schemas.openxmlformats.org/drawingml/2006/main" xmlns:r="http://schemas.openxmlformats.org/officeDocument/2006/relationships" xmlns:p="http://schemas.openxmlformats.org/presentationml/2006/main">
   <p:cSld>
     <p:spTree>
       <p:nvGrpSpPr>
@@ -5831,7 +5843,14 @@
         <p:cNvGrpSpPr/>
         <p:nvPr/>
       </p:nvGrpSpPr>
-      <p:grpSpPr/>
+      <p:grpSpPr>
+        <a:xfrm>
+          <a:off x="0" y="0"/>
+          <a:ext cx="0" cy="0"/>
+          <a:chOff x="0" y="0"/>
+          <a:chExt cx="0" cy="0"/>
+        </a:xfrm>
+      </p:grpSpPr>
       <p:sp>
         <p:nvSpPr>
           <p:cNvPr id="2" name="Rectangle 1"/>
@@ -5872,6 +5891,7 @@
           <a:lstStyle/>
           <a:p>
             <a:pPr algn="ctr"/>
+            <a:endParaRPr/>
           </a:p>
         </p:txBody>
       </p:sp>
@@ -5915,6 +5935,7 @@
           <a:lstStyle/>
           <a:p>
             <a:pPr algn="ctr"/>
+            <a:endParaRPr/>
           </a:p>
         </p:txBody>
       </p:sp>
@@ -6061,6 +6082,7 @@
           <a:lstStyle/>
           <a:p>
             <a:pPr algn="ctr"/>
+            <a:endParaRPr/>
           </a:p>
         </p:txBody>
       </p:sp>
@@ -6081,7 +6103,7 @@
           <a:noFill/>
         </p:spPr>
         <p:txBody>
-          <a:bodyPr wrap="square" lIns="27432" rIns="27432" tIns="27432" bIns="27432" anchor="ctr">
+          <a:bodyPr wrap="square" lIns="27432" tIns="27432" rIns="27432" bIns="27432" anchor="ctr">
             <a:spAutoFit/>
           </a:bodyPr>
           <a:lstStyle/>
@@ -6116,7 +6138,7 @@
           <a:noFill/>
         </p:spPr>
         <p:txBody>
-          <a:bodyPr wrap="square" lIns="36576" rIns="36576" tIns="27432" bIns="27432">
+          <a:bodyPr wrap="square" lIns="36576" tIns="27432" rIns="36576" bIns="27432">
             <a:spAutoFit/>
           </a:bodyPr>
           <a:lstStyle/>
@@ -6219,7 +6241,7 @@
           <a:noFill/>
         </p:spPr>
         <p:txBody>
-          <a:bodyPr wrap="square" lIns="27432" rIns="27432" tIns="27432" bIns="27432" anchor="t">
+          <a:bodyPr wrap="square" lIns="27432" tIns="27432" rIns="27432" bIns="27432" anchor="t">
             <a:spAutoFit/>
           </a:bodyPr>
           <a:lstStyle/>
@@ -6280,7 +6302,7 @@
 </file>
 
 <file path=ppt/slides/slide14.xml><?xml version="1.0" encoding="utf-8"?>
-<p:sld xmlns:a="http://schemas.openxmlformats.org/drawingml/2006/main" xmlns:p="http://schemas.openxmlformats.org/presentationml/2006/main" xmlns:r="http://schemas.openxmlformats.org/officeDocument/2006/relationships">
+<p:sld xmlns:a="http://schemas.openxmlformats.org/drawingml/2006/main" xmlns:r="http://schemas.openxmlformats.org/officeDocument/2006/relationships" xmlns:p="http://schemas.openxmlformats.org/presentationml/2006/main">
   <p:cSld>
     <p:spTree>
       <p:nvGrpSpPr>
@@ -6288,7 +6310,14 @@
         <p:cNvGrpSpPr/>
         <p:nvPr/>
       </p:nvGrpSpPr>
-      <p:grpSpPr/>
+      <p:grpSpPr>
+        <a:xfrm>
+          <a:off x="0" y="0"/>
+          <a:ext cx="0" cy="0"/>
+          <a:chOff x="0" y="0"/>
+          <a:chExt cx="0" cy="0"/>
+        </a:xfrm>
+      </p:grpSpPr>
       <p:sp>
         <p:nvSpPr>
           <p:cNvPr id="2" name="Rectangle 1"/>
@@ -6329,6 +6358,7 @@
           <a:lstStyle/>
           <a:p>
             <a:pPr algn="ctr"/>
+            <a:endParaRPr/>
           </a:p>
         </p:txBody>
       </p:sp>
@@ -6372,6 +6402,7 @@
           <a:lstStyle/>
           <a:p>
             <a:pPr algn="ctr"/>
+            <a:endParaRPr/>
           </a:p>
         </p:txBody>
       </p:sp>
@@ -6520,6 +6551,7 @@
           <a:lstStyle/>
           <a:p>
             <a:pPr algn="ctr"/>
+            <a:endParaRPr/>
           </a:p>
         </p:txBody>
       </p:sp>
@@ -6563,6 +6595,7 @@
           <a:lstStyle/>
           <a:p>
             <a:pPr algn="ctr"/>
+            <a:endParaRPr/>
           </a:p>
         </p:txBody>
       </p:sp>
@@ -6583,7 +6616,7 @@
           <a:noFill/>
         </p:spPr>
         <p:txBody>
-          <a:bodyPr wrap="square" lIns="27432" rIns="27432" tIns="27432" bIns="27432" anchor="t">
+          <a:bodyPr wrap="square" lIns="27432" tIns="27432" rIns="27432" bIns="27432" anchor="t">
             <a:spAutoFit/>
           </a:bodyPr>
           <a:lstStyle/>
@@ -6618,21 +6651,13 @@
           <a:noFill/>
         </p:spPr>
         <p:txBody>
-          <a:bodyPr wrap="square" lIns="27432" rIns="27432" tIns="27432" bIns="27432" anchor="t">
+          <a:bodyPr wrap="square" lIns="27432" tIns="27432" rIns="27432" bIns="27432" anchor="t">
             <a:spAutoFit/>
           </a:bodyPr>
           <a:lstStyle/>
           <a:p>
             <a:pPr algn="l"/>
-            <a:r>
-              <a:rPr sz="1100" b="0">
-                <a:solidFill>
-                  <a:srgbClr val="26303A"/>
-                </a:solidFill>
-                <a:latin typeface="Aptos"/>
-              </a:rPr>
-              <a:t/>
-            </a:r>
+            <a:endParaRPr/>
           </a:p>
         </p:txBody>
       </p:sp>
@@ -6678,6 +6703,7 @@
           <a:lstStyle/>
           <a:p>
             <a:pPr algn="ctr"/>
+            <a:endParaRPr/>
           </a:p>
         </p:txBody>
       </p:sp>
@@ -6721,6 +6747,7 @@
           <a:lstStyle/>
           <a:p>
             <a:pPr algn="ctr"/>
+            <a:endParaRPr/>
           </a:p>
         </p:txBody>
       </p:sp>
@@ -6741,7 +6768,7 @@
           <a:noFill/>
         </p:spPr>
         <p:txBody>
-          <a:bodyPr wrap="square" lIns="27432" rIns="27432" tIns="27432" bIns="27432" anchor="t">
+          <a:bodyPr wrap="square" lIns="27432" tIns="27432" rIns="27432" bIns="27432" anchor="t">
             <a:spAutoFit/>
           </a:bodyPr>
           <a:lstStyle/>
@@ -6776,21 +6803,13 @@
           <a:noFill/>
         </p:spPr>
         <p:txBody>
-          <a:bodyPr wrap="square" lIns="27432" rIns="27432" tIns="27432" bIns="27432" anchor="t">
+          <a:bodyPr wrap="square" lIns="27432" tIns="27432" rIns="27432" bIns="27432" anchor="t">
             <a:spAutoFit/>
           </a:bodyPr>
           <a:lstStyle/>
           <a:p>
             <a:pPr algn="l"/>
-            <a:r>
-              <a:rPr sz="1100" b="0">
-                <a:solidFill>
-                  <a:srgbClr val="26303A"/>
-                </a:solidFill>
-                <a:latin typeface="Aptos"/>
-              </a:rPr>
-              <a:t/>
-            </a:r>
+            <a:endParaRPr/>
           </a:p>
         </p:txBody>
       </p:sp>
@@ -6836,6 +6855,7 @@
           <a:lstStyle/>
           <a:p>
             <a:pPr algn="ctr"/>
+            <a:endParaRPr/>
           </a:p>
         </p:txBody>
       </p:sp>
@@ -6879,6 +6899,7 @@
           <a:lstStyle/>
           <a:p>
             <a:pPr algn="ctr"/>
+            <a:endParaRPr/>
           </a:p>
         </p:txBody>
       </p:sp>
@@ -6899,7 +6920,7 @@
           <a:noFill/>
         </p:spPr>
         <p:txBody>
-          <a:bodyPr wrap="square" lIns="27432" rIns="27432" tIns="27432" bIns="27432" anchor="t">
+          <a:bodyPr wrap="square" lIns="27432" tIns="27432" rIns="27432" bIns="27432" anchor="t">
             <a:spAutoFit/>
           </a:bodyPr>
           <a:lstStyle/>
@@ -6934,21 +6955,13 @@
           <a:noFill/>
         </p:spPr>
         <p:txBody>
-          <a:bodyPr wrap="square" lIns="27432" rIns="27432" tIns="27432" bIns="27432" anchor="t">
+          <a:bodyPr wrap="square" lIns="27432" tIns="27432" rIns="27432" bIns="27432" anchor="t">
             <a:spAutoFit/>
           </a:bodyPr>
           <a:lstStyle/>
           <a:p>
             <a:pPr algn="l"/>
-            <a:r>
-              <a:rPr sz="1100" b="0">
-                <a:solidFill>
-                  <a:srgbClr val="26303A"/>
-                </a:solidFill>
-                <a:latin typeface="Aptos"/>
-              </a:rPr>
-              <a:t/>
-            </a:r>
+            <a:endParaRPr/>
           </a:p>
         </p:txBody>
       </p:sp>
@@ -6994,6 +7007,7 @@
           <a:lstStyle/>
           <a:p>
             <a:pPr algn="ctr"/>
+            <a:endParaRPr/>
           </a:p>
         </p:txBody>
       </p:sp>
@@ -7037,6 +7051,7 @@
           <a:lstStyle/>
           <a:p>
             <a:pPr algn="ctr"/>
+            <a:endParaRPr/>
           </a:p>
         </p:txBody>
       </p:sp>
@@ -7057,7 +7072,7 @@
           <a:noFill/>
         </p:spPr>
         <p:txBody>
-          <a:bodyPr wrap="square" lIns="27432" rIns="27432" tIns="27432" bIns="27432" anchor="t">
+          <a:bodyPr wrap="square" lIns="27432" tIns="27432" rIns="27432" bIns="27432" anchor="t">
             <a:spAutoFit/>
           </a:bodyPr>
           <a:lstStyle/>
@@ -7092,21 +7107,13 @@
           <a:noFill/>
         </p:spPr>
         <p:txBody>
-          <a:bodyPr wrap="square" lIns="27432" rIns="27432" tIns="27432" bIns="27432" anchor="t">
+          <a:bodyPr wrap="square" lIns="27432" tIns="27432" rIns="27432" bIns="27432" anchor="t">
             <a:spAutoFit/>
           </a:bodyPr>
           <a:lstStyle/>
           <a:p>
             <a:pPr algn="l"/>
-            <a:r>
-              <a:rPr sz="1100" b="0">
-                <a:solidFill>
-                  <a:srgbClr val="26303A"/>
-                </a:solidFill>
-                <a:latin typeface="Aptos"/>
-              </a:rPr>
-              <a:t/>
-            </a:r>
+            <a:endParaRPr/>
           </a:p>
         </p:txBody>
       </p:sp>
@@ -7152,6 +7159,7 @@
           <a:lstStyle/>
           <a:p>
             <a:pPr algn="ctr"/>
+            <a:endParaRPr/>
           </a:p>
         </p:txBody>
       </p:sp>
@@ -7195,6 +7203,7 @@
           <a:lstStyle/>
           <a:p>
             <a:pPr algn="ctr"/>
+            <a:endParaRPr/>
           </a:p>
         </p:txBody>
       </p:sp>
@@ -7215,7 +7224,7 @@
           <a:noFill/>
         </p:spPr>
         <p:txBody>
-          <a:bodyPr wrap="square" lIns="27432" rIns="27432" tIns="27432" bIns="27432" anchor="t">
+          <a:bodyPr wrap="square" lIns="27432" tIns="27432" rIns="27432" bIns="27432" anchor="t">
             <a:spAutoFit/>
           </a:bodyPr>
           <a:lstStyle/>
@@ -7250,21 +7259,13 @@
           <a:noFill/>
         </p:spPr>
         <p:txBody>
-          <a:bodyPr wrap="square" lIns="27432" rIns="27432" tIns="27432" bIns="27432" anchor="t">
+          <a:bodyPr wrap="square" lIns="27432" tIns="27432" rIns="27432" bIns="27432" anchor="t">
             <a:spAutoFit/>
           </a:bodyPr>
           <a:lstStyle/>
           <a:p>
             <a:pPr algn="l"/>
-            <a:r>
-              <a:rPr sz="1100" b="0">
-                <a:solidFill>
-                  <a:srgbClr val="26303A"/>
-                </a:solidFill>
-                <a:latin typeface="Aptos"/>
-              </a:rPr>
-              <a:t/>
-            </a:r>
+            <a:endParaRPr/>
           </a:p>
         </p:txBody>
       </p:sp>
@@ -7285,7 +7286,7 @@
           <a:noFill/>
         </p:spPr>
         <p:txBody>
-          <a:bodyPr wrap="square" lIns="27432" rIns="27432" tIns="27432" bIns="27432" anchor="t">
+          <a:bodyPr wrap="square" lIns="27432" tIns="27432" rIns="27432" bIns="27432" anchor="t">
             <a:spAutoFit/>
           </a:bodyPr>
           <a:lstStyle/>
@@ -7346,7 +7347,7 @@
 </file>
 
 <file path=ppt/slides/slide15.xml><?xml version="1.0" encoding="utf-8"?>
-<p:sld xmlns:a="http://schemas.openxmlformats.org/drawingml/2006/main" xmlns:p="http://schemas.openxmlformats.org/presentationml/2006/main" xmlns:r="http://schemas.openxmlformats.org/officeDocument/2006/relationships">
+<p:sld xmlns:a="http://schemas.openxmlformats.org/drawingml/2006/main" xmlns:r="http://schemas.openxmlformats.org/officeDocument/2006/relationships" xmlns:p="http://schemas.openxmlformats.org/presentationml/2006/main">
   <p:cSld>
     <p:spTree>
       <p:nvGrpSpPr>
@@ -7354,7 +7355,14 @@
         <p:cNvGrpSpPr/>
         <p:nvPr/>
       </p:nvGrpSpPr>
-      <p:grpSpPr/>
+      <p:grpSpPr>
+        <a:xfrm>
+          <a:off x="0" y="0"/>
+          <a:ext cx="0" cy="0"/>
+          <a:chOff x="0" y="0"/>
+          <a:chExt cx="0" cy="0"/>
+        </a:xfrm>
+      </p:grpSpPr>
       <p:sp>
         <p:nvSpPr>
           <p:cNvPr id="2" name="Rectangle 1"/>
@@ -7395,6 +7403,7 @@
           <a:lstStyle/>
           <a:p>
             <a:pPr algn="ctr"/>
+            <a:endParaRPr/>
           </a:p>
         </p:txBody>
       </p:sp>
@@ -7438,6 +7447,7 @@
           <a:lstStyle/>
           <a:p>
             <a:pPr algn="ctr"/>
+            <a:endParaRPr/>
           </a:p>
         </p:txBody>
       </p:sp>
@@ -7584,6 +7594,7 @@
           <a:lstStyle/>
           <a:p>
             <a:pPr algn="ctr"/>
+            <a:endParaRPr/>
           </a:p>
         </p:txBody>
       </p:sp>
@@ -7604,7 +7615,7 @@
           <a:noFill/>
         </p:spPr>
         <p:txBody>
-          <a:bodyPr wrap="square" lIns="27432" rIns="27432" tIns="27432" bIns="27432" anchor="ctr">
+          <a:bodyPr wrap="square" lIns="27432" tIns="27432" rIns="27432" bIns="27432" anchor="ctr">
             <a:spAutoFit/>
           </a:bodyPr>
           <a:lstStyle/>
@@ -7639,7 +7650,7 @@
           <a:noFill/>
         </p:spPr>
         <p:txBody>
-          <a:bodyPr wrap="square" lIns="27432" rIns="27432" tIns="27432" bIns="27432" anchor="t">
+          <a:bodyPr wrap="square" lIns="27432" tIns="27432" rIns="27432" bIns="27432" anchor="t">
             <a:spAutoFit/>
           </a:bodyPr>
           <a:lstStyle/>
@@ -7699,6 +7710,7 @@
           <a:lstStyle/>
           <a:p>
             <a:pPr algn="ctr"/>
+            <a:endParaRPr/>
           </a:p>
         </p:txBody>
       </p:sp>
@@ -7719,7 +7731,7 @@
           <a:noFill/>
         </p:spPr>
         <p:txBody>
-          <a:bodyPr wrap="square" lIns="27432" rIns="27432" tIns="27432" bIns="27432" anchor="t">
+          <a:bodyPr wrap="square" lIns="27432" tIns="27432" rIns="27432" bIns="27432" anchor="t">
             <a:spAutoFit/>
           </a:bodyPr>
           <a:lstStyle/>
@@ -7754,7 +7766,7 @@
           <a:noFill/>
         </p:spPr>
         <p:txBody>
-          <a:bodyPr wrap="square" lIns="27432" rIns="27432" tIns="27432" bIns="27432" anchor="t">
+          <a:bodyPr wrap="square" lIns="27432" tIns="27432" rIns="27432" bIns="27432" anchor="t">
             <a:spAutoFit/>
           </a:bodyPr>
           <a:lstStyle/>
@@ -7814,6 +7826,7 @@
           <a:lstStyle/>
           <a:p>
             <a:pPr algn="ctr"/>
+            <a:endParaRPr/>
           </a:p>
         </p:txBody>
       </p:sp>
@@ -7834,7 +7847,7 @@
           <a:noFill/>
         </p:spPr>
         <p:txBody>
-          <a:bodyPr wrap="square" lIns="27432" rIns="27432" tIns="27432" bIns="27432" anchor="t">
+          <a:bodyPr wrap="square" lIns="27432" tIns="27432" rIns="27432" bIns="27432" anchor="t">
             <a:spAutoFit/>
           </a:bodyPr>
           <a:lstStyle/>
@@ -7869,7 +7882,7 @@
           <a:noFill/>
         </p:spPr>
         <p:txBody>
-          <a:bodyPr wrap="square" lIns="27432" rIns="27432" tIns="27432" bIns="27432" anchor="t">
+          <a:bodyPr wrap="square" lIns="27432" tIns="27432" rIns="27432" bIns="27432" anchor="t">
             <a:spAutoFit/>
           </a:bodyPr>
           <a:lstStyle/>
@@ -7929,6 +7942,7 @@
           <a:lstStyle/>
           <a:p>
             <a:pPr algn="ctr"/>
+            <a:endParaRPr/>
           </a:p>
         </p:txBody>
       </p:sp>
@@ -7949,7 +7963,7 @@
           <a:noFill/>
         </p:spPr>
         <p:txBody>
-          <a:bodyPr wrap="square" lIns="27432" rIns="27432" tIns="27432" bIns="27432" anchor="t">
+          <a:bodyPr wrap="square" lIns="27432" tIns="27432" rIns="27432" bIns="27432" anchor="t">
             <a:spAutoFit/>
           </a:bodyPr>
           <a:lstStyle/>
@@ -7984,7 +7998,7 @@
           <a:noFill/>
         </p:spPr>
         <p:txBody>
-          <a:bodyPr wrap="square" lIns="27432" rIns="27432" tIns="27432" bIns="27432" anchor="t">
+          <a:bodyPr wrap="square" lIns="27432" tIns="27432" rIns="27432" bIns="27432" anchor="t">
             <a:spAutoFit/>
           </a:bodyPr>
           <a:lstStyle/>
@@ -8044,6 +8058,7 @@
           <a:lstStyle/>
           <a:p>
             <a:pPr algn="ctr"/>
+            <a:endParaRPr/>
           </a:p>
         </p:txBody>
       </p:sp>
@@ -8064,7 +8079,7 @@
           <a:noFill/>
         </p:spPr>
         <p:txBody>
-          <a:bodyPr wrap="square" lIns="27432" rIns="27432" tIns="27432" bIns="27432" anchor="t">
+          <a:bodyPr wrap="square" lIns="27432" tIns="27432" rIns="27432" bIns="27432" anchor="t">
             <a:spAutoFit/>
           </a:bodyPr>
           <a:lstStyle/>
@@ -8099,7 +8114,7 @@
           <a:noFill/>
         </p:spPr>
         <p:txBody>
-          <a:bodyPr wrap="square" lIns="27432" rIns="27432" tIns="27432" bIns="27432" anchor="t">
+          <a:bodyPr wrap="square" lIns="27432" tIns="27432" rIns="27432" bIns="27432" anchor="t">
             <a:spAutoFit/>
           </a:bodyPr>
           <a:lstStyle/>
@@ -8160,7 +8175,7 @@
 </file>
 
 <file path=ppt/slides/slide16.xml><?xml version="1.0" encoding="utf-8"?>
-<p:sld xmlns:a="http://schemas.openxmlformats.org/drawingml/2006/main" xmlns:p="http://schemas.openxmlformats.org/presentationml/2006/main" xmlns:r="http://schemas.openxmlformats.org/officeDocument/2006/relationships">
+<p:sld xmlns:a="http://schemas.openxmlformats.org/drawingml/2006/main" xmlns:r="http://schemas.openxmlformats.org/officeDocument/2006/relationships" xmlns:p="http://schemas.openxmlformats.org/presentationml/2006/main">
   <p:cSld>
     <p:spTree>
       <p:nvGrpSpPr>
@@ -8168,7 +8183,14 @@
         <p:cNvGrpSpPr/>
         <p:nvPr/>
       </p:nvGrpSpPr>
-      <p:grpSpPr/>
+      <p:grpSpPr>
+        <a:xfrm>
+          <a:off x="0" y="0"/>
+          <a:ext cx="0" cy="0"/>
+          <a:chOff x="0" y="0"/>
+          <a:chExt cx="0" cy="0"/>
+        </a:xfrm>
+      </p:grpSpPr>
       <p:sp>
         <p:nvSpPr>
           <p:cNvPr id="2" name="Rectangle 1"/>
@@ -8209,6 +8231,7 @@
           <a:lstStyle/>
           <a:p>
             <a:pPr algn="ctr"/>
+            <a:endParaRPr/>
           </a:p>
         </p:txBody>
       </p:sp>
@@ -8252,6 +8275,7 @@
           <a:lstStyle/>
           <a:p>
             <a:pPr algn="ctr"/>
+            <a:endParaRPr/>
           </a:p>
         </p:txBody>
       </p:sp>
@@ -8398,6 +8422,7 @@
           <a:lstStyle/>
           <a:p>
             <a:pPr algn="ctr"/>
+            <a:endParaRPr/>
           </a:p>
         </p:txBody>
       </p:sp>
@@ -8418,7 +8443,7 @@
           <a:noFill/>
         </p:spPr>
         <p:txBody>
-          <a:bodyPr wrap="square" lIns="27432" rIns="27432" tIns="27432" bIns="27432" anchor="ctr">
+          <a:bodyPr wrap="square" lIns="27432" tIns="27432" rIns="27432" bIns="27432" anchor="ctr">
             <a:spAutoFit/>
           </a:bodyPr>
           <a:lstStyle/>
@@ -8453,7 +8478,7 @@
           <a:noFill/>
         </p:spPr>
         <p:txBody>
-          <a:bodyPr wrap="square" lIns="27432" rIns="27432" tIns="27432" bIns="27432" anchor="t">
+          <a:bodyPr wrap="square" lIns="27432" tIns="27432" rIns="27432" bIns="27432" anchor="t">
             <a:spAutoFit/>
           </a:bodyPr>
           <a:lstStyle/>
@@ -8513,6 +8538,7 @@
           <a:lstStyle/>
           <a:p>
             <a:pPr algn="ctr"/>
+            <a:endParaRPr/>
           </a:p>
         </p:txBody>
       </p:sp>
@@ -8556,6 +8582,7 @@
           <a:lstStyle/>
           <a:p>
             <a:pPr algn="ctr"/>
+            <a:endParaRPr/>
           </a:p>
         </p:txBody>
       </p:sp>
@@ -8576,7 +8603,7 @@
           <a:noFill/>
         </p:spPr>
         <p:txBody>
-          <a:bodyPr wrap="square" lIns="27432" rIns="27432" tIns="27432" bIns="27432" anchor="t">
+          <a:bodyPr wrap="square" lIns="27432" tIns="27432" rIns="27432" bIns="27432" anchor="t">
             <a:spAutoFit/>
           </a:bodyPr>
           <a:lstStyle/>
@@ -8611,7 +8638,7 @@
           <a:noFill/>
         </p:spPr>
         <p:txBody>
-          <a:bodyPr wrap="square" lIns="27432" rIns="27432" tIns="27432" bIns="27432" anchor="t">
+          <a:bodyPr wrap="square" lIns="27432" tIns="27432" rIns="27432" bIns="27432" anchor="t">
             <a:spAutoFit/>
           </a:bodyPr>
           <a:lstStyle/>
@@ -8646,7 +8673,7 @@
           <a:noFill/>
         </p:spPr>
         <p:txBody>
-          <a:bodyPr wrap="square" lIns="27432" rIns="27432" tIns="27432" bIns="27432" anchor="t">
+          <a:bodyPr wrap="square" lIns="27432" tIns="27432" rIns="27432" bIns="27432" anchor="t">
             <a:spAutoFit/>
           </a:bodyPr>
           <a:lstStyle/>
@@ -8707,7 +8734,7 @@
 </file>
 
 <file path=ppt/slides/slide17.xml><?xml version="1.0" encoding="utf-8"?>
-<p:sld xmlns:a="http://schemas.openxmlformats.org/drawingml/2006/main" xmlns:p="http://schemas.openxmlformats.org/presentationml/2006/main" xmlns:r="http://schemas.openxmlformats.org/officeDocument/2006/relationships">
+<p:sld xmlns:a="http://schemas.openxmlformats.org/drawingml/2006/main" xmlns:r="http://schemas.openxmlformats.org/officeDocument/2006/relationships" xmlns:p="http://schemas.openxmlformats.org/presentationml/2006/main">
   <p:cSld>
     <p:spTree>
       <p:nvGrpSpPr>
@@ -8715,7 +8742,14 @@
         <p:cNvGrpSpPr/>
         <p:nvPr/>
       </p:nvGrpSpPr>
-      <p:grpSpPr/>
+      <p:grpSpPr>
+        <a:xfrm>
+          <a:off x="0" y="0"/>
+          <a:ext cx="0" cy="0"/>
+          <a:chOff x="0" y="0"/>
+          <a:chExt cx="0" cy="0"/>
+        </a:xfrm>
+      </p:grpSpPr>
       <p:sp>
         <p:nvSpPr>
           <p:cNvPr id="2" name="Rectangle 1"/>
@@ -8756,6 +8790,7 @@
           <a:lstStyle/>
           <a:p>
             <a:pPr algn="ctr"/>
+            <a:endParaRPr/>
           </a:p>
         </p:txBody>
       </p:sp>
@@ -8799,6 +8834,7 @@
           <a:lstStyle/>
           <a:p>
             <a:pPr algn="ctr"/>
+            <a:endParaRPr/>
           </a:p>
         </p:txBody>
       </p:sp>
@@ -8947,6 +8983,7 @@
           <a:lstStyle/>
           <a:p>
             <a:pPr algn="ctr"/>
+            <a:endParaRPr/>
           </a:p>
         </p:txBody>
       </p:sp>
@@ -8990,6 +9027,7 @@
           <a:lstStyle/>
           <a:p>
             <a:pPr algn="ctr"/>
+            <a:endParaRPr/>
           </a:p>
         </p:txBody>
       </p:sp>
@@ -9010,7 +9048,7 @@
           <a:noFill/>
         </p:spPr>
         <p:txBody>
-          <a:bodyPr wrap="square" lIns="27432" rIns="27432" tIns="27432" bIns="27432" anchor="t">
+          <a:bodyPr wrap="square" lIns="27432" tIns="27432" rIns="27432" bIns="27432" anchor="t">
             <a:spAutoFit/>
           </a:bodyPr>
           <a:lstStyle/>
@@ -9045,7 +9083,7 @@
           <a:noFill/>
         </p:spPr>
         <p:txBody>
-          <a:bodyPr wrap="square" lIns="27432" rIns="27432" tIns="27432" bIns="27432" anchor="t">
+          <a:bodyPr wrap="square" lIns="27432" tIns="27432" rIns="27432" bIns="27432" anchor="t">
             <a:spAutoFit/>
           </a:bodyPr>
           <a:lstStyle/>
@@ -9106,6 +9144,7 @@
           <a:lstStyle/>
           <a:p>
             <a:pPr algn="ctr"/>
+            <a:endParaRPr/>
           </a:p>
         </p:txBody>
       </p:sp>
@@ -9149,6 +9188,7 @@
           <a:lstStyle/>
           <a:p>
             <a:pPr algn="ctr"/>
+            <a:endParaRPr/>
           </a:p>
         </p:txBody>
       </p:sp>
@@ -9169,7 +9209,7 @@
           <a:noFill/>
         </p:spPr>
         <p:txBody>
-          <a:bodyPr wrap="square" lIns="27432" rIns="27432" tIns="27432" bIns="27432" anchor="t">
+          <a:bodyPr wrap="square" lIns="27432" tIns="27432" rIns="27432" bIns="27432" anchor="t">
             <a:spAutoFit/>
           </a:bodyPr>
           <a:lstStyle/>
@@ -9204,7 +9244,7 @@
           <a:noFill/>
         </p:spPr>
         <p:txBody>
-          <a:bodyPr wrap="square" lIns="27432" rIns="27432" tIns="27432" bIns="27432" anchor="t">
+          <a:bodyPr wrap="square" lIns="27432" tIns="27432" rIns="27432" bIns="27432" anchor="t">
             <a:spAutoFit/>
           </a:bodyPr>
           <a:lstStyle/>
@@ -9265,6 +9305,7 @@
           <a:lstStyle/>
           <a:p>
             <a:pPr algn="ctr"/>
+            <a:endParaRPr/>
           </a:p>
         </p:txBody>
       </p:sp>
@@ -9308,6 +9349,7 @@
           <a:lstStyle/>
           <a:p>
             <a:pPr algn="ctr"/>
+            <a:endParaRPr/>
           </a:p>
         </p:txBody>
       </p:sp>
@@ -9328,7 +9370,7 @@
           <a:noFill/>
         </p:spPr>
         <p:txBody>
-          <a:bodyPr wrap="square" lIns="27432" rIns="27432" tIns="27432" bIns="27432" anchor="t">
+          <a:bodyPr wrap="square" lIns="27432" tIns="27432" rIns="27432" bIns="27432" anchor="t">
             <a:spAutoFit/>
           </a:bodyPr>
           <a:lstStyle/>
@@ -9363,7 +9405,7 @@
           <a:noFill/>
         </p:spPr>
         <p:txBody>
-          <a:bodyPr wrap="square" lIns="27432" rIns="27432" tIns="27432" bIns="27432" anchor="t">
+          <a:bodyPr wrap="square" lIns="27432" tIns="27432" rIns="27432" bIns="27432" anchor="t">
             <a:spAutoFit/>
           </a:bodyPr>
           <a:lstStyle/>
@@ -9399,7 +9441,7 @@
           <a:noFill/>
         </p:spPr>
         <p:txBody>
-          <a:bodyPr wrap="square" lIns="27432" rIns="27432" tIns="27432" bIns="27432" anchor="t">
+          <a:bodyPr wrap="square" lIns="27432" tIns="27432" rIns="27432" bIns="27432" anchor="t">
             <a:spAutoFit/>
           </a:bodyPr>
           <a:lstStyle/>
@@ -9434,7 +9476,7 @@
           <a:noFill/>
         </p:spPr>
         <p:txBody>
-          <a:bodyPr wrap="square" lIns="27432" rIns="27432" tIns="27432" bIns="27432" anchor="t">
+          <a:bodyPr wrap="square" lIns="27432" tIns="27432" rIns="27432" bIns="27432" anchor="t">
             <a:spAutoFit/>
           </a:bodyPr>
           <a:lstStyle/>
@@ -9492,6 +9534,7 @@
           <a:lstStyle/>
           <a:p>
             <a:pPr algn="ctr"/>
+            <a:endParaRPr/>
           </a:p>
         </p:txBody>
       </p:sp>
@@ -9512,7 +9555,7 @@
           <a:noFill/>
         </p:spPr>
         <p:txBody>
-          <a:bodyPr wrap="square" lIns="27432" rIns="27432" tIns="27432" bIns="27432" anchor="ctr">
+          <a:bodyPr wrap="square" lIns="27432" tIns="27432" rIns="27432" bIns="27432" anchor="ctr">
             <a:spAutoFit/>
           </a:bodyPr>
           <a:lstStyle/>
@@ -9573,7 +9616,7 @@
 </file>
 
 <file path=ppt/slides/slide18.xml><?xml version="1.0" encoding="utf-8"?>
-<p:sld xmlns:a="http://schemas.openxmlformats.org/drawingml/2006/main" xmlns:p="http://schemas.openxmlformats.org/presentationml/2006/main" xmlns:r="http://schemas.openxmlformats.org/officeDocument/2006/relationships">
+<p:sld xmlns:a="http://schemas.openxmlformats.org/drawingml/2006/main" xmlns:r="http://schemas.openxmlformats.org/officeDocument/2006/relationships" xmlns:p="http://schemas.openxmlformats.org/presentationml/2006/main">
   <p:cSld>
     <p:spTree>
       <p:nvGrpSpPr>
@@ -9581,7 +9624,14 @@
         <p:cNvGrpSpPr/>
         <p:nvPr/>
       </p:nvGrpSpPr>
-      <p:grpSpPr/>
+      <p:grpSpPr>
+        <a:xfrm>
+          <a:off x="0" y="0"/>
+          <a:ext cx="0" cy="0"/>
+          <a:chOff x="0" y="0"/>
+          <a:chExt cx="0" cy="0"/>
+        </a:xfrm>
+      </p:grpSpPr>
       <p:sp>
         <p:nvSpPr>
           <p:cNvPr id="2" name="Rectangle 1"/>
@@ -9622,6 +9672,7 @@
           <a:lstStyle/>
           <a:p>
             <a:pPr algn="ctr"/>
+            <a:endParaRPr/>
           </a:p>
         </p:txBody>
       </p:sp>
@@ -9665,6 +9716,7 @@
           <a:lstStyle/>
           <a:p>
             <a:pPr algn="ctr"/>
+            <a:endParaRPr/>
           </a:p>
         </p:txBody>
       </p:sp>
@@ -9708,6 +9760,7 @@
           <a:lstStyle/>
           <a:p>
             <a:pPr algn="ctr"/>
+            <a:endParaRPr/>
           </a:p>
         </p:txBody>
       </p:sp>
@@ -9728,7 +9781,7 @@
           <a:noFill/>
         </p:spPr>
         <p:txBody>
-          <a:bodyPr wrap="square" lIns="27432" rIns="27432" tIns="27432" bIns="27432" anchor="t">
+          <a:bodyPr wrap="square" lIns="27432" tIns="27432" rIns="27432" bIns="27432" anchor="t">
             <a:spAutoFit/>
           </a:bodyPr>
           <a:lstStyle/>
@@ -9763,7 +9816,7 @@
           <a:noFill/>
         </p:spPr>
         <p:txBody>
-          <a:bodyPr wrap="square" lIns="27432" rIns="27432" tIns="27432" bIns="27432" anchor="t">
+          <a:bodyPr wrap="square" lIns="27432" tIns="27432" rIns="27432" bIns="27432" anchor="t">
             <a:spAutoFit/>
           </a:bodyPr>
           <a:lstStyle/>
@@ -9798,7 +9851,7 @@
           <a:noFill/>
         </p:spPr>
         <p:txBody>
-          <a:bodyPr wrap="square" lIns="27432" rIns="27432" tIns="27432" bIns="27432" anchor="t">
+          <a:bodyPr wrap="square" lIns="27432" tIns="27432" rIns="27432" bIns="27432" anchor="t">
             <a:spAutoFit/>
           </a:bodyPr>
           <a:lstStyle/>
@@ -9856,6 +9909,7 @@
           <a:lstStyle/>
           <a:p>
             <a:pPr algn="ctr"/>
+            <a:endParaRPr/>
           </a:p>
         </p:txBody>
       </p:sp>
@@ -9876,7 +9930,7 @@
           <a:noFill/>
         </p:spPr>
         <p:txBody>
-          <a:bodyPr wrap="square" lIns="27432" rIns="27432" tIns="27432" bIns="27432" anchor="ctr">
+          <a:bodyPr wrap="square" lIns="27432" tIns="27432" rIns="27432" bIns="27432" anchor="ctr">
             <a:spAutoFit/>
           </a:bodyPr>
           <a:lstStyle/>
@@ -9911,7 +9965,7 @@
           <a:noFill/>
         </p:spPr>
         <p:txBody>
-          <a:bodyPr wrap="square" lIns="27432" rIns="27432" tIns="27432" bIns="27432" anchor="t">
+          <a:bodyPr wrap="square" lIns="27432" tIns="27432" rIns="27432" bIns="27432" anchor="t">
             <a:spAutoFit/>
           </a:bodyPr>
           <a:lstStyle/>
@@ -9938,7 +9992,7 @@
 </file>
 
 <file path=ppt/slides/slide19.xml><?xml version="1.0" encoding="utf-8"?>
-<p:sld xmlns:a="http://schemas.openxmlformats.org/drawingml/2006/main" xmlns:p="http://schemas.openxmlformats.org/presentationml/2006/main" xmlns:r="http://schemas.openxmlformats.org/officeDocument/2006/relationships">
+<p:sld xmlns:a="http://schemas.openxmlformats.org/drawingml/2006/main" xmlns:r="http://schemas.openxmlformats.org/officeDocument/2006/relationships" xmlns:p="http://schemas.openxmlformats.org/presentationml/2006/main">
   <p:cSld>
     <p:spTree>
       <p:nvGrpSpPr>
@@ -9946,7 +10000,14 @@
         <p:cNvGrpSpPr/>
         <p:nvPr/>
       </p:nvGrpSpPr>
-      <p:grpSpPr/>
+      <p:grpSpPr>
+        <a:xfrm>
+          <a:off x="0" y="0"/>
+          <a:ext cx="0" cy="0"/>
+          <a:chOff x="0" y="0"/>
+          <a:chExt cx="0" cy="0"/>
+        </a:xfrm>
+      </p:grpSpPr>
       <p:sp>
         <p:nvSpPr>
           <p:cNvPr id="2" name="Rectangle 1"/>
@@ -9987,6 +10048,7 @@
           <a:lstStyle/>
           <a:p>
             <a:pPr algn="ctr"/>
+            <a:endParaRPr/>
           </a:p>
         </p:txBody>
       </p:sp>
@@ -10030,6 +10092,7 @@
           <a:lstStyle/>
           <a:p>
             <a:pPr algn="ctr"/>
+            <a:endParaRPr/>
           </a:p>
         </p:txBody>
       </p:sp>
@@ -10178,6 +10241,7 @@
           <a:lstStyle/>
           <a:p>
             <a:pPr algn="ctr"/>
+            <a:endParaRPr/>
           </a:p>
         </p:txBody>
       </p:sp>
@@ -10221,6 +10285,7 @@
           <a:lstStyle/>
           <a:p>
             <a:pPr algn="ctr"/>
+            <a:endParaRPr/>
           </a:p>
         </p:txBody>
       </p:sp>
@@ -10241,7 +10306,7 @@
           <a:noFill/>
         </p:spPr>
         <p:txBody>
-          <a:bodyPr wrap="square" lIns="27432" rIns="27432" tIns="27432" bIns="27432" anchor="t">
+          <a:bodyPr wrap="square" lIns="27432" tIns="27432" rIns="27432" bIns="27432" anchor="t">
             <a:spAutoFit/>
           </a:bodyPr>
           <a:lstStyle/>
@@ -10276,7 +10341,7 @@
           <a:noFill/>
         </p:spPr>
         <p:txBody>
-          <a:bodyPr wrap="square" lIns="27432" rIns="27432" tIns="27432" bIns="27432" anchor="t">
+          <a:bodyPr wrap="square" lIns="27432" tIns="27432" rIns="27432" bIns="27432" anchor="t">
             <a:spAutoFit/>
           </a:bodyPr>
           <a:lstStyle/>
@@ -10311,7 +10376,7 @@
           <a:noFill/>
         </p:spPr>
         <p:txBody>
-          <a:bodyPr wrap="square" lIns="27432" rIns="27432" tIns="27432" bIns="27432" anchor="t">
+          <a:bodyPr wrap="square" lIns="27432" tIns="27432" rIns="27432" bIns="27432" anchor="t">
             <a:spAutoFit/>
           </a:bodyPr>
           <a:lstStyle/>
@@ -10346,7 +10411,7 @@
           <a:noFill/>
         </p:spPr>
         <p:txBody>
-          <a:bodyPr wrap="square" lIns="36576" rIns="36576" tIns="27432" bIns="27432">
+          <a:bodyPr wrap="square" lIns="36576" tIns="27432" rIns="36576" bIns="27432">
             <a:spAutoFit/>
           </a:bodyPr>
           <a:lstStyle/>
@@ -10472,6 +10537,7 @@
           <a:lstStyle/>
           <a:p>
             <a:pPr algn="ctr"/>
+            <a:endParaRPr/>
           </a:p>
         </p:txBody>
       </p:sp>
@@ -10492,7 +10558,7 @@
           <a:noFill/>
         </p:spPr>
         <p:txBody>
-          <a:bodyPr wrap="square" lIns="27432" rIns="27432" tIns="27432" bIns="27432" anchor="ctr">
+          <a:bodyPr wrap="square" lIns="27432" tIns="27432" rIns="27432" bIns="27432" anchor="ctr">
             <a:spAutoFit/>
           </a:bodyPr>
           <a:lstStyle/>
@@ -10527,7 +10593,7 @@
           <a:noFill/>
         </p:spPr>
         <p:txBody>
-          <a:bodyPr wrap="square" lIns="27432" rIns="27432" tIns="27432" bIns="27432" anchor="t">
+          <a:bodyPr wrap="square" lIns="27432" tIns="27432" rIns="27432" bIns="27432" anchor="t">
             <a:spAutoFit/>
           </a:bodyPr>
           <a:lstStyle/>
@@ -10588,7 +10654,7 @@
 </file>
 
 <file path=ppt/slides/slide2.xml><?xml version="1.0" encoding="utf-8"?>
-<p:sld xmlns:a="http://schemas.openxmlformats.org/drawingml/2006/main" xmlns:p="http://schemas.openxmlformats.org/presentationml/2006/main" xmlns:r="http://schemas.openxmlformats.org/officeDocument/2006/relationships">
+<p:sld xmlns:a="http://schemas.openxmlformats.org/drawingml/2006/main" xmlns:r="http://schemas.openxmlformats.org/officeDocument/2006/relationships" xmlns:p="http://schemas.openxmlformats.org/presentationml/2006/main">
   <p:cSld>
     <p:spTree>
       <p:nvGrpSpPr>
@@ -10596,7 +10662,14 @@
         <p:cNvGrpSpPr/>
         <p:nvPr/>
       </p:nvGrpSpPr>
-      <p:grpSpPr/>
+      <p:grpSpPr>
+        <a:xfrm>
+          <a:off x="0" y="0"/>
+          <a:ext cx="0" cy="0"/>
+          <a:chOff x="0" y="0"/>
+          <a:chExt cx="0" cy="0"/>
+        </a:xfrm>
+      </p:grpSpPr>
       <p:sp>
         <p:nvSpPr>
           <p:cNvPr id="2" name="Rectangle 1"/>
@@ -10637,6 +10710,7 @@
           <a:lstStyle/>
           <a:p>
             <a:pPr algn="ctr"/>
+            <a:endParaRPr/>
           </a:p>
         </p:txBody>
       </p:sp>
@@ -10680,6 +10754,7 @@
           <a:lstStyle/>
           <a:p>
             <a:pPr algn="ctr"/>
+            <a:endParaRPr/>
           </a:p>
         </p:txBody>
       </p:sp>
@@ -10828,6 +10903,7 @@
           <a:lstStyle/>
           <a:p>
             <a:pPr algn="ctr"/>
+            <a:endParaRPr/>
           </a:p>
         </p:txBody>
       </p:sp>
@@ -10871,6 +10947,7 @@
           <a:lstStyle/>
           <a:p>
             <a:pPr algn="ctr"/>
+            <a:endParaRPr/>
           </a:p>
         </p:txBody>
       </p:sp>
@@ -10891,7 +10968,7 @@
           <a:noFill/>
         </p:spPr>
         <p:txBody>
-          <a:bodyPr wrap="square" lIns="27432" rIns="27432" tIns="27432" bIns="27432" anchor="t">
+          <a:bodyPr wrap="square" lIns="27432" tIns="27432" rIns="27432" bIns="27432" anchor="t">
             <a:spAutoFit/>
           </a:bodyPr>
           <a:lstStyle/>
@@ -10926,7 +11003,7 @@
           <a:noFill/>
         </p:spPr>
         <p:txBody>
-          <a:bodyPr wrap="square" lIns="27432" rIns="27432" tIns="27432" bIns="27432" anchor="t">
+          <a:bodyPr wrap="square" lIns="27432" tIns="27432" rIns="27432" bIns="27432" anchor="t">
             <a:spAutoFit/>
           </a:bodyPr>
           <a:lstStyle/>
@@ -10987,6 +11064,7 @@
           <a:lstStyle/>
           <a:p>
             <a:pPr algn="ctr"/>
+            <a:endParaRPr/>
           </a:p>
         </p:txBody>
       </p:sp>
@@ -11030,6 +11108,7 @@
           <a:lstStyle/>
           <a:p>
             <a:pPr algn="ctr"/>
+            <a:endParaRPr/>
           </a:p>
         </p:txBody>
       </p:sp>
@@ -11050,7 +11129,7 @@
           <a:noFill/>
         </p:spPr>
         <p:txBody>
-          <a:bodyPr wrap="square" lIns="27432" rIns="27432" tIns="27432" bIns="27432" anchor="t">
+          <a:bodyPr wrap="square" lIns="27432" tIns="27432" rIns="27432" bIns="27432" anchor="t">
             <a:spAutoFit/>
           </a:bodyPr>
           <a:lstStyle/>
@@ -11085,7 +11164,7 @@
           <a:noFill/>
         </p:spPr>
         <p:txBody>
-          <a:bodyPr wrap="square" lIns="27432" rIns="27432" tIns="27432" bIns="27432" anchor="t">
+          <a:bodyPr wrap="square" lIns="27432" tIns="27432" rIns="27432" bIns="27432" anchor="t">
             <a:spAutoFit/>
           </a:bodyPr>
           <a:lstStyle/>
@@ -11146,6 +11225,7 @@
           <a:lstStyle/>
           <a:p>
             <a:pPr algn="ctr"/>
+            <a:endParaRPr/>
           </a:p>
         </p:txBody>
       </p:sp>
@@ -11189,6 +11269,7 @@
           <a:lstStyle/>
           <a:p>
             <a:pPr algn="ctr"/>
+            <a:endParaRPr/>
           </a:p>
         </p:txBody>
       </p:sp>
@@ -11209,7 +11290,7 @@
           <a:noFill/>
         </p:spPr>
         <p:txBody>
-          <a:bodyPr wrap="square" lIns="27432" rIns="27432" tIns="27432" bIns="27432" anchor="t">
+          <a:bodyPr wrap="square" lIns="27432" tIns="27432" rIns="27432" bIns="27432" anchor="t">
             <a:spAutoFit/>
           </a:bodyPr>
           <a:lstStyle/>
@@ -11244,7 +11325,7 @@
           <a:noFill/>
         </p:spPr>
         <p:txBody>
-          <a:bodyPr wrap="square" lIns="27432" rIns="27432" tIns="27432" bIns="27432" anchor="t">
+          <a:bodyPr wrap="square" lIns="27432" tIns="27432" rIns="27432" bIns="27432" anchor="t">
             <a:spAutoFit/>
           </a:bodyPr>
           <a:lstStyle/>
@@ -11280,7 +11361,7 @@
           <a:noFill/>
         </p:spPr>
         <p:txBody>
-          <a:bodyPr wrap="square" lIns="27432" rIns="27432" tIns="27432" bIns="27432" anchor="t">
+          <a:bodyPr wrap="square" lIns="27432" tIns="27432" rIns="27432" bIns="27432" anchor="t">
             <a:spAutoFit/>
           </a:bodyPr>
           <a:lstStyle/>
@@ -11315,7 +11396,7 @@
           <a:noFill/>
         </p:spPr>
         <p:txBody>
-          <a:bodyPr wrap="square" lIns="27432" rIns="27432" tIns="27432" bIns="27432" anchor="t">
+          <a:bodyPr wrap="square" lIns="27432" tIns="27432" rIns="27432" bIns="27432" anchor="t">
             <a:spAutoFit/>
           </a:bodyPr>
           <a:lstStyle/>
@@ -11376,7 +11457,7 @@
 </file>
 
 <file path=ppt/slides/slide20.xml><?xml version="1.0" encoding="utf-8"?>
-<p:sld xmlns:a="http://schemas.openxmlformats.org/drawingml/2006/main" xmlns:p="http://schemas.openxmlformats.org/presentationml/2006/main" xmlns:r="http://schemas.openxmlformats.org/officeDocument/2006/relationships">
+<p:sld xmlns:a="http://schemas.openxmlformats.org/drawingml/2006/main" xmlns:r="http://schemas.openxmlformats.org/officeDocument/2006/relationships" xmlns:p="http://schemas.openxmlformats.org/presentationml/2006/main">
   <p:cSld>
     <p:spTree>
       <p:nvGrpSpPr>
@@ -11384,7 +11465,14 @@
         <p:cNvGrpSpPr/>
         <p:nvPr/>
       </p:nvGrpSpPr>
-      <p:grpSpPr/>
+      <p:grpSpPr>
+        <a:xfrm>
+          <a:off x="0" y="0"/>
+          <a:ext cx="0" cy="0"/>
+          <a:chOff x="0" y="0"/>
+          <a:chExt cx="0" cy="0"/>
+        </a:xfrm>
+      </p:grpSpPr>
       <p:sp>
         <p:nvSpPr>
           <p:cNvPr id="2" name="Rectangle 1"/>
@@ -11425,6 +11513,7 @@
           <a:lstStyle/>
           <a:p>
             <a:pPr algn="ctr"/>
+            <a:endParaRPr/>
           </a:p>
         </p:txBody>
       </p:sp>
@@ -11468,6 +11557,7 @@
           <a:lstStyle/>
           <a:p>
             <a:pPr algn="ctr"/>
+            <a:endParaRPr/>
           </a:p>
         </p:txBody>
       </p:sp>
@@ -11616,6 +11706,7 @@
           <a:lstStyle/>
           <a:p>
             <a:pPr algn="ctr"/>
+            <a:endParaRPr/>
           </a:p>
         </p:txBody>
       </p:sp>
@@ -11636,7 +11727,7 @@
           <a:noFill/>
         </p:spPr>
         <p:txBody>
-          <a:bodyPr wrap="square" lIns="27432" rIns="27432" tIns="27432" bIns="27432" anchor="t">
+          <a:bodyPr wrap="square" lIns="27432" tIns="27432" rIns="27432" bIns="27432" anchor="t">
             <a:spAutoFit/>
           </a:bodyPr>
           <a:lstStyle/>
@@ -11696,6 +11787,7 @@
           <a:lstStyle/>
           <a:p>
             <a:pPr algn="ctr"/>
+            <a:endParaRPr/>
           </a:p>
         </p:txBody>
       </p:sp>
@@ -11716,7 +11808,7 @@
           <a:noFill/>
         </p:spPr>
         <p:txBody>
-          <a:bodyPr wrap="square" lIns="27432" rIns="27432" tIns="27432" bIns="27432" anchor="t">
+          <a:bodyPr wrap="square" lIns="27432" tIns="27432" rIns="27432" bIns="27432" anchor="t">
             <a:spAutoFit/>
           </a:bodyPr>
           <a:lstStyle/>
@@ -11776,6 +11868,7 @@
           <a:lstStyle/>
           <a:p>
             <a:pPr algn="ctr"/>
+            <a:endParaRPr/>
           </a:p>
         </p:txBody>
       </p:sp>
@@ -11796,7 +11889,7 @@
           <a:noFill/>
         </p:spPr>
         <p:txBody>
-          <a:bodyPr wrap="square" lIns="27432" rIns="27432" tIns="27432" bIns="27432" anchor="t">
+          <a:bodyPr wrap="square" lIns="27432" tIns="27432" rIns="27432" bIns="27432" anchor="t">
             <a:spAutoFit/>
           </a:bodyPr>
           <a:lstStyle/>
@@ -11856,6 +11949,7 @@
           <a:lstStyle/>
           <a:p>
             <a:pPr algn="ctr"/>
+            <a:endParaRPr/>
           </a:p>
         </p:txBody>
       </p:sp>
@@ -11876,7 +11970,7 @@
           <a:noFill/>
         </p:spPr>
         <p:txBody>
-          <a:bodyPr wrap="square" lIns="27432" rIns="27432" tIns="27432" bIns="27432" anchor="t">
+          <a:bodyPr wrap="square" lIns="27432" tIns="27432" rIns="27432" bIns="27432" anchor="t">
             <a:spAutoFit/>
           </a:bodyPr>
           <a:lstStyle/>
@@ -11911,7 +12005,7 @@
           <a:noFill/>
         </p:spPr>
         <p:txBody>
-          <a:bodyPr wrap="square" lIns="27432" rIns="27432" tIns="27432" bIns="27432" anchor="t">
+          <a:bodyPr wrap="square" lIns="27432" tIns="27432" rIns="27432" bIns="27432" anchor="t">
             <a:spAutoFit/>
           </a:bodyPr>
           <a:lstStyle/>
@@ -11946,7 +12040,7 @@
           <a:noFill/>
         </p:spPr>
         <p:txBody>
-          <a:bodyPr wrap="square" lIns="27432" rIns="27432" tIns="27432" bIns="27432" anchor="t">
+          <a:bodyPr wrap="square" lIns="27432" tIns="27432" rIns="27432" bIns="27432" anchor="t">
             <a:spAutoFit/>
           </a:bodyPr>
           <a:lstStyle/>
@@ -12007,7 +12101,7 @@
 </file>
 
 <file path=ppt/slides/slide21.xml><?xml version="1.0" encoding="utf-8"?>
-<p:sld xmlns:a="http://schemas.openxmlformats.org/drawingml/2006/main" xmlns:p="http://schemas.openxmlformats.org/presentationml/2006/main" xmlns:r="http://schemas.openxmlformats.org/officeDocument/2006/relationships">
+<p:sld xmlns:a="http://schemas.openxmlformats.org/drawingml/2006/main" xmlns:r="http://schemas.openxmlformats.org/officeDocument/2006/relationships" xmlns:p="http://schemas.openxmlformats.org/presentationml/2006/main">
   <p:cSld>
     <p:spTree>
       <p:nvGrpSpPr>
@@ -12015,7 +12109,14 @@
         <p:cNvGrpSpPr/>
         <p:nvPr/>
       </p:nvGrpSpPr>
-      <p:grpSpPr/>
+      <p:grpSpPr>
+        <a:xfrm>
+          <a:off x="0" y="0"/>
+          <a:ext cx="0" cy="0"/>
+          <a:chOff x="0" y="0"/>
+          <a:chExt cx="0" cy="0"/>
+        </a:xfrm>
+      </p:grpSpPr>
       <p:sp>
         <p:nvSpPr>
           <p:cNvPr id="2" name="Rectangle 1"/>
@@ -12056,6 +12157,7 @@
           <a:lstStyle/>
           <a:p>
             <a:pPr algn="ctr"/>
+            <a:endParaRPr/>
           </a:p>
         </p:txBody>
       </p:sp>
@@ -12099,6 +12201,7 @@
           <a:lstStyle/>
           <a:p>
             <a:pPr algn="ctr"/>
+            <a:endParaRPr/>
           </a:p>
         </p:txBody>
       </p:sp>
@@ -12247,6 +12350,7 @@
           <a:lstStyle/>
           <a:p>
             <a:pPr algn="ctr"/>
+            <a:endParaRPr/>
           </a:p>
         </p:txBody>
       </p:sp>
@@ -12290,6 +12394,7 @@
           <a:lstStyle/>
           <a:p>
             <a:pPr algn="ctr"/>
+            <a:endParaRPr/>
           </a:p>
         </p:txBody>
       </p:sp>
@@ -12310,7 +12415,7 @@
           <a:noFill/>
         </p:spPr>
         <p:txBody>
-          <a:bodyPr wrap="square" lIns="27432" rIns="27432" tIns="27432" bIns="27432" anchor="t">
+          <a:bodyPr wrap="square" lIns="27432" tIns="27432" rIns="27432" bIns="27432" anchor="t">
             <a:spAutoFit/>
           </a:bodyPr>
           <a:lstStyle/>
@@ -12345,7 +12450,7 @@
           <a:noFill/>
         </p:spPr>
         <p:txBody>
-          <a:bodyPr wrap="square" lIns="27432" rIns="27432" tIns="27432" bIns="27432" anchor="t">
+          <a:bodyPr wrap="square" lIns="27432" tIns="27432" rIns="27432" bIns="27432" anchor="t">
             <a:spAutoFit/>
           </a:bodyPr>
           <a:lstStyle/>
@@ -12381,7 +12486,7 @@
           <a:noFill/>
         </p:spPr>
         <p:txBody>
-          <a:bodyPr wrap="square" lIns="27432" rIns="27432" tIns="27432" bIns="27432" anchor="t">
+          <a:bodyPr wrap="square" lIns="27432" tIns="27432" rIns="27432" bIns="27432" anchor="t">
             <a:spAutoFit/>
           </a:bodyPr>
           <a:lstStyle/>
@@ -12441,6 +12546,7 @@
           <a:lstStyle/>
           <a:p>
             <a:pPr algn="ctr"/>
+            <a:endParaRPr/>
           </a:p>
         </p:txBody>
       </p:sp>
@@ -12484,6 +12590,7 @@
           <a:lstStyle/>
           <a:p>
             <a:pPr algn="ctr"/>
+            <a:endParaRPr/>
           </a:p>
         </p:txBody>
       </p:sp>
@@ -12504,7 +12611,7 @@
           <a:noFill/>
         </p:spPr>
         <p:txBody>
-          <a:bodyPr wrap="square" lIns="27432" rIns="27432" tIns="27432" bIns="27432" anchor="t">
+          <a:bodyPr wrap="square" lIns="27432" tIns="27432" rIns="27432" bIns="27432" anchor="t">
             <a:spAutoFit/>
           </a:bodyPr>
           <a:lstStyle/>
@@ -12539,7 +12646,7 @@
           <a:noFill/>
         </p:spPr>
         <p:txBody>
-          <a:bodyPr wrap="square" lIns="27432" rIns="27432" tIns="27432" bIns="27432" anchor="t">
+          <a:bodyPr wrap="square" lIns="27432" tIns="27432" rIns="27432" bIns="27432" anchor="t">
             <a:spAutoFit/>
           </a:bodyPr>
           <a:lstStyle/>
@@ -12574,7 +12681,7 @@
           <a:noFill/>
         </p:spPr>
         <p:txBody>
-          <a:bodyPr wrap="square" lIns="27432" rIns="27432" tIns="27432" bIns="27432" anchor="t">
+          <a:bodyPr wrap="square" lIns="27432" tIns="27432" rIns="27432" bIns="27432" anchor="t">
             <a:spAutoFit/>
           </a:bodyPr>
           <a:lstStyle/>
@@ -12634,6 +12741,7 @@
           <a:lstStyle/>
           <a:p>
             <a:pPr algn="ctr"/>
+            <a:endParaRPr/>
           </a:p>
         </p:txBody>
       </p:sp>
@@ -12677,6 +12785,7 @@
           <a:lstStyle/>
           <a:p>
             <a:pPr algn="ctr"/>
+            <a:endParaRPr/>
           </a:p>
         </p:txBody>
       </p:sp>
@@ -12697,7 +12806,7 @@
           <a:noFill/>
         </p:spPr>
         <p:txBody>
-          <a:bodyPr wrap="square" lIns="27432" rIns="27432" tIns="27432" bIns="27432" anchor="t">
+          <a:bodyPr wrap="square" lIns="27432" tIns="27432" rIns="27432" bIns="27432" anchor="t">
             <a:spAutoFit/>
           </a:bodyPr>
           <a:lstStyle/>
@@ -12732,7 +12841,7 @@
           <a:noFill/>
         </p:spPr>
         <p:txBody>
-          <a:bodyPr wrap="square" lIns="27432" rIns="27432" tIns="27432" bIns="27432" anchor="t">
+          <a:bodyPr wrap="square" lIns="27432" tIns="27432" rIns="27432" bIns="27432" anchor="t">
             <a:spAutoFit/>
           </a:bodyPr>
           <a:lstStyle/>
@@ -12792,6 +12901,7 @@
           <a:lstStyle/>
           <a:p>
             <a:pPr algn="ctr"/>
+            <a:endParaRPr/>
           </a:p>
         </p:txBody>
       </p:sp>
@@ -12835,6 +12945,7 @@
           <a:lstStyle/>
           <a:p>
             <a:pPr algn="ctr"/>
+            <a:endParaRPr/>
           </a:p>
         </p:txBody>
       </p:sp>
@@ -12855,7 +12966,7 @@
           <a:noFill/>
         </p:spPr>
         <p:txBody>
-          <a:bodyPr wrap="square" lIns="27432" rIns="27432" tIns="27432" bIns="27432" anchor="t">
+          <a:bodyPr wrap="square" lIns="27432" tIns="27432" rIns="27432" bIns="27432" anchor="t">
             <a:spAutoFit/>
           </a:bodyPr>
           <a:lstStyle/>
@@ -12890,7 +13001,7 @@
           <a:noFill/>
         </p:spPr>
         <p:txBody>
-          <a:bodyPr wrap="square" lIns="27432" rIns="27432" tIns="27432" bIns="27432" anchor="t">
+          <a:bodyPr wrap="square" lIns="27432" tIns="27432" rIns="27432" bIns="27432" anchor="t">
             <a:spAutoFit/>
           </a:bodyPr>
           <a:lstStyle/>
@@ -12951,7 +13062,7 @@
 </file>
 
 <file path=ppt/slides/slide22.xml><?xml version="1.0" encoding="utf-8"?>
-<p:sld xmlns:a="http://schemas.openxmlformats.org/drawingml/2006/main" xmlns:p="http://schemas.openxmlformats.org/presentationml/2006/main" xmlns:r="http://schemas.openxmlformats.org/officeDocument/2006/relationships">
+<p:sld xmlns:a="http://schemas.openxmlformats.org/drawingml/2006/main" xmlns:r="http://schemas.openxmlformats.org/officeDocument/2006/relationships" xmlns:p="http://schemas.openxmlformats.org/presentationml/2006/main">
   <p:cSld>
     <p:spTree>
       <p:nvGrpSpPr>
@@ -12959,7 +13070,14 @@
         <p:cNvGrpSpPr/>
         <p:nvPr/>
       </p:nvGrpSpPr>
-      <p:grpSpPr/>
+      <p:grpSpPr>
+        <a:xfrm>
+          <a:off x="0" y="0"/>
+          <a:ext cx="0" cy="0"/>
+          <a:chOff x="0" y="0"/>
+          <a:chExt cx="0" cy="0"/>
+        </a:xfrm>
+      </p:grpSpPr>
       <p:sp>
         <p:nvSpPr>
           <p:cNvPr id="2" name="Rectangle 1"/>
@@ -13000,6 +13118,7 @@
           <a:lstStyle/>
           <a:p>
             <a:pPr algn="ctr"/>
+            <a:endParaRPr/>
           </a:p>
         </p:txBody>
       </p:sp>
@@ -13043,6 +13162,7 @@
           <a:lstStyle/>
           <a:p>
             <a:pPr algn="ctr"/>
+            <a:endParaRPr/>
           </a:p>
         </p:txBody>
       </p:sp>
@@ -13191,6 +13311,7 @@
           <a:lstStyle/>
           <a:p>
             <a:pPr algn="ctr"/>
+            <a:endParaRPr/>
           </a:p>
         </p:txBody>
       </p:sp>
@@ -13234,6 +13355,7 @@
           <a:lstStyle/>
           <a:p>
             <a:pPr algn="ctr"/>
+            <a:endParaRPr/>
           </a:p>
         </p:txBody>
       </p:sp>
@@ -13254,7 +13376,7 @@
           <a:noFill/>
         </p:spPr>
         <p:txBody>
-          <a:bodyPr wrap="square" lIns="27432" rIns="27432" tIns="27432" bIns="27432" anchor="t">
+          <a:bodyPr wrap="square" lIns="27432" tIns="27432" rIns="27432" bIns="27432" anchor="t">
             <a:spAutoFit/>
           </a:bodyPr>
           <a:lstStyle/>
@@ -13289,7 +13411,7 @@
           <a:noFill/>
         </p:spPr>
         <p:txBody>
-          <a:bodyPr wrap="square" lIns="27432" rIns="27432" tIns="27432" bIns="27432" anchor="t">
+          <a:bodyPr wrap="square" lIns="27432" tIns="27432" rIns="27432" bIns="27432" anchor="t">
             <a:spAutoFit/>
           </a:bodyPr>
           <a:lstStyle/>
@@ -13349,6 +13471,7 @@
           <a:lstStyle/>
           <a:p>
             <a:pPr algn="ctr"/>
+            <a:endParaRPr/>
           </a:p>
         </p:txBody>
       </p:sp>
@@ -13392,6 +13515,7 @@
           <a:lstStyle/>
           <a:p>
             <a:pPr algn="ctr"/>
+            <a:endParaRPr/>
           </a:p>
         </p:txBody>
       </p:sp>
@@ -13412,7 +13536,7 @@
           <a:noFill/>
         </p:spPr>
         <p:txBody>
-          <a:bodyPr wrap="square" lIns="27432" rIns="27432" tIns="27432" bIns="27432" anchor="t">
+          <a:bodyPr wrap="square" lIns="27432" tIns="27432" rIns="27432" bIns="27432" anchor="t">
             <a:spAutoFit/>
           </a:bodyPr>
           <a:lstStyle/>
@@ -13447,7 +13571,7 @@
           <a:noFill/>
         </p:spPr>
         <p:txBody>
-          <a:bodyPr wrap="square" lIns="27432" rIns="27432" tIns="27432" bIns="27432" anchor="t">
+          <a:bodyPr wrap="square" lIns="27432" tIns="27432" rIns="27432" bIns="27432" anchor="t">
             <a:spAutoFit/>
           </a:bodyPr>
           <a:lstStyle/>
@@ -13507,6 +13631,7 @@
           <a:lstStyle/>
           <a:p>
             <a:pPr algn="ctr"/>
+            <a:endParaRPr/>
           </a:p>
         </p:txBody>
       </p:sp>
@@ -13550,6 +13675,7 @@
           <a:lstStyle/>
           <a:p>
             <a:pPr algn="ctr"/>
+            <a:endParaRPr/>
           </a:p>
         </p:txBody>
       </p:sp>
@@ -13570,7 +13696,7 @@
           <a:noFill/>
         </p:spPr>
         <p:txBody>
-          <a:bodyPr wrap="square" lIns="27432" rIns="27432" tIns="27432" bIns="27432" anchor="t">
+          <a:bodyPr wrap="square" lIns="27432" tIns="27432" rIns="27432" bIns="27432" anchor="t">
             <a:spAutoFit/>
           </a:bodyPr>
           <a:lstStyle/>
@@ -13605,7 +13731,7 @@
           <a:noFill/>
         </p:spPr>
         <p:txBody>
-          <a:bodyPr wrap="square" lIns="27432" rIns="27432" tIns="27432" bIns="27432" anchor="t">
+          <a:bodyPr wrap="square" lIns="27432" tIns="27432" rIns="27432" bIns="27432" anchor="t">
             <a:spAutoFit/>
           </a:bodyPr>
           <a:lstStyle/>
@@ -13669,7 +13795,7 @@
 </file>
 
 <file path=ppt/slides/slide23.xml><?xml version="1.0" encoding="utf-8"?>
-<p:sld xmlns:a="http://schemas.openxmlformats.org/drawingml/2006/main" xmlns:p="http://schemas.openxmlformats.org/presentationml/2006/main" xmlns:r="http://schemas.openxmlformats.org/officeDocument/2006/relationships">
+<p:sld xmlns:a="http://schemas.openxmlformats.org/drawingml/2006/main" xmlns:r="http://schemas.openxmlformats.org/officeDocument/2006/relationships" xmlns:p="http://schemas.openxmlformats.org/presentationml/2006/main">
   <p:cSld>
     <p:spTree>
       <p:nvGrpSpPr>
@@ -13677,7 +13803,14 @@
         <p:cNvGrpSpPr/>
         <p:nvPr/>
       </p:nvGrpSpPr>
-      <p:grpSpPr/>
+      <p:grpSpPr>
+        <a:xfrm>
+          <a:off x="0" y="0"/>
+          <a:ext cx="0" cy="0"/>
+          <a:chOff x="0" y="0"/>
+          <a:chExt cx="0" cy="0"/>
+        </a:xfrm>
+      </p:grpSpPr>
       <p:sp>
         <p:nvSpPr>
           <p:cNvPr id="2" name="Rectangle 1"/>
@@ -13718,6 +13851,7 @@
           <a:lstStyle/>
           <a:p>
             <a:pPr algn="ctr"/>
+            <a:endParaRPr/>
           </a:p>
         </p:txBody>
       </p:sp>
@@ -13761,6 +13895,7 @@
           <a:lstStyle/>
           <a:p>
             <a:pPr algn="ctr"/>
+            <a:endParaRPr/>
           </a:p>
         </p:txBody>
       </p:sp>
@@ -13907,6 +14042,7 @@
           <a:lstStyle/>
           <a:p>
             <a:pPr algn="ctr"/>
+            <a:endParaRPr/>
           </a:p>
         </p:txBody>
       </p:sp>
@@ -13927,7 +14063,7 @@
           <a:noFill/>
         </p:spPr>
         <p:txBody>
-          <a:bodyPr wrap="square" lIns="27432" rIns="27432" tIns="27432" bIns="27432" anchor="ctr">
+          <a:bodyPr wrap="square" lIns="27432" tIns="27432" rIns="27432" bIns="27432" anchor="ctr">
             <a:spAutoFit/>
           </a:bodyPr>
           <a:lstStyle/>
@@ -13962,7 +14098,7 @@
           <a:noFill/>
         </p:spPr>
         <p:txBody>
-          <a:bodyPr wrap="square" lIns="27432" rIns="27432" tIns="27432" bIns="27432" anchor="t">
+          <a:bodyPr wrap="square" lIns="27432" tIns="27432" rIns="27432" bIns="27432" anchor="t">
             <a:spAutoFit/>
           </a:bodyPr>
           <a:lstStyle/>
@@ -14022,6 +14158,7 @@
           <a:lstStyle/>
           <a:p>
             <a:pPr algn="ctr"/>
+            <a:endParaRPr/>
           </a:p>
         </p:txBody>
       </p:sp>
@@ -14042,7 +14179,7 @@
           <a:noFill/>
         </p:spPr>
         <p:txBody>
-          <a:bodyPr wrap="square" lIns="27432" rIns="27432" tIns="27432" bIns="27432" anchor="t">
+          <a:bodyPr wrap="square" lIns="27432" tIns="27432" rIns="27432" bIns="27432" anchor="t">
             <a:spAutoFit/>
           </a:bodyPr>
           <a:lstStyle/>
@@ -14077,7 +14214,7 @@
           <a:noFill/>
         </p:spPr>
         <p:txBody>
-          <a:bodyPr wrap="square" lIns="27432" rIns="27432" tIns="27432" bIns="27432" anchor="t">
+          <a:bodyPr wrap="square" lIns="27432" tIns="27432" rIns="27432" bIns="27432" anchor="t">
             <a:spAutoFit/>
           </a:bodyPr>
           <a:lstStyle/>
@@ -14137,6 +14274,7 @@
           <a:lstStyle/>
           <a:p>
             <a:pPr algn="ctr"/>
+            <a:endParaRPr/>
           </a:p>
         </p:txBody>
       </p:sp>
@@ -14157,7 +14295,7 @@
           <a:noFill/>
         </p:spPr>
         <p:txBody>
-          <a:bodyPr wrap="square" lIns="27432" rIns="27432" tIns="27432" bIns="27432" anchor="t">
+          <a:bodyPr wrap="square" lIns="27432" tIns="27432" rIns="27432" bIns="27432" anchor="t">
             <a:spAutoFit/>
           </a:bodyPr>
           <a:lstStyle/>
@@ -14192,7 +14330,7 @@
           <a:noFill/>
         </p:spPr>
         <p:txBody>
-          <a:bodyPr wrap="square" lIns="27432" rIns="27432" tIns="27432" bIns="27432" anchor="t">
+          <a:bodyPr wrap="square" lIns="27432" tIns="27432" rIns="27432" bIns="27432" anchor="t">
             <a:spAutoFit/>
           </a:bodyPr>
           <a:lstStyle/>
@@ -14252,6 +14390,7 @@
           <a:lstStyle/>
           <a:p>
             <a:pPr algn="ctr"/>
+            <a:endParaRPr/>
           </a:p>
         </p:txBody>
       </p:sp>
@@ -14272,7 +14411,7 @@
           <a:noFill/>
         </p:spPr>
         <p:txBody>
-          <a:bodyPr wrap="square" lIns="27432" rIns="27432" tIns="27432" bIns="27432" anchor="t">
+          <a:bodyPr wrap="square" lIns="27432" tIns="27432" rIns="27432" bIns="27432" anchor="t">
             <a:spAutoFit/>
           </a:bodyPr>
           <a:lstStyle/>
@@ -14307,7 +14446,7 @@
           <a:noFill/>
         </p:spPr>
         <p:txBody>
-          <a:bodyPr wrap="square" lIns="27432" rIns="27432" tIns="27432" bIns="27432" anchor="t">
+          <a:bodyPr wrap="square" lIns="27432" tIns="27432" rIns="27432" bIns="27432" anchor="t">
             <a:spAutoFit/>
           </a:bodyPr>
           <a:lstStyle/>
@@ -14367,6 +14506,7 @@
           <a:lstStyle/>
           <a:p>
             <a:pPr algn="ctr"/>
+            <a:endParaRPr/>
           </a:p>
         </p:txBody>
       </p:sp>
@@ -14387,7 +14527,7 @@
           <a:noFill/>
         </p:spPr>
         <p:txBody>
-          <a:bodyPr wrap="square" lIns="27432" rIns="27432" tIns="27432" bIns="27432" anchor="t">
+          <a:bodyPr wrap="square" lIns="27432" tIns="27432" rIns="27432" bIns="27432" anchor="t">
             <a:spAutoFit/>
           </a:bodyPr>
           <a:lstStyle/>
@@ -14422,7 +14562,7 @@
           <a:noFill/>
         </p:spPr>
         <p:txBody>
-          <a:bodyPr wrap="square" lIns="27432" rIns="27432" tIns="27432" bIns="27432" anchor="t">
+          <a:bodyPr wrap="square" lIns="27432" tIns="27432" rIns="27432" bIns="27432" anchor="t">
             <a:spAutoFit/>
           </a:bodyPr>
           <a:lstStyle/>
@@ -14483,7 +14623,7 @@
 </file>
 
 <file path=ppt/slides/slide24.xml><?xml version="1.0" encoding="utf-8"?>
-<p:sld xmlns:a="http://schemas.openxmlformats.org/drawingml/2006/main" xmlns:p="http://schemas.openxmlformats.org/presentationml/2006/main" xmlns:r="http://schemas.openxmlformats.org/officeDocument/2006/relationships">
+<p:sld xmlns:a="http://schemas.openxmlformats.org/drawingml/2006/main" xmlns:r="http://schemas.openxmlformats.org/officeDocument/2006/relationships" xmlns:p="http://schemas.openxmlformats.org/presentationml/2006/main">
   <p:cSld>
     <p:spTree>
       <p:nvGrpSpPr>
@@ -14491,7 +14631,14 @@
         <p:cNvGrpSpPr/>
         <p:nvPr/>
       </p:nvGrpSpPr>
-      <p:grpSpPr/>
+      <p:grpSpPr>
+        <a:xfrm>
+          <a:off x="0" y="0"/>
+          <a:ext cx="0" cy="0"/>
+          <a:chOff x="0" y="0"/>
+          <a:chExt cx="0" cy="0"/>
+        </a:xfrm>
+      </p:grpSpPr>
       <p:sp>
         <p:nvSpPr>
           <p:cNvPr id="2" name="Rectangle 1"/>
@@ -14532,6 +14679,7 @@
           <a:lstStyle/>
           <a:p>
             <a:pPr algn="ctr"/>
+            <a:endParaRPr/>
           </a:p>
         </p:txBody>
       </p:sp>
@@ -14575,6 +14723,7 @@
           <a:lstStyle/>
           <a:p>
             <a:pPr algn="ctr"/>
+            <a:endParaRPr/>
           </a:p>
         </p:txBody>
       </p:sp>
@@ -14723,6 +14872,7 @@
           <a:lstStyle/>
           <a:p>
             <a:pPr algn="ctr"/>
+            <a:endParaRPr/>
           </a:p>
         </p:txBody>
       </p:sp>
@@ -14766,6 +14916,7 @@
           <a:lstStyle/>
           <a:p>
             <a:pPr algn="ctr"/>
+            <a:endParaRPr/>
           </a:p>
         </p:txBody>
       </p:sp>
@@ -14786,7 +14937,7 @@
           <a:noFill/>
         </p:spPr>
         <p:txBody>
-          <a:bodyPr wrap="square" lIns="27432" rIns="27432" tIns="27432" bIns="27432" anchor="t">
+          <a:bodyPr wrap="square" lIns="27432" tIns="27432" rIns="27432" bIns="27432" anchor="t">
             <a:spAutoFit/>
           </a:bodyPr>
           <a:lstStyle/>
@@ -14821,7 +14972,7 @@
           <a:noFill/>
         </p:spPr>
         <p:txBody>
-          <a:bodyPr wrap="square" lIns="27432" rIns="27432" tIns="27432" bIns="27432" anchor="t">
+          <a:bodyPr wrap="square" lIns="27432" tIns="27432" rIns="27432" bIns="27432" anchor="t">
             <a:spAutoFit/>
           </a:bodyPr>
           <a:lstStyle/>
@@ -14881,6 +15032,7 @@
           <a:lstStyle/>
           <a:p>
             <a:pPr algn="ctr"/>
+            <a:endParaRPr/>
           </a:p>
         </p:txBody>
       </p:sp>
@@ -14924,6 +15076,7 @@
           <a:lstStyle/>
           <a:p>
             <a:pPr algn="ctr"/>
+            <a:endParaRPr/>
           </a:p>
         </p:txBody>
       </p:sp>
@@ -14944,7 +15097,7 @@
           <a:noFill/>
         </p:spPr>
         <p:txBody>
-          <a:bodyPr wrap="square" lIns="27432" rIns="27432" tIns="27432" bIns="27432" anchor="t">
+          <a:bodyPr wrap="square" lIns="27432" tIns="27432" rIns="27432" bIns="27432" anchor="t">
             <a:spAutoFit/>
           </a:bodyPr>
           <a:lstStyle/>
@@ -14979,7 +15132,7 @@
           <a:noFill/>
         </p:spPr>
         <p:txBody>
-          <a:bodyPr wrap="square" lIns="27432" rIns="27432" tIns="27432" bIns="27432" anchor="t">
+          <a:bodyPr wrap="square" lIns="27432" tIns="27432" rIns="27432" bIns="27432" anchor="t">
             <a:spAutoFit/>
           </a:bodyPr>
           <a:lstStyle/>
@@ -15039,6 +15192,7 @@
           <a:lstStyle/>
           <a:p>
             <a:pPr algn="ctr"/>
+            <a:endParaRPr/>
           </a:p>
         </p:txBody>
       </p:sp>
@@ -15082,6 +15236,7 @@
           <a:lstStyle/>
           <a:p>
             <a:pPr algn="ctr"/>
+            <a:endParaRPr/>
           </a:p>
         </p:txBody>
       </p:sp>
@@ -15102,7 +15257,7 @@
           <a:noFill/>
         </p:spPr>
         <p:txBody>
-          <a:bodyPr wrap="square" lIns="27432" rIns="27432" tIns="27432" bIns="27432" anchor="t">
+          <a:bodyPr wrap="square" lIns="27432" tIns="27432" rIns="27432" bIns="27432" anchor="t">
             <a:spAutoFit/>
           </a:bodyPr>
           <a:lstStyle/>
@@ -15137,7 +15292,7 @@
           <a:noFill/>
         </p:spPr>
         <p:txBody>
-          <a:bodyPr wrap="square" lIns="27432" rIns="27432" tIns="27432" bIns="27432" anchor="t">
+          <a:bodyPr wrap="square" lIns="27432" tIns="27432" rIns="27432" bIns="27432" anchor="t">
             <a:spAutoFit/>
           </a:bodyPr>
           <a:lstStyle/>
@@ -15197,6 +15352,7 @@
           <a:lstStyle/>
           <a:p>
             <a:pPr algn="ctr"/>
+            <a:endParaRPr/>
           </a:p>
         </p:txBody>
       </p:sp>
@@ -15240,6 +15396,7 @@
           <a:lstStyle/>
           <a:p>
             <a:pPr algn="ctr"/>
+            <a:endParaRPr/>
           </a:p>
         </p:txBody>
       </p:sp>
@@ -15260,7 +15417,7 @@
           <a:noFill/>
         </p:spPr>
         <p:txBody>
-          <a:bodyPr wrap="square" lIns="27432" rIns="27432" tIns="27432" bIns="27432" anchor="t">
+          <a:bodyPr wrap="square" lIns="27432" tIns="27432" rIns="27432" bIns="27432" anchor="t">
             <a:spAutoFit/>
           </a:bodyPr>
           <a:lstStyle/>
@@ -15295,7 +15452,7 @@
           <a:noFill/>
         </p:spPr>
         <p:txBody>
-          <a:bodyPr wrap="square" lIns="27432" rIns="27432" tIns="27432" bIns="27432" anchor="t">
+          <a:bodyPr wrap="square" lIns="27432" tIns="27432" rIns="27432" bIns="27432" anchor="t">
             <a:spAutoFit/>
           </a:bodyPr>
           <a:lstStyle/>
@@ -15356,7 +15513,7 @@
 </file>
 
 <file path=ppt/slides/slide25.xml><?xml version="1.0" encoding="utf-8"?>
-<p:sld xmlns:a="http://schemas.openxmlformats.org/drawingml/2006/main" xmlns:p="http://schemas.openxmlformats.org/presentationml/2006/main" xmlns:r="http://schemas.openxmlformats.org/officeDocument/2006/relationships">
+<p:sld xmlns:a="http://schemas.openxmlformats.org/drawingml/2006/main" xmlns:r="http://schemas.openxmlformats.org/officeDocument/2006/relationships" xmlns:p="http://schemas.openxmlformats.org/presentationml/2006/main">
   <p:cSld>
     <p:spTree>
       <p:nvGrpSpPr>
@@ -15364,7 +15521,14 @@
         <p:cNvGrpSpPr/>
         <p:nvPr/>
       </p:nvGrpSpPr>
-      <p:grpSpPr/>
+      <p:grpSpPr>
+        <a:xfrm>
+          <a:off x="0" y="0"/>
+          <a:ext cx="0" cy="0"/>
+          <a:chOff x="0" y="0"/>
+          <a:chExt cx="0" cy="0"/>
+        </a:xfrm>
+      </p:grpSpPr>
       <p:sp>
         <p:nvSpPr>
           <p:cNvPr id="2" name="Rectangle 1"/>
@@ -15405,6 +15569,7 @@
           <a:lstStyle/>
           <a:p>
             <a:pPr algn="ctr"/>
+            <a:endParaRPr/>
           </a:p>
         </p:txBody>
       </p:sp>
@@ -15448,6 +15613,7 @@
           <a:lstStyle/>
           <a:p>
             <a:pPr algn="ctr"/>
+            <a:endParaRPr/>
           </a:p>
         </p:txBody>
       </p:sp>
@@ -15594,6 +15760,7 @@
           <a:lstStyle/>
           <a:p>
             <a:pPr algn="ctr"/>
+            <a:endParaRPr/>
           </a:p>
         </p:txBody>
       </p:sp>
@@ -15614,7 +15781,7 @@
           <a:noFill/>
         </p:spPr>
         <p:txBody>
-          <a:bodyPr wrap="square" lIns="27432" rIns="27432" tIns="27432" bIns="27432" anchor="ctr">
+          <a:bodyPr wrap="square" lIns="27432" tIns="27432" rIns="27432" bIns="27432" anchor="ctr">
             <a:spAutoFit/>
           </a:bodyPr>
           <a:lstStyle/>
@@ -15649,7 +15816,7 @@
           <a:noFill/>
         </p:spPr>
         <p:txBody>
-          <a:bodyPr wrap="square" lIns="27432" rIns="27432" tIns="27432" bIns="27432" anchor="t">
+          <a:bodyPr wrap="square" lIns="27432" tIns="27432" rIns="27432" bIns="27432" anchor="t">
             <a:spAutoFit/>
           </a:bodyPr>
           <a:lstStyle/>
@@ -15709,6 +15876,7 @@
           <a:lstStyle/>
           <a:p>
             <a:pPr algn="ctr"/>
+            <a:endParaRPr/>
           </a:p>
         </p:txBody>
       </p:sp>
@@ -15729,7 +15897,7 @@
           <a:noFill/>
         </p:spPr>
         <p:txBody>
-          <a:bodyPr wrap="square" lIns="27432" rIns="27432" tIns="27432" bIns="27432" anchor="t">
+          <a:bodyPr wrap="square" lIns="27432" tIns="27432" rIns="27432" bIns="27432" anchor="t">
             <a:spAutoFit/>
           </a:bodyPr>
           <a:lstStyle/>
@@ -15789,6 +15957,7 @@
           <a:lstStyle/>
           <a:p>
             <a:pPr algn="ctr"/>
+            <a:endParaRPr/>
           </a:p>
         </p:txBody>
       </p:sp>
@@ -15809,7 +15978,7 @@
           <a:noFill/>
         </p:spPr>
         <p:txBody>
-          <a:bodyPr wrap="square" lIns="27432" rIns="27432" tIns="27432" bIns="27432" anchor="t">
+          <a:bodyPr wrap="square" lIns="27432" tIns="27432" rIns="27432" bIns="27432" anchor="t">
             <a:spAutoFit/>
           </a:bodyPr>
           <a:lstStyle/>
@@ -15869,6 +16038,7 @@
           <a:lstStyle/>
           <a:p>
             <a:pPr algn="ctr"/>
+            <a:endParaRPr/>
           </a:p>
         </p:txBody>
       </p:sp>
@@ -15889,7 +16059,7 @@
           <a:noFill/>
         </p:spPr>
         <p:txBody>
-          <a:bodyPr wrap="square" lIns="27432" rIns="27432" tIns="27432" bIns="27432" anchor="t">
+          <a:bodyPr wrap="square" lIns="27432" tIns="27432" rIns="27432" bIns="27432" anchor="t">
             <a:spAutoFit/>
           </a:bodyPr>
           <a:lstStyle/>
@@ -15949,6 +16119,7 @@
           <a:lstStyle/>
           <a:p>
             <a:pPr algn="ctr"/>
+            <a:endParaRPr/>
           </a:p>
         </p:txBody>
       </p:sp>
@@ -15969,7 +16140,7 @@
           <a:noFill/>
         </p:spPr>
         <p:txBody>
-          <a:bodyPr wrap="square" lIns="27432" rIns="27432" tIns="27432" bIns="27432" anchor="t">
+          <a:bodyPr wrap="square" lIns="27432" tIns="27432" rIns="27432" bIns="27432" anchor="t">
             <a:spAutoFit/>
           </a:bodyPr>
           <a:lstStyle/>
@@ -16030,7 +16201,7 @@
 </file>
 
 <file path=ppt/slides/slide26.xml><?xml version="1.0" encoding="utf-8"?>
-<p:sld xmlns:a="http://schemas.openxmlformats.org/drawingml/2006/main" xmlns:p="http://schemas.openxmlformats.org/presentationml/2006/main" xmlns:r="http://schemas.openxmlformats.org/officeDocument/2006/relationships">
+<p:sld xmlns:a="http://schemas.openxmlformats.org/drawingml/2006/main" xmlns:r="http://schemas.openxmlformats.org/officeDocument/2006/relationships" xmlns:p="http://schemas.openxmlformats.org/presentationml/2006/main">
   <p:cSld>
     <p:spTree>
       <p:nvGrpSpPr>
@@ -16038,7 +16209,14 @@
         <p:cNvGrpSpPr/>
         <p:nvPr/>
       </p:nvGrpSpPr>
-      <p:grpSpPr/>
+      <p:grpSpPr>
+        <a:xfrm>
+          <a:off x="0" y="0"/>
+          <a:ext cx="0" cy="0"/>
+          <a:chOff x="0" y="0"/>
+          <a:chExt cx="0" cy="0"/>
+        </a:xfrm>
+      </p:grpSpPr>
       <p:sp>
         <p:nvSpPr>
           <p:cNvPr id="2" name="Rectangle 1"/>
@@ -16079,6 +16257,7 @@
           <a:lstStyle/>
           <a:p>
             <a:pPr algn="ctr"/>
+            <a:endParaRPr/>
           </a:p>
         </p:txBody>
       </p:sp>
@@ -16122,6 +16301,7 @@
           <a:lstStyle/>
           <a:p>
             <a:pPr algn="ctr"/>
+            <a:endParaRPr/>
           </a:p>
         </p:txBody>
       </p:sp>
@@ -16268,6 +16448,7 @@
           <a:lstStyle/>
           <a:p>
             <a:pPr algn="ctr"/>
+            <a:endParaRPr/>
           </a:p>
         </p:txBody>
       </p:sp>
@@ -16288,7 +16469,7 @@
           <a:noFill/>
         </p:spPr>
         <p:txBody>
-          <a:bodyPr wrap="square" lIns="27432" rIns="27432" tIns="27432" bIns="27432" anchor="ctr">
+          <a:bodyPr wrap="square" lIns="27432" tIns="27432" rIns="27432" bIns="27432" anchor="ctr">
             <a:spAutoFit/>
           </a:bodyPr>
           <a:lstStyle/>
@@ -16323,7 +16504,7 @@
           <a:noFill/>
         </p:spPr>
         <p:txBody>
-          <a:bodyPr wrap="square" lIns="27432" rIns="27432" tIns="27432" bIns="27432" anchor="t">
+          <a:bodyPr wrap="square" lIns="27432" tIns="27432" rIns="27432" bIns="27432" anchor="t">
             <a:spAutoFit/>
           </a:bodyPr>
           <a:lstStyle/>
@@ -16383,6 +16564,7 @@
           <a:lstStyle/>
           <a:p>
             <a:pPr algn="ctr"/>
+            <a:endParaRPr/>
           </a:p>
         </p:txBody>
       </p:sp>
@@ -16426,6 +16608,7 @@
           <a:lstStyle/>
           <a:p>
             <a:pPr algn="ctr"/>
+            <a:endParaRPr/>
           </a:p>
         </p:txBody>
       </p:sp>
@@ -16446,7 +16629,7 @@
           <a:noFill/>
         </p:spPr>
         <p:txBody>
-          <a:bodyPr wrap="square" lIns="27432" rIns="27432" tIns="27432" bIns="27432" anchor="t">
+          <a:bodyPr wrap="square" lIns="27432" tIns="27432" rIns="27432" bIns="27432" anchor="t">
             <a:spAutoFit/>
           </a:bodyPr>
           <a:lstStyle/>
@@ -16481,7 +16664,7 @@
           <a:noFill/>
         </p:spPr>
         <p:txBody>
-          <a:bodyPr wrap="square" lIns="27432" rIns="27432" tIns="27432" bIns="27432" anchor="t">
+          <a:bodyPr wrap="square" lIns="27432" tIns="27432" rIns="27432" bIns="27432" anchor="t">
             <a:spAutoFit/>
           </a:bodyPr>
           <a:lstStyle/>
@@ -16516,7 +16699,7 @@
           <a:noFill/>
         </p:spPr>
         <p:txBody>
-          <a:bodyPr wrap="square" lIns="27432" rIns="27432" tIns="27432" bIns="27432" anchor="t">
+          <a:bodyPr wrap="square" lIns="27432" tIns="27432" rIns="27432" bIns="27432" anchor="t">
             <a:spAutoFit/>
           </a:bodyPr>
           <a:lstStyle/>
@@ -16577,7 +16760,7 @@
 </file>
 
 <file path=ppt/slides/slide27.xml><?xml version="1.0" encoding="utf-8"?>
-<p:sld xmlns:a="http://schemas.openxmlformats.org/drawingml/2006/main" xmlns:p="http://schemas.openxmlformats.org/presentationml/2006/main" xmlns:r="http://schemas.openxmlformats.org/officeDocument/2006/relationships">
+<p:sld xmlns:a="http://schemas.openxmlformats.org/drawingml/2006/main" xmlns:r="http://schemas.openxmlformats.org/officeDocument/2006/relationships" xmlns:p="http://schemas.openxmlformats.org/presentationml/2006/main">
   <p:cSld>
     <p:spTree>
       <p:nvGrpSpPr>
@@ -16585,7 +16768,14 @@
         <p:cNvGrpSpPr/>
         <p:nvPr/>
       </p:nvGrpSpPr>
-      <p:grpSpPr/>
+      <p:grpSpPr>
+        <a:xfrm>
+          <a:off x="0" y="0"/>
+          <a:ext cx="0" cy="0"/>
+          <a:chOff x="0" y="0"/>
+          <a:chExt cx="0" cy="0"/>
+        </a:xfrm>
+      </p:grpSpPr>
       <p:sp>
         <p:nvSpPr>
           <p:cNvPr id="2" name="Rectangle 1"/>
@@ -16626,6 +16816,7 @@
           <a:lstStyle/>
           <a:p>
             <a:pPr algn="ctr"/>
+            <a:endParaRPr/>
           </a:p>
         </p:txBody>
       </p:sp>
@@ -16669,6 +16860,7 @@
           <a:lstStyle/>
           <a:p>
             <a:pPr algn="ctr"/>
+            <a:endParaRPr/>
           </a:p>
         </p:txBody>
       </p:sp>
@@ -16815,6 +17007,7 @@
           <a:lstStyle/>
           <a:p>
             <a:pPr algn="ctr"/>
+            <a:endParaRPr/>
           </a:p>
         </p:txBody>
       </p:sp>
@@ -16835,7 +17028,7 @@
           <a:noFill/>
         </p:spPr>
         <p:txBody>
-          <a:bodyPr wrap="square" lIns="27432" rIns="27432" tIns="27432" bIns="27432" anchor="ctr">
+          <a:bodyPr wrap="square" lIns="27432" tIns="27432" rIns="27432" bIns="27432" anchor="ctr">
             <a:spAutoFit/>
           </a:bodyPr>
           <a:lstStyle/>
@@ -16870,7 +17063,7 @@
           <a:noFill/>
         </p:spPr>
         <p:txBody>
-          <a:bodyPr wrap="square" lIns="27432" rIns="27432" tIns="27432" bIns="27432" anchor="t">
+          <a:bodyPr wrap="square" lIns="27432" tIns="27432" rIns="27432" bIns="27432" anchor="t">
             <a:spAutoFit/>
           </a:bodyPr>
           <a:lstStyle/>
@@ -16930,6 +17123,7 @@
           <a:lstStyle/>
           <a:p>
             <a:pPr algn="ctr"/>
+            <a:endParaRPr/>
           </a:p>
         </p:txBody>
       </p:sp>
@@ -16973,6 +17167,7 @@
           <a:lstStyle/>
           <a:p>
             <a:pPr algn="ctr"/>
+            <a:endParaRPr/>
           </a:p>
         </p:txBody>
       </p:sp>
@@ -16993,7 +17188,7 @@
           <a:noFill/>
         </p:spPr>
         <p:txBody>
-          <a:bodyPr wrap="square" lIns="27432" rIns="27432" tIns="27432" bIns="27432" anchor="t">
+          <a:bodyPr wrap="square" lIns="27432" tIns="27432" rIns="27432" bIns="27432" anchor="t">
             <a:spAutoFit/>
           </a:bodyPr>
           <a:lstStyle/>
@@ -17028,7 +17223,7 @@
           <a:noFill/>
         </p:spPr>
         <p:txBody>
-          <a:bodyPr wrap="square" lIns="27432" rIns="27432" tIns="27432" bIns="27432" anchor="t">
+          <a:bodyPr wrap="square" lIns="27432" tIns="27432" rIns="27432" bIns="27432" anchor="t">
             <a:spAutoFit/>
           </a:bodyPr>
           <a:lstStyle/>
@@ -17066,7 +17261,7 @@
           <a:noFill/>
         </p:spPr>
         <p:txBody>
-          <a:bodyPr wrap="square" lIns="27432" rIns="27432" tIns="27432" bIns="27432" anchor="t">
+          <a:bodyPr wrap="square" lIns="27432" tIns="27432" rIns="27432" bIns="27432" anchor="t">
             <a:spAutoFit/>
           </a:bodyPr>
           <a:lstStyle/>
@@ -17127,7 +17322,7 @@
 </file>
 
 <file path=ppt/slides/slide28.xml><?xml version="1.0" encoding="utf-8"?>
-<p:sld xmlns:a="http://schemas.openxmlformats.org/drawingml/2006/main" xmlns:p="http://schemas.openxmlformats.org/presentationml/2006/main" xmlns:r="http://schemas.openxmlformats.org/officeDocument/2006/relationships">
+<p:sld xmlns:a="http://schemas.openxmlformats.org/drawingml/2006/main" xmlns:r="http://schemas.openxmlformats.org/officeDocument/2006/relationships" xmlns:p="http://schemas.openxmlformats.org/presentationml/2006/main">
   <p:cSld>
     <p:spTree>
       <p:nvGrpSpPr>
@@ -17135,7 +17330,14 @@
         <p:cNvGrpSpPr/>
         <p:nvPr/>
       </p:nvGrpSpPr>
-      <p:grpSpPr/>
+      <p:grpSpPr>
+        <a:xfrm>
+          <a:off x="0" y="0"/>
+          <a:ext cx="0" cy="0"/>
+          <a:chOff x="0" y="0"/>
+          <a:chExt cx="0" cy="0"/>
+        </a:xfrm>
+      </p:grpSpPr>
       <p:sp>
         <p:nvSpPr>
           <p:cNvPr id="2" name="Rectangle 1"/>
@@ -17176,6 +17378,7 @@
           <a:lstStyle/>
           <a:p>
             <a:pPr algn="ctr"/>
+            <a:endParaRPr/>
           </a:p>
         </p:txBody>
       </p:sp>
@@ -17219,6 +17422,7 @@
           <a:lstStyle/>
           <a:p>
             <a:pPr algn="ctr"/>
+            <a:endParaRPr/>
           </a:p>
         </p:txBody>
       </p:sp>
@@ -17342,7 +17546,7 @@
           <a:noFill/>
         </p:spPr>
         <p:txBody>
-          <a:bodyPr wrap="square" lIns="27432" rIns="27432" tIns="27432" bIns="27432" anchor="t">
+          <a:bodyPr wrap="square" lIns="27432" tIns="27432" rIns="27432" bIns="27432" anchor="t">
             <a:spAutoFit/>
           </a:bodyPr>
           <a:lstStyle/>
@@ -17400,6 +17604,7 @@
           <a:lstStyle/>
           <a:p>
             <a:pPr algn="ctr"/>
+            <a:endParaRPr/>
           </a:p>
         </p:txBody>
       </p:sp>
@@ -17420,7 +17625,7 @@
           <a:noFill/>
         </p:spPr>
         <p:txBody>
-          <a:bodyPr wrap="square" lIns="27432" rIns="27432" tIns="27432" bIns="27432" anchor="ctr">
+          <a:bodyPr wrap="square" lIns="27432" tIns="27432" rIns="27432" bIns="27432" anchor="ctr">
             <a:spAutoFit/>
           </a:bodyPr>
           <a:lstStyle/>
@@ -17481,7 +17686,7 @@
 </file>
 
 <file path=ppt/slides/slide29.xml><?xml version="1.0" encoding="utf-8"?>
-<p:sld xmlns:a="http://schemas.openxmlformats.org/drawingml/2006/main" xmlns:p="http://schemas.openxmlformats.org/presentationml/2006/main" xmlns:r="http://schemas.openxmlformats.org/officeDocument/2006/relationships">
+<p:sld xmlns:a="http://schemas.openxmlformats.org/drawingml/2006/main" xmlns:r="http://schemas.openxmlformats.org/officeDocument/2006/relationships" xmlns:p="http://schemas.openxmlformats.org/presentationml/2006/main">
   <p:cSld>
     <p:spTree>
       <p:nvGrpSpPr>
@@ -17489,7 +17694,14 @@
         <p:cNvGrpSpPr/>
         <p:nvPr/>
       </p:nvGrpSpPr>
-      <p:grpSpPr/>
+      <p:grpSpPr>
+        <a:xfrm>
+          <a:off x="0" y="0"/>
+          <a:ext cx="0" cy="0"/>
+          <a:chOff x="0" y="0"/>
+          <a:chExt cx="0" cy="0"/>
+        </a:xfrm>
+      </p:grpSpPr>
       <p:sp>
         <p:nvSpPr>
           <p:cNvPr id="2" name="Rectangle 1"/>
@@ -17530,6 +17742,7 @@
           <a:lstStyle/>
           <a:p>
             <a:pPr algn="ctr"/>
+            <a:endParaRPr/>
           </a:p>
         </p:txBody>
       </p:sp>
@@ -17573,6 +17786,7 @@
           <a:lstStyle/>
           <a:p>
             <a:pPr algn="ctr"/>
+            <a:endParaRPr/>
           </a:p>
         </p:txBody>
       </p:sp>
@@ -17616,6 +17830,7 @@
           <a:lstStyle/>
           <a:p>
             <a:pPr algn="ctr"/>
+            <a:endParaRPr/>
           </a:p>
         </p:txBody>
       </p:sp>
@@ -17636,7 +17851,7 @@
           <a:noFill/>
         </p:spPr>
         <p:txBody>
-          <a:bodyPr wrap="square" lIns="27432" rIns="27432" tIns="27432" bIns="27432" anchor="t">
+          <a:bodyPr wrap="square" lIns="27432" tIns="27432" rIns="27432" bIns="27432" anchor="t">
             <a:spAutoFit/>
           </a:bodyPr>
           <a:lstStyle/>
@@ -17671,7 +17886,7 @@
           <a:noFill/>
         </p:spPr>
         <p:txBody>
-          <a:bodyPr wrap="square" lIns="27432" rIns="27432" tIns="27432" bIns="27432" anchor="t">
+          <a:bodyPr wrap="square" lIns="27432" tIns="27432" rIns="27432" bIns="27432" anchor="t">
             <a:spAutoFit/>
           </a:bodyPr>
           <a:lstStyle/>
@@ -17706,7 +17921,7 @@
           <a:noFill/>
         </p:spPr>
         <p:txBody>
-          <a:bodyPr wrap="square" lIns="27432" rIns="27432" tIns="27432" bIns="27432" anchor="t">
+          <a:bodyPr wrap="square" lIns="27432" tIns="27432" rIns="27432" bIns="27432" anchor="t">
             <a:spAutoFit/>
           </a:bodyPr>
           <a:lstStyle/>
@@ -17764,6 +17979,7 @@
           <a:lstStyle/>
           <a:p>
             <a:pPr algn="ctr"/>
+            <a:endParaRPr/>
           </a:p>
         </p:txBody>
       </p:sp>
@@ -17784,7 +18000,7 @@
           <a:noFill/>
         </p:spPr>
         <p:txBody>
-          <a:bodyPr wrap="square" lIns="27432" rIns="27432" tIns="27432" bIns="27432" anchor="ctr">
+          <a:bodyPr wrap="square" lIns="27432" tIns="27432" rIns="27432" bIns="27432" anchor="ctr">
             <a:spAutoFit/>
           </a:bodyPr>
           <a:lstStyle/>
@@ -17819,7 +18035,7 @@
           <a:noFill/>
         </p:spPr>
         <p:txBody>
-          <a:bodyPr wrap="square" lIns="27432" rIns="27432" tIns="27432" bIns="27432" anchor="t">
+          <a:bodyPr wrap="square" lIns="27432" tIns="27432" rIns="27432" bIns="27432" anchor="t">
             <a:spAutoFit/>
           </a:bodyPr>
           <a:lstStyle/>
@@ -17846,7 +18062,7 @@
 </file>
 
 <file path=ppt/slides/slide3.xml><?xml version="1.0" encoding="utf-8"?>
-<p:sld xmlns:a="http://schemas.openxmlformats.org/drawingml/2006/main" xmlns:p="http://schemas.openxmlformats.org/presentationml/2006/main" xmlns:r="http://schemas.openxmlformats.org/officeDocument/2006/relationships">
+<p:sld xmlns:a="http://schemas.openxmlformats.org/drawingml/2006/main" xmlns:r="http://schemas.openxmlformats.org/officeDocument/2006/relationships" xmlns:p="http://schemas.openxmlformats.org/presentationml/2006/main">
   <p:cSld>
     <p:spTree>
       <p:nvGrpSpPr>
@@ -17854,7 +18070,14 @@
         <p:cNvGrpSpPr/>
         <p:nvPr/>
       </p:nvGrpSpPr>
-      <p:grpSpPr/>
+      <p:grpSpPr>
+        <a:xfrm>
+          <a:off x="0" y="0"/>
+          <a:ext cx="0" cy="0"/>
+          <a:chOff x="0" y="0"/>
+          <a:chExt cx="0" cy="0"/>
+        </a:xfrm>
+      </p:grpSpPr>
       <p:sp>
         <p:nvSpPr>
           <p:cNvPr id="2" name="Rectangle 1"/>
@@ -17895,6 +18118,7 @@
           <a:lstStyle/>
           <a:p>
             <a:pPr algn="ctr"/>
+            <a:endParaRPr/>
           </a:p>
         </p:txBody>
       </p:sp>
@@ -17938,6 +18162,7 @@
           <a:lstStyle/>
           <a:p>
             <a:pPr algn="ctr"/>
+            <a:endParaRPr/>
           </a:p>
         </p:txBody>
       </p:sp>
@@ -18084,6 +18309,7 @@
           <a:lstStyle/>
           <a:p>
             <a:pPr algn="ctr"/>
+            <a:endParaRPr/>
           </a:p>
         </p:txBody>
       </p:sp>
@@ -18104,7 +18330,7 @@
           <a:noFill/>
         </p:spPr>
         <p:txBody>
-          <a:bodyPr wrap="square" lIns="27432" rIns="27432" tIns="27432" bIns="27432" anchor="ctr">
+          <a:bodyPr wrap="square" lIns="27432" tIns="27432" rIns="27432" bIns="27432" anchor="ctr">
             <a:spAutoFit/>
           </a:bodyPr>
           <a:lstStyle/>
@@ -18139,7 +18365,7 @@
           <a:noFill/>
         </p:spPr>
         <p:txBody>
-          <a:bodyPr wrap="square" lIns="27432" rIns="27432" tIns="27432" bIns="27432" anchor="t">
+          <a:bodyPr wrap="square" lIns="27432" tIns="27432" rIns="27432" bIns="27432" anchor="t">
             <a:spAutoFit/>
           </a:bodyPr>
           <a:lstStyle/>
@@ -18174,7 +18400,7 @@
           <a:noFill/>
         </p:spPr>
         <p:txBody>
-          <a:bodyPr wrap="square" lIns="27432" rIns="27432" tIns="27432" bIns="27432" anchor="t">
+          <a:bodyPr wrap="square" lIns="27432" tIns="27432" rIns="27432" bIns="27432" anchor="t">
             <a:spAutoFit/>
           </a:bodyPr>
           <a:lstStyle/>
@@ -18232,6 +18458,7 @@
           <a:lstStyle/>
           <a:p>
             <a:pPr algn="ctr"/>
+            <a:endParaRPr/>
           </a:p>
         </p:txBody>
       </p:sp>
@@ -18252,7 +18479,7 @@
           <a:noFill/>
         </p:spPr>
         <p:txBody>
-          <a:bodyPr wrap="square" lIns="27432" rIns="27432" tIns="27432" bIns="27432" anchor="ctr">
+          <a:bodyPr wrap="square" lIns="27432" tIns="27432" rIns="27432" bIns="27432" anchor="ctr">
             <a:spAutoFit/>
           </a:bodyPr>
           <a:lstStyle/>
@@ -18287,7 +18514,7 @@
           <a:noFill/>
         </p:spPr>
         <p:txBody>
-          <a:bodyPr wrap="square" lIns="27432" rIns="27432" tIns="27432" bIns="27432" anchor="t">
+          <a:bodyPr wrap="square" lIns="27432" tIns="27432" rIns="27432" bIns="27432" anchor="t">
             <a:spAutoFit/>
           </a:bodyPr>
           <a:lstStyle/>
@@ -18322,7 +18549,7 @@
           <a:noFill/>
         </p:spPr>
         <p:txBody>
-          <a:bodyPr wrap="square" lIns="27432" rIns="27432" tIns="27432" bIns="27432" anchor="t">
+          <a:bodyPr wrap="square" lIns="27432" tIns="27432" rIns="27432" bIns="27432" anchor="t">
             <a:spAutoFit/>
           </a:bodyPr>
           <a:lstStyle/>
@@ -18380,6 +18607,7 @@
           <a:lstStyle/>
           <a:p>
             <a:pPr algn="ctr"/>
+            <a:endParaRPr/>
           </a:p>
         </p:txBody>
       </p:sp>
@@ -18400,7 +18628,7 @@
           <a:noFill/>
         </p:spPr>
         <p:txBody>
-          <a:bodyPr wrap="square" lIns="27432" rIns="27432" tIns="27432" bIns="27432" anchor="ctr">
+          <a:bodyPr wrap="square" lIns="27432" tIns="27432" rIns="27432" bIns="27432" anchor="ctr">
             <a:spAutoFit/>
           </a:bodyPr>
           <a:lstStyle/>
@@ -18435,7 +18663,7 @@
           <a:noFill/>
         </p:spPr>
         <p:txBody>
-          <a:bodyPr wrap="square" lIns="27432" rIns="27432" tIns="27432" bIns="27432" anchor="t">
+          <a:bodyPr wrap="square" lIns="27432" tIns="27432" rIns="27432" bIns="27432" anchor="t">
             <a:spAutoFit/>
           </a:bodyPr>
           <a:lstStyle/>
@@ -18470,7 +18698,7 @@
           <a:noFill/>
         </p:spPr>
         <p:txBody>
-          <a:bodyPr wrap="square" lIns="27432" rIns="27432" tIns="27432" bIns="27432" anchor="t">
+          <a:bodyPr wrap="square" lIns="27432" tIns="27432" rIns="27432" bIns="27432" anchor="t">
             <a:spAutoFit/>
           </a:bodyPr>
           <a:lstStyle/>
@@ -18528,6 +18756,7 @@
           <a:lstStyle/>
           <a:p>
             <a:pPr algn="ctr"/>
+            <a:endParaRPr/>
           </a:p>
         </p:txBody>
       </p:sp>
@@ -18548,7 +18777,7 @@
           <a:noFill/>
         </p:spPr>
         <p:txBody>
-          <a:bodyPr wrap="square" lIns="27432" rIns="27432" tIns="27432" bIns="27432" anchor="ctr">
+          <a:bodyPr wrap="square" lIns="27432" tIns="27432" rIns="27432" bIns="27432" anchor="ctr">
             <a:spAutoFit/>
           </a:bodyPr>
           <a:lstStyle/>
@@ -18583,7 +18812,7 @@
           <a:noFill/>
         </p:spPr>
         <p:txBody>
-          <a:bodyPr wrap="square" lIns="27432" rIns="27432" tIns="27432" bIns="27432" anchor="t">
+          <a:bodyPr wrap="square" lIns="27432" tIns="27432" rIns="27432" bIns="27432" anchor="t">
             <a:spAutoFit/>
           </a:bodyPr>
           <a:lstStyle/>
@@ -18618,7 +18847,7 @@
           <a:noFill/>
         </p:spPr>
         <p:txBody>
-          <a:bodyPr wrap="square" lIns="27432" rIns="27432" tIns="27432" bIns="27432" anchor="t">
+          <a:bodyPr wrap="square" lIns="27432" tIns="27432" rIns="27432" bIns="27432" anchor="t">
             <a:spAutoFit/>
           </a:bodyPr>
           <a:lstStyle/>
@@ -18653,7 +18882,7 @@
           <a:noFill/>
         </p:spPr>
         <p:txBody>
-          <a:bodyPr wrap="square" lIns="27432" rIns="27432" tIns="27432" bIns="27432" anchor="t">
+          <a:bodyPr wrap="square" lIns="27432" tIns="27432" rIns="27432" bIns="27432" anchor="t">
             <a:spAutoFit/>
           </a:bodyPr>
           <a:lstStyle/>
@@ -18680,7 +18909,7 @@
 </file>
 
 <file path=ppt/slides/slide30.xml><?xml version="1.0" encoding="utf-8"?>
-<p:sld xmlns:a="http://schemas.openxmlformats.org/drawingml/2006/main" xmlns:p="http://schemas.openxmlformats.org/presentationml/2006/main" xmlns:r="http://schemas.openxmlformats.org/officeDocument/2006/relationships">
+<p:sld xmlns:a="http://schemas.openxmlformats.org/drawingml/2006/main" xmlns:r="http://schemas.openxmlformats.org/officeDocument/2006/relationships" xmlns:p="http://schemas.openxmlformats.org/presentationml/2006/main">
   <p:cSld>
     <p:spTree>
       <p:nvGrpSpPr>
@@ -18688,7 +18917,14 @@
         <p:cNvGrpSpPr/>
         <p:nvPr/>
       </p:nvGrpSpPr>
-      <p:grpSpPr/>
+      <p:grpSpPr>
+        <a:xfrm>
+          <a:off x="0" y="0"/>
+          <a:ext cx="0" cy="0"/>
+          <a:chOff x="0" y="0"/>
+          <a:chExt cx="0" cy="0"/>
+        </a:xfrm>
+      </p:grpSpPr>
       <p:sp>
         <p:nvSpPr>
           <p:cNvPr id="2" name="Rectangle 1"/>
@@ -18729,6 +18965,7 @@
           <a:lstStyle/>
           <a:p>
             <a:pPr algn="ctr"/>
+            <a:endParaRPr/>
           </a:p>
         </p:txBody>
       </p:sp>
@@ -18772,6 +19009,7 @@
           <a:lstStyle/>
           <a:p>
             <a:pPr algn="ctr"/>
+            <a:endParaRPr/>
           </a:p>
         </p:txBody>
       </p:sp>
@@ -18920,6 +19158,7 @@
           <a:lstStyle/>
           <a:p>
             <a:pPr algn="ctr"/>
+            <a:endParaRPr/>
           </a:p>
         </p:txBody>
       </p:sp>
@@ -18963,6 +19202,7 @@
           <a:lstStyle/>
           <a:p>
             <a:pPr algn="ctr"/>
+            <a:endParaRPr/>
           </a:p>
         </p:txBody>
       </p:sp>
@@ -18983,7 +19223,7 @@
           <a:noFill/>
         </p:spPr>
         <p:txBody>
-          <a:bodyPr wrap="square" lIns="27432" rIns="27432" tIns="27432" bIns="27432" anchor="t">
+          <a:bodyPr wrap="square" lIns="27432" tIns="27432" rIns="27432" bIns="27432" anchor="t">
             <a:spAutoFit/>
           </a:bodyPr>
           <a:lstStyle/>
@@ -19018,7 +19258,7 @@
           <a:noFill/>
         </p:spPr>
         <p:txBody>
-          <a:bodyPr wrap="square" lIns="27432" rIns="27432" tIns="27432" bIns="27432" anchor="t">
+          <a:bodyPr wrap="square" lIns="27432" tIns="27432" rIns="27432" bIns="27432" anchor="t">
             <a:spAutoFit/>
           </a:bodyPr>
           <a:lstStyle/>
@@ -19078,6 +19318,7 @@
           <a:lstStyle/>
           <a:p>
             <a:pPr algn="ctr"/>
+            <a:endParaRPr/>
           </a:p>
         </p:txBody>
       </p:sp>
@@ -19121,6 +19362,7 @@
           <a:lstStyle/>
           <a:p>
             <a:pPr algn="ctr"/>
+            <a:endParaRPr/>
           </a:p>
         </p:txBody>
       </p:sp>
@@ -19141,7 +19383,7 @@
           <a:noFill/>
         </p:spPr>
         <p:txBody>
-          <a:bodyPr wrap="square" lIns="27432" rIns="27432" tIns="27432" bIns="27432" anchor="t">
+          <a:bodyPr wrap="square" lIns="27432" tIns="27432" rIns="27432" bIns="27432" anchor="t">
             <a:spAutoFit/>
           </a:bodyPr>
           <a:lstStyle/>
@@ -19176,7 +19418,7 @@
           <a:noFill/>
         </p:spPr>
         <p:txBody>
-          <a:bodyPr wrap="square" lIns="27432" rIns="27432" tIns="27432" bIns="27432" anchor="t">
+          <a:bodyPr wrap="square" lIns="27432" tIns="27432" rIns="27432" bIns="27432" anchor="t">
             <a:spAutoFit/>
           </a:bodyPr>
           <a:lstStyle/>
@@ -19236,6 +19478,7 @@
           <a:lstStyle/>
           <a:p>
             <a:pPr algn="ctr"/>
+            <a:endParaRPr/>
           </a:p>
         </p:txBody>
       </p:sp>
@@ -19279,6 +19522,7 @@
           <a:lstStyle/>
           <a:p>
             <a:pPr algn="ctr"/>
+            <a:endParaRPr/>
           </a:p>
         </p:txBody>
       </p:sp>
@@ -19299,7 +19543,7 @@
           <a:noFill/>
         </p:spPr>
         <p:txBody>
-          <a:bodyPr wrap="square" lIns="27432" rIns="27432" tIns="27432" bIns="27432" anchor="t">
+          <a:bodyPr wrap="square" lIns="27432" tIns="27432" rIns="27432" bIns="27432" anchor="t">
             <a:spAutoFit/>
           </a:bodyPr>
           <a:lstStyle/>
@@ -19334,7 +19578,7 @@
           <a:noFill/>
         </p:spPr>
         <p:txBody>
-          <a:bodyPr wrap="square" lIns="27432" rIns="27432" tIns="27432" bIns="27432" anchor="t">
+          <a:bodyPr wrap="square" lIns="27432" tIns="27432" rIns="27432" bIns="27432" anchor="t">
             <a:spAutoFit/>
           </a:bodyPr>
           <a:lstStyle/>
@@ -19394,6 +19638,7 @@
           <a:lstStyle/>
           <a:p>
             <a:pPr algn="ctr"/>
+            <a:endParaRPr/>
           </a:p>
         </p:txBody>
       </p:sp>
@@ -19437,6 +19682,7 @@
           <a:lstStyle/>
           <a:p>
             <a:pPr algn="ctr"/>
+            <a:endParaRPr/>
           </a:p>
         </p:txBody>
       </p:sp>
@@ -19457,7 +19703,7 @@
           <a:noFill/>
         </p:spPr>
         <p:txBody>
-          <a:bodyPr wrap="square" lIns="27432" rIns="27432" tIns="27432" bIns="27432" anchor="t">
+          <a:bodyPr wrap="square" lIns="27432" tIns="27432" rIns="27432" bIns="27432" anchor="t">
             <a:spAutoFit/>
           </a:bodyPr>
           <a:lstStyle/>
@@ -19492,7 +19738,7 @@
           <a:noFill/>
         </p:spPr>
         <p:txBody>
-          <a:bodyPr wrap="square" lIns="27432" rIns="27432" tIns="27432" bIns="27432" anchor="t">
+          <a:bodyPr wrap="square" lIns="27432" tIns="27432" rIns="27432" bIns="27432" anchor="t">
             <a:spAutoFit/>
           </a:bodyPr>
           <a:lstStyle/>
@@ -19527,7 +19773,7 @@
           <a:noFill/>
         </p:spPr>
         <p:txBody>
-          <a:bodyPr wrap="square" lIns="27432" rIns="27432" tIns="27432" bIns="27432" anchor="t">
+          <a:bodyPr wrap="square" lIns="27432" tIns="27432" rIns="27432" bIns="27432" anchor="t">
             <a:spAutoFit/>
           </a:bodyPr>
           <a:lstStyle/>
@@ -19588,7 +19834,7 @@
 </file>
 
 <file path=ppt/slides/slide31.xml><?xml version="1.0" encoding="utf-8"?>
-<p:sld xmlns:a="http://schemas.openxmlformats.org/drawingml/2006/main" xmlns:p="http://schemas.openxmlformats.org/presentationml/2006/main" xmlns:r="http://schemas.openxmlformats.org/officeDocument/2006/relationships">
+<p:sld xmlns:a="http://schemas.openxmlformats.org/drawingml/2006/main" xmlns:r="http://schemas.openxmlformats.org/officeDocument/2006/relationships" xmlns:p="http://schemas.openxmlformats.org/presentationml/2006/main">
   <p:cSld>
     <p:spTree>
       <p:nvGrpSpPr>
@@ -19596,7 +19842,14 @@
         <p:cNvGrpSpPr/>
         <p:nvPr/>
       </p:nvGrpSpPr>
-      <p:grpSpPr/>
+      <p:grpSpPr>
+        <a:xfrm>
+          <a:off x="0" y="0"/>
+          <a:ext cx="0" cy="0"/>
+          <a:chOff x="0" y="0"/>
+          <a:chExt cx="0" cy="0"/>
+        </a:xfrm>
+      </p:grpSpPr>
       <p:sp>
         <p:nvSpPr>
           <p:cNvPr id="2" name="Rectangle 1"/>
@@ -19637,6 +19890,7 @@
           <a:lstStyle/>
           <a:p>
             <a:pPr algn="ctr"/>
+            <a:endParaRPr/>
           </a:p>
         </p:txBody>
       </p:sp>
@@ -19680,6 +19934,7 @@
           <a:lstStyle/>
           <a:p>
             <a:pPr algn="ctr"/>
+            <a:endParaRPr/>
           </a:p>
         </p:txBody>
       </p:sp>
@@ -19828,6 +20083,7 @@
           <a:lstStyle/>
           <a:p>
             <a:pPr algn="ctr"/>
+            <a:endParaRPr/>
           </a:p>
         </p:txBody>
       </p:sp>
@@ -19871,6 +20127,7 @@
           <a:lstStyle/>
           <a:p>
             <a:pPr algn="ctr"/>
+            <a:endParaRPr/>
           </a:p>
         </p:txBody>
       </p:sp>
@@ -19891,7 +20148,7 @@
           <a:noFill/>
         </p:spPr>
         <p:txBody>
-          <a:bodyPr wrap="square" lIns="27432" rIns="27432" tIns="27432" bIns="27432" anchor="t">
+          <a:bodyPr wrap="square" lIns="27432" tIns="27432" rIns="27432" bIns="27432" anchor="t">
             <a:spAutoFit/>
           </a:bodyPr>
           <a:lstStyle/>
@@ -19926,7 +20183,7 @@
           <a:noFill/>
         </p:spPr>
         <p:txBody>
-          <a:bodyPr wrap="square" lIns="27432" rIns="27432" tIns="27432" bIns="27432" anchor="t">
+          <a:bodyPr wrap="square" lIns="27432" tIns="27432" rIns="27432" bIns="27432" anchor="t">
             <a:spAutoFit/>
           </a:bodyPr>
           <a:lstStyle/>
@@ -19986,6 +20243,7 @@
           <a:lstStyle/>
           <a:p>
             <a:pPr algn="ctr"/>
+            <a:endParaRPr/>
           </a:p>
         </p:txBody>
       </p:sp>
@@ -20029,6 +20287,7 @@
           <a:lstStyle/>
           <a:p>
             <a:pPr algn="ctr"/>
+            <a:endParaRPr/>
           </a:p>
         </p:txBody>
       </p:sp>
@@ -20049,7 +20308,7 @@
           <a:noFill/>
         </p:spPr>
         <p:txBody>
-          <a:bodyPr wrap="square" lIns="27432" rIns="27432" tIns="27432" bIns="27432" anchor="t">
+          <a:bodyPr wrap="square" lIns="27432" tIns="27432" rIns="27432" bIns="27432" anchor="t">
             <a:spAutoFit/>
           </a:bodyPr>
           <a:lstStyle/>
@@ -20084,7 +20343,7 @@
           <a:noFill/>
         </p:spPr>
         <p:txBody>
-          <a:bodyPr wrap="square" lIns="27432" rIns="27432" tIns="27432" bIns="27432" anchor="t">
+          <a:bodyPr wrap="square" lIns="27432" tIns="27432" rIns="27432" bIns="27432" anchor="t">
             <a:spAutoFit/>
           </a:bodyPr>
           <a:lstStyle/>
@@ -20144,6 +20403,7 @@
           <a:lstStyle/>
           <a:p>
             <a:pPr algn="ctr"/>
+            <a:endParaRPr/>
           </a:p>
         </p:txBody>
       </p:sp>
@@ -20187,6 +20447,7 @@
           <a:lstStyle/>
           <a:p>
             <a:pPr algn="ctr"/>
+            <a:endParaRPr/>
           </a:p>
         </p:txBody>
       </p:sp>
@@ -20207,7 +20468,7 @@
           <a:noFill/>
         </p:spPr>
         <p:txBody>
-          <a:bodyPr wrap="square" lIns="27432" rIns="27432" tIns="27432" bIns="27432" anchor="t">
+          <a:bodyPr wrap="square" lIns="27432" tIns="27432" rIns="27432" bIns="27432" anchor="t">
             <a:spAutoFit/>
           </a:bodyPr>
           <a:lstStyle/>
@@ -20242,7 +20503,7 @@
           <a:noFill/>
         </p:spPr>
         <p:txBody>
-          <a:bodyPr wrap="square" lIns="27432" rIns="27432" tIns="27432" bIns="27432" anchor="t">
+          <a:bodyPr wrap="square" lIns="27432" tIns="27432" rIns="27432" bIns="27432" anchor="t">
             <a:spAutoFit/>
           </a:bodyPr>
           <a:lstStyle/>
@@ -20302,6 +20563,7 @@
           <a:lstStyle/>
           <a:p>
             <a:pPr algn="ctr"/>
+            <a:endParaRPr/>
           </a:p>
         </p:txBody>
       </p:sp>
@@ -20345,6 +20607,7 @@
           <a:lstStyle/>
           <a:p>
             <a:pPr algn="ctr"/>
+            <a:endParaRPr/>
           </a:p>
         </p:txBody>
       </p:sp>
@@ -20365,7 +20628,7 @@
           <a:noFill/>
         </p:spPr>
         <p:txBody>
-          <a:bodyPr wrap="square" lIns="27432" rIns="27432" tIns="27432" bIns="27432" anchor="t">
+          <a:bodyPr wrap="square" lIns="27432" tIns="27432" rIns="27432" bIns="27432" anchor="t">
             <a:spAutoFit/>
           </a:bodyPr>
           <a:lstStyle/>
@@ -20400,7 +20663,7 @@
           <a:noFill/>
         </p:spPr>
         <p:txBody>
-          <a:bodyPr wrap="square" lIns="27432" rIns="27432" tIns="27432" bIns="27432" anchor="t">
+          <a:bodyPr wrap="square" lIns="27432" tIns="27432" rIns="27432" bIns="27432" anchor="t">
             <a:spAutoFit/>
           </a:bodyPr>
           <a:lstStyle/>
@@ -20435,7 +20698,7 @@
           <a:noFill/>
         </p:spPr>
         <p:txBody>
-          <a:bodyPr wrap="square" lIns="27432" rIns="27432" tIns="27432" bIns="27432" anchor="t">
+          <a:bodyPr wrap="square" lIns="27432" tIns="27432" rIns="27432" bIns="27432" anchor="t">
             <a:spAutoFit/>
           </a:bodyPr>
           <a:lstStyle/>
@@ -20496,7 +20759,7 @@
 </file>
 
 <file path=ppt/slides/slide32.xml><?xml version="1.0" encoding="utf-8"?>
-<p:sld xmlns:a="http://schemas.openxmlformats.org/drawingml/2006/main" xmlns:p="http://schemas.openxmlformats.org/presentationml/2006/main" xmlns:r="http://schemas.openxmlformats.org/officeDocument/2006/relationships">
+<p:sld xmlns:a="http://schemas.openxmlformats.org/drawingml/2006/main" xmlns:r="http://schemas.openxmlformats.org/officeDocument/2006/relationships" xmlns:p="http://schemas.openxmlformats.org/presentationml/2006/main">
   <p:cSld>
     <p:spTree>
       <p:nvGrpSpPr>
@@ -20504,7 +20767,14 @@
         <p:cNvGrpSpPr/>
         <p:nvPr/>
       </p:nvGrpSpPr>
-      <p:grpSpPr/>
+      <p:grpSpPr>
+        <a:xfrm>
+          <a:off x="0" y="0"/>
+          <a:ext cx="0" cy="0"/>
+          <a:chOff x="0" y="0"/>
+          <a:chExt cx="0" cy="0"/>
+        </a:xfrm>
+      </p:grpSpPr>
       <p:sp>
         <p:nvSpPr>
           <p:cNvPr id="2" name="Rectangle 1"/>
@@ -20545,6 +20815,7 @@
           <a:lstStyle/>
           <a:p>
             <a:pPr algn="ctr"/>
+            <a:endParaRPr/>
           </a:p>
         </p:txBody>
       </p:sp>
@@ -20588,6 +20859,7 @@
           <a:lstStyle/>
           <a:p>
             <a:pPr algn="ctr"/>
+            <a:endParaRPr/>
           </a:p>
         </p:txBody>
       </p:sp>
@@ -20736,6 +21008,7 @@
           <a:lstStyle/>
           <a:p>
             <a:pPr algn="ctr"/>
+            <a:endParaRPr/>
           </a:p>
         </p:txBody>
       </p:sp>
@@ -20779,6 +21052,7 @@
           <a:lstStyle/>
           <a:p>
             <a:pPr algn="ctr"/>
+            <a:endParaRPr/>
           </a:p>
         </p:txBody>
       </p:sp>
@@ -20799,7 +21073,7 @@
           <a:noFill/>
         </p:spPr>
         <p:txBody>
-          <a:bodyPr wrap="square" lIns="27432" rIns="27432" tIns="27432" bIns="27432" anchor="t">
+          <a:bodyPr wrap="square" lIns="27432" tIns="27432" rIns="27432" bIns="27432" anchor="t">
             <a:spAutoFit/>
           </a:bodyPr>
           <a:lstStyle/>
@@ -20834,7 +21108,7 @@
           <a:noFill/>
         </p:spPr>
         <p:txBody>
-          <a:bodyPr wrap="square" lIns="27432" rIns="27432" tIns="27432" bIns="27432" anchor="t">
+          <a:bodyPr wrap="square" lIns="27432" tIns="27432" rIns="27432" bIns="27432" anchor="t">
             <a:spAutoFit/>
           </a:bodyPr>
           <a:lstStyle/>
@@ -20896,6 +21170,7 @@
           <a:lstStyle/>
           <a:p>
             <a:pPr algn="ctr"/>
+            <a:endParaRPr/>
           </a:p>
         </p:txBody>
       </p:sp>
@@ -20939,6 +21214,7 @@
           <a:lstStyle/>
           <a:p>
             <a:pPr algn="ctr"/>
+            <a:endParaRPr/>
           </a:p>
         </p:txBody>
       </p:sp>
@@ -20959,7 +21235,7 @@
           <a:noFill/>
         </p:spPr>
         <p:txBody>
-          <a:bodyPr wrap="square" lIns="27432" rIns="27432" tIns="27432" bIns="27432" anchor="t">
+          <a:bodyPr wrap="square" lIns="27432" tIns="27432" rIns="27432" bIns="27432" anchor="t">
             <a:spAutoFit/>
           </a:bodyPr>
           <a:lstStyle/>
@@ -20994,7 +21270,7 @@
           <a:noFill/>
         </p:spPr>
         <p:txBody>
-          <a:bodyPr wrap="square" lIns="27432" rIns="27432" tIns="27432" bIns="27432" anchor="t">
+          <a:bodyPr wrap="square" lIns="27432" tIns="27432" rIns="27432" bIns="27432" anchor="t">
             <a:spAutoFit/>
           </a:bodyPr>
           <a:lstStyle/>
@@ -21061,7 +21337,7 @@
 </file>
 
 <file path=ppt/slides/slide33.xml><?xml version="1.0" encoding="utf-8"?>
-<p:sld xmlns:a="http://schemas.openxmlformats.org/drawingml/2006/main" xmlns:p="http://schemas.openxmlformats.org/presentationml/2006/main" xmlns:r="http://schemas.openxmlformats.org/officeDocument/2006/relationships">
+<p:sld xmlns:a="http://schemas.openxmlformats.org/drawingml/2006/main" xmlns:r="http://schemas.openxmlformats.org/officeDocument/2006/relationships" xmlns:p="http://schemas.openxmlformats.org/presentationml/2006/main">
   <p:cSld>
     <p:spTree>
       <p:nvGrpSpPr>
@@ -21069,7 +21345,14 @@
         <p:cNvGrpSpPr/>
         <p:nvPr/>
       </p:nvGrpSpPr>
-      <p:grpSpPr/>
+      <p:grpSpPr>
+        <a:xfrm>
+          <a:off x="0" y="0"/>
+          <a:ext cx="0" cy="0"/>
+          <a:chOff x="0" y="0"/>
+          <a:chExt cx="0" cy="0"/>
+        </a:xfrm>
+      </p:grpSpPr>
       <p:sp>
         <p:nvSpPr>
           <p:cNvPr id="2" name="Rectangle 1"/>
@@ -21110,6 +21393,7 @@
           <a:lstStyle/>
           <a:p>
             <a:pPr algn="ctr"/>
+            <a:endParaRPr/>
           </a:p>
         </p:txBody>
       </p:sp>
@@ -21153,6 +21437,7 @@
           <a:lstStyle/>
           <a:p>
             <a:pPr algn="ctr"/>
+            <a:endParaRPr/>
           </a:p>
         </p:txBody>
       </p:sp>
@@ -21299,6 +21584,7 @@
           <a:lstStyle/>
           <a:p>
             <a:pPr algn="ctr"/>
+            <a:endParaRPr/>
           </a:p>
         </p:txBody>
       </p:sp>
@@ -21319,7 +21605,7 @@
           <a:noFill/>
         </p:spPr>
         <p:txBody>
-          <a:bodyPr wrap="square" lIns="27432" rIns="27432" tIns="27432" bIns="27432" anchor="ctr">
+          <a:bodyPr wrap="square" lIns="27432" tIns="27432" rIns="27432" bIns="27432" anchor="ctr">
             <a:spAutoFit/>
           </a:bodyPr>
           <a:lstStyle/>
@@ -21354,7 +21640,7 @@
           <a:noFill/>
         </p:spPr>
         <p:txBody>
-          <a:bodyPr wrap="square" lIns="27432" rIns="27432" tIns="27432" bIns="27432" anchor="t">
+          <a:bodyPr wrap="square" lIns="27432" tIns="27432" rIns="27432" bIns="27432" anchor="t">
             <a:spAutoFit/>
           </a:bodyPr>
           <a:lstStyle/>
@@ -21414,6 +21700,7 @@
           <a:lstStyle/>
           <a:p>
             <a:pPr algn="ctr"/>
+            <a:endParaRPr/>
           </a:p>
         </p:txBody>
       </p:sp>
@@ -21434,7 +21721,7 @@
           <a:noFill/>
         </p:spPr>
         <p:txBody>
-          <a:bodyPr wrap="square" lIns="27432" rIns="27432" tIns="27432" bIns="27432" anchor="t">
+          <a:bodyPr wrap="square" lIns="27432" tIns="27432" rIns="27432" bIns="27432" anchor="t">
             <a:spAutoFit/>
           </a:bodyPr>
           <a:lstStyle/>
@@ -21494,6 +21781,7 @@
           <a:lstStyle/>
           <a:p>
             <a:pPr algn="ctr"/>
+            <a:endParaRPr/>
           </a:p>
         </p:txBody>
       </p:sp>
@@ -21514,7 +21802,7 @@
           <a:noFill/>
         </p:spPr>
         <p:txBody>
-          <a:bodyPr wrap="square" lIns="27432" rIns="27432" tIns="27432" bIns="27432" anchor="t">
+          <a:bodyPr wrap="square" lIns="27432" tIns="27432" rIns="27432" bIns="27432" anchor="t">
             <a:spAutoFit/>
           </a:bodyPr>
           <a:lstStyle/>
@@ -21574,6 +21862,7 @@
           <a:lstStyle/>
           <a:p>
             <a:pPr algn="ctr"/>
+            <a:endParaRPr/>
           </a:p>
         </p:txBody>
       </p:sp>
@@ -21594,7 +21883,7 @@
           <a:noFill/>
         </p:spPr>
         <p:txBody>
-          <a:bodyPr wrap="square" lIns="27432" rIns="27432" tIns="27432" bIns="27432" anchor="t">
+          <a:bodyPr wrap="square" lIns="27432" tIns="27432" rIns="27432" bIns="27432" anchor="t">
             <a:spAutoFit/>
           </a:bodyPr>
           <a:lstStyle/>
@@ -21654,6 +21943,7 @@
           <a:lstStyle/>
           <a:p>
             <a:pPr algn="ctr"/>
+            <a:endParaRPr/>
           </a:p>
         </p:txBody>
       </p:sp>
@@ -21674,7 +21964,7 @@
           <a:noFill/>
         </p:spPr>
         <p:txBody>
-          <a:bodyPr wrap="square" lIns="27432" rIns="27432" tIns="27432" bIns="27432" anchor="t">
+          <a:bodyPr wrap="square" lIns="27432" tIns="27432" rIns="27432" bIns="27432" anchor="t">
             <a:spAutoFit/>
           </a:bodyPr>
           <a:lstStyle/>
@@ -21734,6 +22024,7 @@
           <a:lstStyle/>
           <a:p>
             <a:pPr algn="ctr"/>
+            <a:endParaRPr/>
           </a:p>
         </p:txBody>
       </p:sp>
@@ -21754,7 +22045,7 @@
           <a:noFill/>
         </p:spPr>
         <p:txBody>
-          <a:bodyPr wrap="square" lIns="27432" rIns="27432" tIns="27432" bIns="27432" anchor="t">
+          <a:bodyPr wrap="square" lIns="27432" tIns="27432" rIns="27432" bIns="27432" anchor="t">
             <a:spAutoFit/>
           </a:bodyPr>
           <a:lstStyle/>
@@ -21815,7 +22106,7 @@
 </file>
 
 <file path=ppt/slides/slide34.xml><?xml version="1.0" encoding="utf-8"?>
-<p:sld xmlns:a="http://schemas.openxmlformats.org/drawingml/2006/main" xmlns:p="http://schemas.openxmlformats.org/presentationml/2006/main" xmlns:r="http://schemas.openxmlformats.org/officeDocument/2006/relationships">
+<p:sld xmlns:a="http://schemas.openxmlformats.org/drawingml/2006/main" xmlns:r="http://schemas.openxmlformats.org/officeDocument/2006/relationships" xmlns:p="http://schemas.openxmlformats.org/presentationml/2006/main">
   <p:cSld>
     <p:spTree>
       <p:nvGrpSpPr>
@@ -21823,7 +22114,14 @@
         <p:cNvGrpSpPr/>
         <p:nvPr/>
       </p:nvGrpSpPr>
-      <p:grpSpPr/>
+      <p:grpSpPr>
+        <a:xfrm>
+          <a:off x="0" y="0"/>
+          <a:ext cx="0" cy="0"/>
+          <a:chOff x="0" y="0"/>
+          <a:chExt cx="0" cy="0"/>
+        </a:xfrm>
+      </p:grpSpPr>
       <p:sp>
         <p:nvSpPr>
           <p:cNvPr id="2" name="Rectangle 1"/>
@@ -21864,6 +22162,7 @@
           <a:lstStyle/>
           <a:p>
             <a:pPr algn="ctr"/>
+            <a:endParaRPr/>
           </a:p>
         </p:txBody>
       </p:sp>
@@ -21907,6 +22206,7 @@
           <a:lstStyle/>
           <a:p>
             <a:pPr algn="ctr"/>
+            <a:endParaRPr/>
           </a:p>
         </p:txBody>
       </p:sp>
@@ -22053,6 +22353,7 @@
           <a:lstStyle/>
           <a:p>
             <a:pPr algn="ctr"/>
+            <a:endParaRPr/>
           </a:p>
         </p:txBody>
       </p:sp>
@@ -22073,7 +22374,7 @@
           <a:noFill/>
         </p:spPr>
         <p:txBody>
-          <a:bodyPr wrap="square" lIns="27432" rIns="27432" tIns="27432" bIns="27432" anchor="ctr">
+          <a:bodyPr wrap="square" lIns="27432" tIns="27432" rIns="27432" bIns="27432" anchor="ctr">
             <a:spAutoFit/>
           </a:bodyPr>
           <a:lstStyle/>
@@ -22108,7 +22409,7 @@
           <a:noFill/>
         </p:spPr>
         <p:txBody>
-          <a:bodyPr wrap="square" lIns="27432" rIns="27432" tIns="27432" bIns="27432" anchor="t">
+          <a:bodyPr wrap="square" lIns="27432" tIns="27432" rIns="27432" bIns="27432" anchor="t">
             <a:spAutoFit/>
           </a:bodyPr>
           <a:lstStyle/>
@@ -22168,6 +22469,7 @@
           <a:lstStyle/>
           <a:p>
             <a:pPr algn="ctr"/>
+            <a:endParaRPr/>
           </a:p>
         </p:txBody>
       </p:sp>
@@ -22211,6 +22513,7 @@
           <a:lstStyle/>
           <a:p>
             <a:pPr algn="ctr"/>
+            <a:endParaRPr/>
           </a:p>
         </p:txBody>
       </p:sp>
@@ -22231,7 +22534,7 @@
           <a:noFill/>
         </p:spPr>
         <p:txBody>
-          <a:bodyPr wrap="square" lIns="27432" rIns="27432" tIns="27432" bIns="27432" anchor="t">
+          <a:bodyPr wrap="square" lIns="27432" tIns="27432" rIns="27432" bIns="27432" anchor="t">
             <a:spAutoFit/>
           </a:bodyPr>
           <a:lstStyle/>
@@ -22266,7 +22569,7 @@
           <a:noFill/>
         </p:spPr>
         <p:txBody>
-          <a:bodyPr wrap="square" lIns="27432" rIns="27432" tIns="27432" bIns="27432" anchor="t">
+          <a:bodyPr wrap="square" lIns="27432" tIns="27432" rIns="27432" bIns="27432" anchor="t">
             <a:spAutoFit/>
           </a:bodyPr>
           <a:lstStyle/>
@@ -22301,7 +22604,7 @@
           <a:noFill/>
         </p:spPr>
         <p:txBody>
-          <a:bodyPr wrap="square" lIns="27432" rIns="27432" tIns="27432" bIns="27432" anchor="t">
+          <a:bodyPr wrap="square" lIns="27432" tIns="27432" rIns="27432" bIns="27432" anchor="t">
             <a:spAutoFit/>
           </a:bodyPr>
           <a:lstStyle/>
@@ -22362,7 +22665,7 @@
 </file>
 
 <file path=ppt/slides/slide35.xml><?xml version="1.0" encoding="utf-8"?>
-<p:sld xmlns:a="http://schemas.openxmlformats.org/drawingml/2006/main" xmlns:p="http://schemas.openxmlformats.org/presentationml/2006/main" xmlns:r="http://schemas.openxmlformats.org/officeDocument/2006/relationships">
+<p:sld xmlns:a="http://schemas.openxmlformats.org/drawingml/2006/main" xmlns:r="http://schemas.openxmlformats.org/officeDocument/2006/relationships" xmlns:p="http://schemas.openxmlformats.org/presentationml/2006/main">
   <p:cSld>
     <p:spTree>
       <p:nvGrpSpPr>
@@ -22370,7 +22673,14 @@
         <p:cNvGrpSpPr/>
         <p:nvPr/>
       </p:nvGrpSpPr>
-      <p:grpSpPr/>
+      <p:grpSpPr>
+        <a:xfrm>
+          <a:off x="0" y="0"/>
+          <a:ext cx="0" cy="0"/>
+          <a:chOff x="0" y="0"/>
+          <a:chExt cx="0" cy="0"/>
+        </a:xfrm>
+      </p:grpSpPr>
       <p:sp>
         <p:nvSpPr>
           <p:cNvPr id="2" name="Rectangle 1"/>
@@ -22411,6 +22721,7 @@
           <a:lstStyle/>
           <a:p>
             <a:pPr algn="ctr"/>
+            <a:endParaRPr/>
           </a:p>
         </p:txBody>
       </p:sp>
@@ -22454,6 +22765,7 @@
           <a:lstStyle/>
           <a:p>
             <a:pPr algn="ctr"/>
+            <a:endParaRPr/>
           </a:p>
         </p:txBody>
       </p:sp>
@@ -22600,6 +22912,7 @@
           <a:lstStyle/>
           <a:p>
             <a:pPr algn="ctr"/>
+            <a:endParaRPr/>
           </a:p>
         </p:txBody>
       </p:sp>
@@ -22620,7 +22933,7 @@
           <a:noFill/>
         </p:spPr>
         <p:txBody>
-          <a:bodyPr wrap="square" lIns="27432" rIns="27432" tIns="27432" bIns="27432" anchor="ctr">
+          <a:bodyPr wrap="square" lIns="27432" tIns="27432" rIns="27432" bIns="27432" anchor="ctr">
             <a:spAutoFit/>
           </a:bodyPr>
           <a:lstStyle/>
@@ -22655,7 +22968,7 @@
           <a:noFill/>
         </p:spPr>
         <p:txBody>
-          <a:bodyPr wrap="square" lIns="36576" rIns="36576" tIns="27432" bIns="27432">
+          <a:bodyPr wrap="square" lIns="36576" tIns="27432" rIns="36576" bIns="27432">
             <a:spAutoFit/>
           </a:bodyPr>
           <a:lstStyle/>
@@ -22768,7 +23081,7 @@
 </file>
 
 <file path=ppt/slides/slide36.xml><?xml version="1.0" encoding="utf-8"?>
-<p:sld xmlns:a="http://schemas.openxmlformats.org/drawingml/2006/main" xmlns:p="http://schemas.openxmlformats.org/presentationml/2006/main" xmlns:r="http://schemas.openxmlformats.org/officeDocument/2006/relationships">
+<p:sld xmlns:a="http://schemas.openxmlformats.org/drawingml/2006/main" xmlns:r="http://schemas.openxmlformats.org/officeDocument/2006/relationships" xmlns:p="http://schemas.openxmlformats.org/presentationml/2006/main">
   <p:cSld>
     <p:spTree>
       <p:nvGrpSpPr>
@@ -22776,7 +23089,14 @@
         <p:cNvGrpSpPr/>
         <p:nvPr/>
       </p:nvGrpSpPr>
-      <p:grpSpPr/>
+      <p:grpSpPr>
+        <a:xfrm>
+          <a:off x="0" y="0"/>
+          <a:ext cx="0" cy="0"/>
+          <a:chOff x="0" y="0"/>
+          <a:chExt cx="0" cy="0"/>
+        </a:xfrm>
+      </p:grpSpPr>
       <p:sp>
         <p:nvSpPr>
           <p:cNvPr id="2" name="Rectangle 1"/>
@@ -22817,6 +23137,7 @@
           <a:lstStyle/>
           <a:p>
             <a:pPr algn="ctr"/>
+            <a:endParaRPr/>
           </a:p>
         </p:txBody>
       </p:sp>
@@ -22860,6 +23181,7 @@
           <a:lstStyle/>
           <a:p>
             <a:pPr algn="ctr"/>
+            <a:endParaRPr/>
           </a:p>
         </p:txBody>
       </p:sp>
@@ -23008,6 +23330,7 @@
           <a:lstStyle/>
           <a:p>
             <a:pPr algn="ctr"/>
+            <a:endParaRPr/>
           </a:p>
         </p:txBody>
       </p:sp>
@@ -23051,6 +23374,7 @@
           <a:lstStyle/>
           <a:p>
             <a:pPr algn="ctr"/>
+            <a:endParaRPr/>
           </a:p>
         </p:txBody>
       </p:sp>
@@ -23071,7 +23395,7 @@
           <a:noFill/>
         </p:spPr>
         <p:txBody>
-          <a:bodyPr wrap="square" lIns="27432" rIns="27432" tIns="27432" bIns="27432" anchor="t">
+          <a:bodyPr wrap="square" lIns="27432" tIns="27432" rIns="27432" bIns="27432" anchor="t">
             <a:spAutoFit/>
           </a:bodyPr>
           <a:lstStyle/>
@@ -23106,7 +23430,7 @@
           <a:noFill/>
         </p:spPr>
         <p:txBody>
-          <a:bodyPr wrap="square" lIns="27432" rIns="27432" tIns="27432" bIns="27432" anchor="t">
+          <a:bodyPr wrap="square" lIns="27432" tIns="27432" rIns="27432" bIns="27432" anchor="t">
             <a:spAutoFit/>
           </a:bodyPr>
           <a:lstStyle/>
@@ -23166,6 +23490,7 @@
           <a:lstStyle/>
           <a:p>
             <a:pPr algn="ctr"/>
+            <a:endParaRPr/>
           </a:p>
         </p:txBody>
       </p:sp>
@@ -23209,6 +23534,7 @@
           <a:lstStyle/>
           <a:p>
             <a:pPr algn="ctr"/>
+            <a:endParaRPr/>
           </a:p>
         </p:txBody>
       </p:sp>
@@ -23229,7 +23555,7 @@
           <a:noFill/>
         </p:spPr>
         <p:txBody>
-          <a:bodyPr wrap="square" lIns="27432" rIns="27432" tIns="27432" bIns="27432" anchor="t">
+          <a:bodyPr wrap="square" lIns="27432" tIns="27432" rIns="27432" bIns="27432" anchor="t">
             <a:spAutoFit/>
           </a:bodyPr>
           <a:lstStyle/>
@@ -23264,7 +23590,7 @@
           <a:noFill/>
         </p:spPr>
         <p:txBody>
-          <a:bodyPr wrap="square" lIns="27432" rIns="27432" tIns="27432" bIns="27432" anchor="t">
+          <a:bodyPr wrap="square" lIns="27432" tIns="27432" rIns="27432" bIns="27432" anchor="t">
             <a:spAutoFit/>
           </a:bodyPr>
           <a:lstStyle/>
@@ -23324,6 +23650,7 @@
           <a:lstStyle/>
           <a:p>
             <a:pPr algn="ctr"/>
+            <a:endParaRPr/>
           </a:p>
         </p:txBody>
       </p:sp>
@@ -23367,6 +23694,7 @@
           <a:lstStyle/>
           <a:p>
             <a:pPr algn="ctr"/>
+            <a:endParaRPr/>
           </a:p>
         </p:txBody>
       </p:sp>
@@ -23387,7 +23715,7 @@
           <a:noFill/>
         </p:spPr>
         <p:txBody>
-          <a:bodyPr wrap="square" lIns="27432" rIns="27432" tIns="27432" bIns="27432" anchor="t">
+          <a:bodyPr wrap="square" lIns="27432" tIns="27432" rIns="27432" bIns="27432" anchor="t">
             <a:spAutoFit/>
           </a:bodyPr>
           <a:lstStyle/>
@@ -23422,7 +23750,7 @@
           <a:noFill/>
         </p:spPr>
         <p:txBody>
-          <a:bodyPr wrap="square" lIns="27432" rIns="27432" tIns="27432" bIns="27432" anchor="t">
+          <a:bodyPr wrap="square" lIns="27432" tIns="27432" rIns="27432" bIns="27432" anchor="t">
             <a:spAutoFit/>
           </a:bodyPr>
           <a:lstStyle/>
@@ -23482,6 +23810,7 @@
           <a:lstStyle/>
           <a:p>
             <a:pPr algn="ctr"/>
+            <a:endParaRPr/>
           </a:p>
         </p:txBody>
       </p:sp>
@@ -23525,6 +23854,7 @@
           <a:lstStyle/>
           <a:p>
             <a:pPr algn="ctr"/>
+            <a:endParaRPr/>
           </a:p>
         </p:txBody>
       </p:sp>
@@ -23545,7 +23875,7 @@
           <a:noFill/>
         </p:spPr>
         <p:txBody>
-          <a:bodyPr wrap="square" lIns="27432" rIns="27432" tIns="27432" bIns="27432" anchor="t">
+          <a:bodyPr wrap="square" lIns="27432" tIns="27432" rIns="27432" bIns="27432" anchor="t">
             <a:spAutoFit/>
           </a:bodyPr>
           <a:lstStyle/>
@@ -23580,7 +23910,7 @@
           <a:noFill/>
         </p:spPr>
         <p:txBody>
-          <a:bodyPr wrap="square" lIns="27432" rIns="27432" tIns="27432" bIns="27432" anchor="t">
+          <a:bodyPr wrap="square" lIns="27432" tIns="27432" rIns="27432" bIns="27432" anchor="t">
             <a:spAutoFit/>
           </a:bodyPr>
           <a:lstStyle/>
@@ -23615,7 +23945,7 @@
           <a:noFill/>
         </p:spPr>
         <p:txBody>
-          <a:bodyPr wrap="square" lIns="27432" rIns="27432" tIns="27432" bIns="27432" anchor="t">
+          <a:bodyPr wrap="square" lIns="27432" tIns="27432" rIns="27432" bIns="27432" anchor="t">
             <a:spAutoFit/>
           </a:bodyPr>
           <a:lstStyle/>
@@ -23676,7 +24006,7 @@
 </file>
 
 <file path=ppt/slides/slide37.xml><?xml version="1.0" encoding="utf-8"?>
-<p:sld xmlns:a="http://schemas.openxmlformats.org/drawingml/2006/main" xmlns:p="http://schemas.openxmlformats.org/presentationml/2006/main" xmlns:r="http://schemas.openxmlformats.org/officeDocument/2006/relationships">
+<p:sld xmlns:a="http://schemas.openxmlformats.org/drawingml/2006/main" xmlns:r="http://schemas.openxmlformats.org/officeDocument/2006/relationships" xmlns:p="http://schemas.openxmlformats.org/presentationml/2006/main">
   <p:cSld>
     <p:spTree>
       <p:nvGrpSpPr>
@@ -23684,7 +24014,14 @@
         <p:cNvGrpSpPr/>
         <p:nvPr/>
       </p:nvGrpSpPr>
-      <p:grpSpPr/>
+      <p:grpSpPr>
+        <a:xfrm>
+          <a:off x="0" y="0"/>
+          <a:ext cx="0" cy="0"/>
+          <a:chOff x="0" y="0"/>
+          <a:chExt cx="0" cy="0"/>
+        </a:xfrm>
+      </p:grpSpPr>
       <p:sp>
         <p:nvSpPr>
           <p:cNvPr id="2" name="Rectangle 1"/>
@@ -23725,6 +24062,7 @@
           <a:lstStyle/>
           <a:p>
             <a:pPr algn="ctr"/>
+            <a:endParaRPr/>
           </a:p>
         </p:txBody>
       </p:sp>
@@ -23768,6 +24106,7 @@
           <a:lstStyle/>
           <a:p>
             <a:pPr algn="ctr"/>
+            <a:endParaRPr/>
           </a:p>
         </p:txBody>
       </p:sp>
@@ -23914,6 +24253,7 @@
           <a:lstStyle/>
           <a:p>
             <a:pPr algn="ctr"/>
+            <a:endParaRPr/>
           </a:p>
         </p:txBody>
       </p:sp>
@@ -23934,7 +24274,7 @@
           <a:noFill/>
         </p:spPr>
         <p:txBody>
-          <a:bodyPr wrap="square" lIns="27432" rIns="27432" tIns="27432" bIns="27432" anchor="ctr">
+          <a:bodyPr wrap="square" lIns="27432" tIns="27432" rIns="27432" bIns="27432" anchor="ctr">
             <a:spAutoFit/>
           </a:bodyPr>
           <a:lstStyle/>
@@ -23969,7 +24309,7 @@
           <a:noFill/>
         </p:spPr>
         <p:txBody>
-          <a:bodyPr wrap="square" lIns="27432" rIns="27432" tIns="27432" bIns="27432" anchor="t">
+          <a:bodyPr wrap="square" lIns="27432" tIns="27432" rIns="27432" bIns="27432" anchor="t">
             <a:spAutoFit/>
           </a:bodyPr>
           <a:lstStyle/>
@@ -24029,6 +24369,7 @@
           <a:lstStyle/>
           <a:p>
             <a:pPr algn="ctr"/>
+            <a:endParaRPr/>
           </a:p>
         </p:txBody>
       </p:sp>
@@ -24072,6 +24413,7 @@
           <a:lstStyle/>
           <a:p>
             <a:pPr algn="ctr"/>
+            <a:endParaRPr/>
           </a:p>
         </p:txBody>
       </p:sp>
@@ -24092,7 +24434,7 @@
           <a:noFill/>
         </p:spPr>
         <p:txBody>
-          <a:bodyPr wrap="square" lIns="27432" rIns="27432" tIns="27432" bIns="27432" anchor="t">
+          <a:bodyPr wrap="square" lIns="27432" tIns="27432" rIns="27432" bIns="27432" anchor="t">
             <a:spAutoFit/>
           </a:bodyPr>
           <a:lstStyle/>
@@ -24127,7 +24469,7 @@
           <a:noFill/>
         </p:spPr>
         <p:txBody>
-          <a:bodyPr wrap="square" lIns="27432" rIns="27432" tIns="27432" bIns="27432" anchor="t">
+          <a:bodyPr wrap="square" lIns="27432" tIns="27432" rIns="27432" bIns="27432" anchor="t">
             <a:spAutoFit/>
           </a:bodyPr>
           <a:lstStyle/>
@@ -24187,6 +24529,7 @@
           <a:lstStyle/>
           <a:p>
             <a:pPr algn="ctr"/>
+            <a:endParaRPr/>
           </a:p>
         </p:txBody>
       </p:sp>
@@ -24230,6 +24573,7 @@
           <a:lstStyle/>
           <a:p>
             <a:pPr algn="ctr"/>
+            <a:endParaRPr/>
           </a:p>
         </p:txBody>
       </p:sp>
@@ -24250,7 +24594,7 @@
           <a:noFill/>
         </p:spPr>
         <p:txBody>
-          <a:bodyPr wrap="square" lIns="27432" rIns="27432" tIns="27432" bIns="27432" anchor="t">
+          <a:bodyPr wrap="square" lIns="27432" tIns="27432" rIns="27432" bIns="27432" anchor="t">
             <a:spAutoFit/>
           </a:bodyPr>
           <a:lstStyle/>
@@ -24285,7 +24629,7 @@
           <a:noFill/>
         </p:spPr>
         <p:txBody>
-          <a:bodyPr wrap="square" lIns="27432" rIns="27432" tIns="27432" bIns="27432" anchor="t">
+          <a:bodyPr wrap="square" lIns="27432" tIns="27432" rIns="27432" bIns="27432" anchor="t">
             <a:spAutoFit/>
           </a:bodyPr>
           <a:lstStyle/>
@@ -24320,7 +24664,7 @@
           <a:noFill/>
         </p:spPr>
         <p:txBody>
-          <a:bodyPr wrap="square" lIns="27432" rIns="27432" tIns="27432" bIns="27432" anchor="t">
+          <a:bodyPr wrap="square" lIns="27432" tIns="27432" rIns="27432" bIns="27432" anchor="t">
             <a:spAutoFit/>
           </a:bodyPr>
           <a:lstStyle/>
@@ -24381,7 +24725,7 @@
 </file>
 
 <file path=ppt/slides/slide38.xml><?xml version="1.0" encoding="utf-8"?>
-<p:sld xmlns:a="http://schemas.openxmlformats.org/drawingml/2006/main" xmlns:p="http://schemas.openxmlformats.org/presentationml/2006/main" xmlns:r="http://schemas.openxmlformats.org/officeDocument/2006/relationships">
+<p:sld xmlns:a="http://schemas.openxmlformats.org/drawingml/2006/main" xmlns:r="http://schemas.openxmlformats.org/officeDocument/2006/relationships" xmlns:p="http://schemas.openxmlformats.org/presentationml/2006/main">
   <p:cSld>
     <p:spTree>
       <p:nvGrpSpPr>
@@ -24389,7 +24733,14 @@
         <p:cNvGrpSpPr/>
         <p:nvPr/>
       </p:nvGrpSpPr>
-      <p:grpSpPr/>
+      <p:grpSpPr>
+        <a:xfrm>
+          <a:off x="0" y="0"/>
+          <a:ext cx="0" cy="0"/>
+          <a:chOff x="0" y="0"/>
+          <a:chExt cx="0" cy="0"/>
+        </a:xfrm>
+      </p:grpSpPr>
       <p:sp>
         <p:nvSpPr>
           <p:cNvPr id="2" name="Rectangle 1"/>
@@ -24430,6 +24781,7 @@
           <a:lstStyle/>
           <a:p>
             <a:pPr algn="ctr"/>
+            <a:endParaRPr/>
           </a:p>
         </p:txBody>
       </p:sp>
@@ -24473,6 +24825,7 @@
           <a:lstStyle/>
           <a:p>
             <a:pPr algn="ctr"/>
+            <a:endParaRPr/>
           </a:p>
         </p:txBody>
       </p:sp>
@@ -24596,7 +24949,7 @@
           <a:noFill/>
         </p:spPr>
         <p:txBody>
-          <a:bodyPr wrap="square" lIns="27432" rIns="27432" tIns="27432" bIns="27432" anchor="t">
+          <a:bodyPr wrap="square" lIns="27432" tIns="27432" rIns="27432" bIns="27432" anchor="t">
             <a:spAutoFit/>
           </a:bodyPr>
           <a:lstStyle/>
@@ -24654,6 +25007,7 @@
           <a:lstStyle/>
           <a:p>
             <a:pPr algn="ctr"/>
+            <a:endParaRPr/>
           </a:p>
         </p:txBody>
       </p:sp>
@@ -24674,7 +25028,7 @@
           <a:noFill/>
         </p:spPr>
         <p:txBody>
-          <a:bodyPr wrap="square" lIns="27432" rIns="27432" tIns="27432" bIns="27432" anchor="ctr">
+          <a:bodyPr wrap="square" lIns="27432" tIns="27432" rIns="27432" bIns="27432" anchor="ctr">
             <a:spAutoFit/>
           </a:bodyPr>
           <a:lstStyle/>
@@ -24735,7 +25089,7 @@
 </file>
 
 <file path=ppt/slides/slide39.xml><?xml version="1.0" encoding="utf-8"?>
-<p:sld xmlns:a="http://schemas.openxmlformats.org/drawingml/2006/main" xmlns:p="http://schemas.openxmlformats.org/presentationml/2006/main" xmlns:r="http://schemas.openxmlformats.org/officeDocument/2006/relationships">
+<p:sld xmlns:a="http://schemas.openxmlformats.org/drawingml/2006/main" xmlns:r="http://schemas.openxmlformats.org/officeDocument/2006/relationships" xmlns:p="http://schemas.openxmlformats.org/presentationml/2006/main">
   <p:cSld>
     <p:spTree>
       <p:nvGrpSpPr>
@@ -24743,7 +25097,14 @@
         <p:cNvGrpSpPr/>
         <p:nvPr/>
       </p:nvGrpSpPr>
-      <p:grpSpPr/>
+      <p:grpSpPr>
+        <a:xfrm>
+          <a:off x="0" y="0"/>
+          <a:ext cx="0" cy="0"/>
+          <a:chOff x="0" y="0"/>
+          <a:chExt cx="0" cy="0"/>
+        </a:xfrm>
+      </p:grpSpPr>
       <p:sp>
         <p:nvSpPr>
           <p:cNvPr id="2" name="Rectangle 1"/>
@@ -24784,6 +25145,7 @@
           <a:lstStyle/>
           <a:p>
             <a:pPr algn="ctr"/>
+            <a:endParaRPr/>
           </a:p>
         </p:txBody>
       </p:sp>
@@ -24827,6 +25189,7 @@
           <a:lstStyle/>
           <a:p>
             <a:pPr algn="ctr"/>
+            <a:endParaRPr/>
           </a:p>
         </p:txBody>
       </p:sp>
@@ -24870,6 +25233,7 @@
           <a:lstStyle/>
           <a:p>
             <a:pPr algn="ctr"/>
+            <a:endParaRPr/>
           </a:p>
         </p:txBody>
       </p:sp>
@@ -24890,7 +25254,7 @@
           <a:noFill/>
         </p:spPr>
         <p:txBody>
-          <a:bodyPr wrap="square" lIns="27432" rIns="27432" tIns="27432" bIns="27432" anchor="t">
+          <a:bodyPr wrap="square" lIns="27432" tIns="27432" rIns="27432" bIns="27432" anchor="t">
             <a:spAutoFit/>
           </a:bodyPr>
           <a:lstStyle/>
@@ -24925,7 +25289,7 @@
           <a:noFill/>
         </p:spPr>
         <p:txBody>
-          <a:bodyPr wrap="square" lIns="27432" rIns="27432" tIns="27432" bIns="27432" anchor="t">
+          <a:bodyPr wrap="square" lIns="27432" tIns="27432" rIns="27432" bIns="27432" anchor="t">
             <a:spAutoFit/>
           </a:bodyPr>
           <a:lstStyle/>
@@ -24960,7 +25324,7 @@
           <a:noFill/>
         </p:spPr>
         <p:txBody>
-          <a:bodyPr wrap="square" lIns="27432" rIns="27432" tIns="27432" bIns="27432" anchor="t">
+          <a:bodyPr wrap="square" lIns="27432" tIns="27432" rIns="27432" bIns="27432" anchor="t">
             <a:spAutoFit/>
           </a:bodyPr>
           <a:lstStyle/>
@@ -25018,6 +25382,7 @@
           <a:lstStyle/>
           <a:p>
             <a:pPr algn="ctr"/>
+            <a:endParaRPr/>
           </a:p>
         </p:txBody>
       </p:sp>
@@ -25038,7 +25403,7 @@
           <a:noFill/>
         </p:spPr>
         <p:txBody>
-          <a:bodyPr wrap="square" lIns="27432" rIns="27432" tIns="27432" bIns="27432" anchor="ctr">
+          <a:bodyPr wrap="square" lIns="27432" tIns="27432" rIns="27432" bIns="27432" anchor="ctr">
             <a:spAutoFit/>
           </a:bodyPr>
           <a:lstStyle/>
@@ -25073,7 +25438,7 @@
           <a:noFill/>
         </p:spPr>
         <p:txBody>
-          <a:bodyPr wrap="square" lIns="27432" rIns="27432" tIns="27432" bIns="27432" anchor="t">
+          <a:bodyPr wrap="square" lIns="27432" tIns="27432" rIns="27432" bIns="27432" anchor="t">
             <a:spAutoFit/>
           </a:bodyPr>
           <a:lstStyle/>
@@ -25100,7 +25465,7 @@
 </file>
 
 <file path=ppt/slides/slide4.xml><?xml version="1.0" encoding="utf-8"?>
-<p:sld xmlns:a="http://schemas.openxmlformats.org/drawingml/2006/main" xmlns:p="http://schemas.openxmlformats.org/presentationml/2006/main" xmlns:r="http://schemas.openxmlformats.org/officeDocument/2006/relationships">
+<p:sld xmlns:a="http://schemas.openxmlformats.org/drawingml/2006/main" xmlns:r="http://schemas.openxmlformats.org/officeDocument/2006/relationships" xmlns:p="http://schemas.openxmlformats.org/presentationml/2006/main">
   <p:cSld>
     <p:spTree>
       <p:nvGrpSpPr>
@@ -25108,7 +25473,14 @@
         <p:cNvGrpSpPr/>
         <p:nvPr/>
       </p:nvGrpSpPr>
-      <p:grpSpPr/>
+      <p:grpSpPr>
+        <a:xfrm>
+          <a:off x="0" y="0"/>
+          <a:ext cx="0" cy="0"/>
+          <a:chOff x="0" y="0"/>
+          <a:chExt cx="0" cy="0"/>
+        </a:xfrm>
+      </p:grpSpPr>
       <p:sp>
         <p:nvSpPr>
           <p:cNvPr id="2" name="Rectangle 1"/>
@@ -25149,6 +25521,7 @@
           <a:lstStyle/>
           <a:p>
             <a:pPr algn="ctr"/>
+            <a:endParaRPr/>
           </a:p>
         </p:txBody>
       </p:sp>
@@ -25192,6 +25565,7 @@
           <a:lstStyle/>
           <a:p>
             <a:pPr algn="ctr"/>
+            <a:endParaRPr/>
           </a:p>
         </p:txBody>
       </p:sp>
@@ -25235,6 +25609,7 @@
           <a:lstStyle/>
           <a:p>
             <a:pPr algn="ctr"/>
+            <a:endParaRPr/>
           </a:p>
         </p:txBody>
       </p:sp>
@@ -25255,7 +25630,7 @@
           <a:noFill/>
         </p:spPr>
         <p:txBody>
-          <a:bodyPr wrap="square" lIns="27432" rIns="27432" tIns="27432" bIns="27432" anchor="t">
+          <a:bodyPr wrap="square" lIns="27432" tIns="27432" rIns="27432" bIns="27432" anchor="t">
             <a:spAutoFit/>
           </a:bodyPr>
           <a:lstStyle/>
@@ -25290,7 +25665,7 @@
           <a:noFill/>
         </p:spPr>
         <p:txBody>
-          <a:bodyPr wrap="square" lIns="27432" rIns="27432" tIns="27432" bIns="27432" anchor="t">
+          <a:bodyPr wrap="square" lIns="27432" tIns="27432" rIns="27432" bIns="27432" anchor="t">
             <a:spAutoFit/>
           </a:bodyPr>
           <a:lstStyle/>
@@ -25325,7 +25700,7 @@
           <a:noFill/>
         </p:spPr>
         <p:txBody>
-          <a:bodyPr wrap="square" lIns="27432" rIns="27432" tIns="27432" bIns="27432" anchor="t">
+          <a:bodyPr wrap="square" lIns="27432" tIns="27432" rIns="27432" bIns="27432" anchor="t">
             <a:spAutoFit/>
           </a:bodyPr>
           <a:lstStyle/>
@@ -25383,6 +25758,7 @@
           <a:lstStyle/>
           <a:p>
             <a:pPr algn="ctr"/>
+            <a:endParaRPr/>
           </a:p>
         </p:txBody>
       </p:sp>
@@ -25403,7 +25779,7 @@
           <a:noFill/>
         </p:spPr>
         <p:txBody>
-          <a:bodyPr wrap="square" lIns="27432" rIns="27432" tIns="27432" bIns="27432" anchor="ctr">
+          <a:bodyPr wrap="square" lIns="27432" tIns="27432" rIns="27432" bIns="27432" anchor="ctr">
             <a:spAutoFit/>
           </a:bodyPr>
           <a:lstStyle/>
@@ -25438,7 +25814,7 @@
           <a:noFill/>
         </p:spPr>
         <p:txBody>
-          <a:bodyPr wrap="square" lIns="27432" rIns="27432" tIns="27432" bIns="27432" anchor="t">
+          <a:bodyPr wrap="square" lIns="27432" tIns="27432" rIns="27432" bIns="27432" anchor="t">
             <a:spAutoFit/>
           </a:bodyPr>
           <a:lstStyle/>
@@ -25465,7 +25841,7 @@
 </file>
 
 <file path=ppt/slides/slide40.xml><?xml version="1.0" encoding="utf-8"?>
-<p:sld xmlns:a="http://schemas.openxmlformats.org/drawingml/2006/main" xmlns:p="http://schemas.openxmlformats.org/presentationml/2006/main" xmlns:r="http://schemas.openxmlformats.org/officeDocument/2006/relationships">
+<p:sld xmlns:a="http://schemas.openxmlformats.org/drawingml/2006/main" xmlns:r="http://schemas.openxmlformats.org/officeDocument/2006/relationships" xmlns:p="http://schemas.openxmlformats.org/presentationml/2006/main">
   <p:cSld>
     <p:spTree>
       <p:nvGrpSpPr>
@@ -25473,7 +25849,14 @@
         <p:cNvGrpSpPr/>
         <p:nvPr/>
       </p:nvGrpSpPr>
-      <p:grpSpPr/>
+      <p:grpSpPr>
+        <a:xfrm>
+          <a:off x="0" y="0"/>
+          <a:ext cx="0" cy="0"/>
+          <a:chOff x="0" y="0"/>
+          <a:chExt cx="0" cy="0"/>
+        </a:xfrm>
+      </p:grpSpPr>
       <p:sp>
         <p:nvSpPr>
           <p:cNvPr id="2" name="Rectangle 1"/>
@@ -25514,6 +25897,7 @@
           <a:lstStyle/>
           <a:p>
             <a:pPr algn="ctr"/>
+            <a:endParaRPr/>
           </a:p>
         </p:txBody>
       </p:sp>
@@ -25557,6 +25941,7 @@
           <a:lstStyle/>
           <a:p>
             <a:pPr algn="ctr"/>
+            <a:endParaRPr/>
           </a:p>
         </p:txBody>
       </p:sp>
@@ -25705,6 +26090,7 @@
           <a:lstStyle/>
           <a:p>
             <a:pPr algn="ctr"/>
+            <a:endParaRPr/>
           </a:p>
         </p:txBody>
       </p:sp>
@@ -25748,6 +26134,7 @@
           <a:lstStyle/>
           <a:p>
             <a:pPr algn="ctr"/>
+            <a:endParaRPr/>
           </a:p>
         </p:txBody>
       </p:sp>
@@ -25768,7 +26155,7 @@
           <a:noFill/>
         </p:spPr>
         <p:txBody>
-          <a:bodyPr wrap="square" lIns="27432" rIns="27432" tIns="27432" bIns="27432" anchor="t">
+          <a:bodyPr wrap="square" lIns="27432" tIns="27432" rIns="27432" bIns="27432" anchor="t">
             <a:spAutoFit/>
           </a:bodyPr>
           <a:lstStyle/>
@@ -25803,7 +26190,7 @@
           <a:noFill/>
         </p:spPr>
         <p:txBody>
-          <a:bodyPr wrap="square" lIns="27432" rIns="27432" tIns="27432" bIns="27432" anchor="t">
+          <a:bodyPr wrap="square" lIns="27432" tIns="27432" rIns="27432" bIns="27432" anchor="t">
             <a:spAutoFit/>
           </a:bodyPr>
           <a:lstStyle/>
@@ -25864,6 +26251,7 @@
           <a:lstStyle/>
           <a:p>
             <a:pPr algn="ctr"/>
+            <a:endParaRPr/>
           </a:p>
         </p:txBody>
       </p:sp>
@@ -25907,6 +26295,7 @@
           <a:lstStyle/>
           <a:p>
             <a:pPr algn="ctr"/>
+            <a:endParaRPr/>
           </a:p>
         </p:txBody>
       </p:sp>
@@ -25927,7 +26316,7 @@
           <a:noFill/>
         </p:spPr>
         <p:txBody>
-          <a:bodyPr wrap="square" lIns="27432" rIns="27432" tIns="27432" bIns="27432" anchor="t">
+          <a:bodyPr wrap="square" lIns="27432" tIns="27432" rIns="27432" bIns="27432" anchor="t">
             <a:spAutoFit/>
           </a:bodyPr>
           <a:lstStyle/>
@@ -25962,7 +26351,7 @@
           <a:noFill/>
         </p:spPr>
         <p:txBody>
-          <a:bodyPr wrap="square" lIns="27432" rIns="27432" tIns="27432" bIns="27432" anchor="t">
+          <a:bodyPr wrap="square" lIns="27432" tIns="27432" rIns="27432" bIns="27432" anchor="t">
             <a:spAutoFit/>
           </a:bodyPr>
           <a:lstStyle/>
@@ -26027,7 +26416,7 @@
 </file>
 
 <file path=ppt/slides/slide41.xml><?xml version="1.0" encoding="utf-8"?>
-<p:sld xmlns:a="http://schemas.openxmlformats.org/drawingml/2006/main" xmlns:p="http://schemas.openxmlformats.org/presentationml/2006/main" xmlns:r="http://schemas.openxmlformats.org/officeDocument/2006/relationships">
+<p:sld xmlns:a="http://schemas.openxmlformats.org/drawingml/2006/main" xmlns:r="http://schemas.openxmlformats.org/officeDocument/2006/relationships" xmlns:p="http://schemas.openxmlformats.org/presentationml/2006/main">
   <p:cSld>
     <p:spTree>
       <p:nvGrpSpPr>
@@ -26035,7 +26424,14 @@
         <p:cNvGrpSpPr/>
         <p:nvPr/>
       </p:nvGrpSpPr>
-      <p:grpSpPr/>
+      <p:grpSpPr>
+        <a:xfrm>
+          <a:off x="0" y="0"/>
+          <a:ext cx="0" cy="0"/>
+          <a:chOff x="0" y="0"/>
+          <a:chExt cx="0" cy="0"/>
+        </a:xfrm>
+      </p:grpSpPr>
       <p:sp>
         <p:nvSpPr>
           <p:cNvPr id="2" name="Rectangle 1"/>
@@ -26076,6 +26472,7 @@
           <a:lstStyle/>
           <a:p>
             <a:pPr algn="ctr"/>
+            <a:endParaRPr/>
           </a:p>
         </p:txBody>
       </p:sp>
@@ -26119,6 +26516,7 @@
           <a:lstStyle/>
           <a:p>
             <a:pPr algn="ctr"/>
+            <a:endParaRPr/>
           </a:p>
         </p:txBody>
       </p:sp>
@@ -26267,6 +26665,7 @@
           <a:lstStyle/>
           <a:p>
             <a:pPr algn="ctr"/>
+            <a:endParaRPr/>
           </a:p>
         </p:txBody>
       </p:sp>
@@ -26310,6 +26709,7 @@
           <a:lstStyle/>
           <a:p>
             <a:pPr algn="ctr"/>
+            <a:endParaRPr/>
           </a:p>
         </p:txBody>
       </p:sp>
@@ -26330,7 +26730,7 @@
           <a:noFill/>
         </p:spPr>
         <p:txBody>
-          <a:bodyPr wrap="square" lIns="27432" rIns="27432" tIns="27432" bIns="27432" anchor="t">
+          <a:bodyPr wrap="square" lIns="27432" tIns="27432" rIns="27432" bIns="27432" anchor="t">
             <a:spAutoFit/>
           </a:bodyPr>
           <a:lstStyle/>
@@ -26365,7 +26765,7 @@
           <a:noFill/>
         </p:spPr>
         <p:txBody>
-          <a:bodyPr wrap="square" lIns="27432" rIns="27432" tIns="27432" bIns="27432" anchor="t">
+          <a:bodyPr wrap="square" lIns="27432" tIns="27432" rIns="27432" bIns="27432" anchor="t">
             <a:spAutoFit/>
           </a:bodyPr>
           <a:lstStyle/>
@@ -26425,6 +26825,7 @@
           <a:lstStyle/>
           <a:p>
             <a:pPr algn="ctr"/>
+            <a:endParaRPr/>
           </a:p>
         </p:txBody>
       </p:sp>
@@ -26468,6 +26869,7 @@
           <a:lstStyle/>
           <a:p>
             <a:pPr algn="ctr"/>
+            <a:endParaRPr/>
           </a:p>
         </p:txBody>
       </p:sp>
@@ -26488,7 +26890,7 @@
           <a:noFill/>
         </p:spPr>
         <p:txBody>
-          <a:bodyPr wrap="square" lIns="27432" rIns="27432" tIns="27432" bIns="27432" anchor="t">
+          <a:bodyPr wrap="square" lIns="27432" tIns="27432" rIns="27432" bIns="27432" anchor="t">
             <a:spAutoFit/>
           </a:bodyPr>
           <a:lstStyle/>
@@ -26523,7 +26925,7 @@
           <a:noFill/>
         </p:spPr>
         <p:txBody>
-          <a:bodyPr wrap="square" lIns="27432" rIns="27432" tIns="27432" bIns="27432" anchor="t">
+          <a:bodyPr wrap="square" lIns="27432" tIns="27432" rIns="27432" bIns="27432" anchor="t">
             <a:spAutoFit/>
           </a:bodyPr>
           <a:lstStyle/>
@@ -26583,6 +26985,7 @@
           <a:lstStyle/>
           <a:p>
             <a:pPr algn="ctr"/>
+            <a:endParaRPr/>
           </a:p>
         </p:txBody>
       </p:sp>
@@ -26626,6 +27029,7 @@
           <a:lstStyle/>
           <a:p>
             <a:pPr algn="ctr"/>
+            <a:endParaRPr/>
           </a:p>
         </p:txBody>
       </p:sp>
@@ -26646,7 +27050,7 @@
           <a:noFill/>
         </p:spPr>
         <p:txBody>
-          <a:bodyPr wrap="square" lIns="27432" rIns="27432" tIns="27432" bIns="27432" anchor="t">
+          <a:bodyPr wrap="square" lIns="27432" tIns="27432" rIns="27432" bIns="27432" anchor="t">
             <a:spAutoFit/>
           </a:bodyPr>
           <a:lstStyle/>
@@ -26681,7 +27085,7 @@
           <a:noFill/>
         </p:spPr>
         <p:txBody>
-          <a:bodyPr wrap="square" lIns="27432" rIns="27432" tIns="27432" bIns="27432" anchor="t">
+          <a:bodyPr wrap="square" lIns="27432" tIns="27432" rIns="27432" bIns="27432" anchor="t">
             <a:spAutoFit/>
           </a:bodyPr>
           <a:lstStyle/>
@@ -26742,7 +27146,7 @@
 </file>
 
 <file path=ppt/slides/slide42.xml><?xml version="1.0" encoding="utf-8"?>
-<p:sld xmlns:a="http://schemas.openxmlformats.org/drawingml/2006/main" xmlns:p="http://schemas.openxmlformats.org/presentationml/2006/main" xmlns:r="http://schemas.openxmlformats.org/officeDocument/2006/relationships">
+<p:sld xmlns:a="http://schemas.openxmlformats.org/drawingml/2006/main" xmlns:r="http://schemas.openxmlformats.org/officeDocument/2006/relationships" xmlns:p="http://schemas.openxmlformats.org/presentationml/2006/main">
   <p:cSld>
     <p:spTree>
       <p:nvGrpSpPr>
@@ -26750,7 +27154,14 @@
         <p:cNvGrpSpPr/>
         <p:nvPr/>
       </p:nvGrpSpPr>
-      <p:grpSpPr/>
+      <p:grpSpPr>
+        <a:xfrm>
+          <a:off x="0" y="0"/>
+          <a:ext cx="0" cy="0"/>
+          <a:chOff x="0" y="0"/>
+          <a:chExt cx="0" cy="0"/>
+        </a:xfrm>
+      </p:grpSpPr>
       <p:sp>
         <p:nvSpPr>
           <p:cNvPr id="2" name="Rectangle 1"/>
@@ -26791,6 +27202,7 @@
           <a:lstStyle/>
           <a:p>
             <a:pPr algn="ctr"/>
+            <a:endParaRPr/>
           </a:p>
         </p:txBody>
       </p:sp>
@@ -26834,6 +27246,7 @@
           <a:lstStyle/>
           <a:p>
             <a:pPr algn="ctr"/>
+            <a:endParaRPr/>
           </a:p>
         </p:txBody>
       </p:sp>
@@ -26982,6 +27395,7 @@
           <a:lstStyle/>
           <a:p>
             <a:pPr algn="ctr"/>
+            <a:endParaRPr/>
           </a:p>
         </p:txBody>
       </p:sp>
@@ -27025,6 +27439,7 @@
           <a:lstStyle/>
           <a:p>
             <a:pPr algn="ctr"/>
+            <a:endParaRPr/>
           </a:p>
         </p:txBody>
       </p:sp>
@@ -27045,7 +27460,7 @@
           <a:noFill/>
         </p:spPr>
         <p:txBody>
-          <a:bodyPr wrap="square" lIns="27432" rIns="27432" tIns="27432" bIns="27432" anchor="t">
+          <a:bodyPr wrap="square" lIns="27432" tIns="27432" rIns="27432" bIns="27432" anchor="t">
             <a:spAutoFit/>
           </a:bodyPr>
           <a:lstStyle/>
@@ -27080,7 +27495,7 @@
           <a:noFill/>
         </p:spPr>
         <p:txBody>
-          <a:bodyPr wrap="square" lIns="27432" rIns="27432" tIns="27432" bIns="27432" anchor="t">
+          <a:bodyPr wrap="square" lIns="27432" tIns="27432" rIns="27432" bIns="27432" anchor="t">
             <a:spAutoFit/>
           </a:bodyPr>
           <a:lstStyle/>
@@ -27140,6 +27555,7 @@
           <a:lstStyle/>
           <a:p>
             <a:pPr algn="ctr"/>
+            <a:endParaRPr/>
           </a:p>
         </p:txBody>
       </p:sp>
@@ -27183,6 +27599,7 @@
           <a:lstStyle/>
           <a:p>
             <a:pPr algn="ctr"/>
+            <a:endParaRPr/>
           </a:p>
         </p:txBody>
       </p:sp>
@@ -27203,7 +27620,7 @@
           <a:noFill/>
         </p:spPr>
         <p:txBody>
-          <a:bodyPr wrap="square" lIns="27432" rIns="27432" tIns="27432" bIns="27432" anchor="t">
+          <a:bodyPr wrap="square" lIns="27432" tIns="27432" rIns="27432" bIns="27432" anchor="t">
             <a:spAutoFit/>
           </a:bodyPr>
           <a:lstStyle/>
@@ -27238,7 +27655,7 @@
           <a:noFill/>
         </p:spPr>
         <p:txBody>
-          <a:bodyPr wrap="square" lIns="27432" rIns="27432" tIns="27432" bIns="27432" anchor="t">
+          <a:bodyPr wrap="square" lIns="27432" tIns="27432" rIns="27432" bIns="27432" anchor="t">
             <a:spAutoFit/>
           </a:bodyPr>
           <a:lstStyle/>
@@ -27298,6 +27715,7 @@
           <a:lstStyle/>
           <a:p>
             <a:pPr algn="ctr"/>
+            <a:endParaRPr/>
           </a:p>
         </p:txBody>
       </p:sp>
@@ -27341,6 +27759,7 @@
           <a:lstStyle/>
           <a:p>
             <a:pPr algn="ctr"/>
+            <a:endParaRPr/>
           </a:p>
         </p:txBody>
       </p:sp>
@@ -27361,7 +27780,7 @@
           <a:noFill/>
         </p:spPr>
         <p:txBody>
-          <a:bodyPr wrap="square" lIns="27432" rIns="27432" tIns="27432" bIns="27432" anchor="t">
+          <a:bodyPr wrap="square" lIns="27432" tIns="27432" rIns="27432" bIns="27432" anchor="t">
             <a:spAutoFit/>
           </a:bodyPr>
           <a:lstStyle/>
@@ -27396,7 +27815,7 @@
           <a:noFill/>
         </p:spPr>
         <p:txBody>
-          <a:bodyPr wrap="square" lIns="27432" rIns="27432" tIns="27432" bIns="27432" anchor="t">
+          <a:bodyPr wrap="square" lIns="27432" tIns="27432" rIns="27432" bIns="27432" anchor="t">
             <a:spAutoFit/>
           </a:bodyPr>
           <a:lstStyle/>
@@ -27456,6 +27875,7 @@
           <a:lstStyle/>
           <a:p>
             <a:pPr algn="ctr"/>
+            <a:endParaRPr/>
           </a:p>
         </p:txBody>
       </p:sp>
@@ -27499,6 +27919,7 @@
           <a:lstStyle/>
           <a:p>
             <a:pPr algn="ctr"/>
+            <a:endParaRPr/>
           </a:p>
         </p:txBody>
       </p:sp>
@@ -27519,7 +27940,7 @@
           <a:noFill/>
         </p:spPr>
         <p:txBody>
-          <a:bodyPr wrap="square" lIns="27432" rIns="27432" tIns="27432" bIns="27432" anchor="t">
+          <a:bodyPr wrap="square" lIns="27432" tIns="27432" rIns="27432" bIns="27432" anchor="t">
             <a:spAutoFit/>
           </a:bodyPr>
           <a:lstStyle/>
@@ -27554,7 +27975,7 @@
           <a:noFill/>
         </p:spPr>
         <p:txBody>
-          <a:bodyPr wrap="square" lIns="27432" rIns="27432" tIns="27432" bIns="27432" anchor="t">
+          <a:bodyPr wrap="square" lIns="27432" tIns="27432" rIns="27432" bIns="27432" anchor="t">
             <a:spAutoFit/>
           </a:bodyPr>
           <a:lstStyle/>
@@ -27589,7 +28010,7 @@
           <a:noFill/>
         </p:spPr>
         <p:txBody>
-          <a:bodyPr wrap="square" lIns="27432" rIns="27432" tIns="27432" bIns="27432" anchor="t">
+          <a:bodyPr wrap="square" lIns="27432" tIns="27432" rIns="27432" bIns="27432" anchor="t">
             <a:spAutoFit/>
           </a:bodyPr>
           <a:lstStyle/>
@@ -27650,7 +28071,7 @@
 </file>
 
 <file path=ppt/slides/slide43.xml><?xml version="1.0" encoding="utf-8"?>
-<p:sld xmlns:a="http://schemas.openxmlformats.org/drawingml/2006/main" xmlns:p="http://schemas.openxmlformats.org/presentationml/2006/main" xmlns:r="http://schemas.openxmlformats.org/officeDocument/2006/relationships">
+<p:sld xmlns:a="http://schemas.openxmlformats.org/drawingml/2006/main" xmlns:r="http://schemas.openxmlformats.org/officeDocument/2006/relationships" xmlns:p="http://schemas.openxmlformats.org/presentationml/2006/main">
   <p:cSld>
     <p:spTree>
       <p:nvGrpSpPr>
@@ -27658,7 +28079,14 @@
         <p:cNvGrpSpPr/>
         <p:nvPr/>
       </p:nvGrpSpPr>
-      <p:grpSpPr/>
+      <p:grpSpPr>
+        <a:xfrm>
+          <a:off x="0" y="0"/>
+          <a:ext cx="0" cy="0"/>
+          <a:chOff x="0" y="0"/>
+          <a:chExt cx="0" cy="0"/>
+        </a:xfrm>
+      </p:grpSpPr>
       <p:sp>
         <p:nvSpPr>
           <p:cNvPr id="2" name="Rectangle 1"/>
@@ -27699,6 +28127,7 @@
           <a:lstStyle/>
           <a:p>
             <a:pPr algn="ctr"/>
+            <a:endParaRPr/>
           </a:p>
         </p:txBody>
       </p:sp>
@@ -27742,6 +28171,7 @@
           <a:lstStyle/>
           <a:p>
             <a:pPr algn="ctr"/>
+            <a:endParaRPr/>
           </a:p>
         </p:txBody>
       </p:sp>
@@ -27888,6 +28318,7 @@
           <a:lstStyle/>
           <a:p>
             <a:pPr algn="ctr"/>
+            <a:endParaRPr/>
           </a:p>
         </p:txBody>
       </p:sp>
@@ -27908,7 +28339,7 @@
           <a:noFill/>
         </p:spPr>
         <p:txBody>
-          <a:bodyPr wrap="square" lIns="27432" rIns="27432" tIns="27432" bIns="27432" anchor="ctr">
+          <a:bodyPr wrap="square" lIns="27432" tIns="27432" rIns="27432" bIns="27432" anchor="ctr">
             <a:spAutoFit/>
           </a:bodyPr>
           <a:lstStyle/>
@@ -27943,7 +28374,7 @@
           <a:noFill/>
         </p:spPr>
         <p:txBody>
-          <a:bodyPr wrap="square" lIns="27432" rIns="27432" tIns="27432" bIns="27432" anchor="t">
+          <a:bodyPr wrap="square" lIns="27432" tIns="27432" rIns="27432" bIns="27432" anchor="t">
             <a:spAutoFit/>
           </a:bodyPr>
           <a:lstStyle/>
@@ -28003,6 +28434,7 @@
           <a:lstStyle/>
           <a:p>
             <a:pPr algn="ctr"/>
+            <a:endParaRPr/>
           </a:p>
         </p:txBody>
       </p:sp>
@@ -28023,7 +28455,7 @@
           <a:noFill/>
         </p:spPr>
         <p:txBody>
-          <a:bodyPr wrap="square" lIns="27432" rIns="27432" tIns="27432" bIns="27432" anchor="t">
+          <a:bodyPr wrap="square" lIns="27432" tIns="27432" rIns="27432" bIns="27432" anchor="t">
             <a:spAutoFit/>
           </a:bodyPr>
           <a:lstStyle/>
@@ -28058,7 +28490,7 @@
           <a:noFill/>
         </p:spPr>
         <p:txBody>
-          <a:bodyPr wrap="square" lIns="27432" rIns="27432" tIns="27432" bIns="27432" anchor="t">
+          <a:bodyPr wrap="square" lIns="27432" tIns="27432" rIns="27432" bIns="27432" anchor="t">
             <a:spAutoFit/>
           </a:bodyPr>
           <a:lstStyle/>
@@ -28118,6 +28550,7 @@
           <a:lstStyle/>
           <a:p>
             <a:pPr algn="ctr"/>
+            <a:endParaRPr/>
           </a:p>
         </p:txBody>
       </p:sp>
@@ -28138,7 +28571,7 @@
           <a:noFill/>
         </p:spPr>
         <p:txBody>
-          <a:bodyPr wrap="square" lIns="27432" rIns="27432" tIns="27432" bIns="27432" anchor="t">
+          <a:bodyPr wrap="square" lIns="27432" tIns="27432" rIns="27432" bIns="27432" anchor="t">
             <a:spAutoFit/>
           </a:bodyPr>
           <a:lstStyle/>
@@ -28173,7 +28606,7 @@
           <a:noFill/>
         </p:spPr>
         <p:txBody>
-          <a:bodyPr wrap="square" lIns="27432" rIns="27432" tIns="27432" bIns="27432" anchor="t">
+          <a:bodyPr wrap="square" lIns="27432" tIns="27432" rIns="27432" bIns="27432" anchor="t">
             <a:spAutoFit/>
           </a:bodyPr>
           <a:lstStyle/>
@@ -28233,6 +28666,7 @@
           <a:lstStyle/>
           <a:p>
             <a:pPr algn="ctr"/>
+            <a:endParaRPr/>
           </a:p>
         </p:txBody>
       </p:sp>
@@ -28253,7 +28687,7 @@
           <a:noFill/>
         </p:spPr>
         <p:txBody>
-          <a:bodyPr wrap="square" lIns="27432" rIns="27432" tIns="27432" bIns="27432" anchor="t">
+          <a:bodyPr wrap="square" lIns="27432" tIns="27432" rIns="27432" bIns="27432" anchor="t">
             <a:spAutoFit/>
           </a:bodyPr>
           <a:lstStyle/>
@@ -28288,7 +28722,7 @@
           <a:noFill/>
         </p:spPr>
         <p:txBody>
-          <a:bodyPr wrap="square" lIns="27432" rIns="27432" tIns="27432" bIns="27432" anchor="t">
+          <a:bodyPr wrap="square" lIns="27432" tIns="27432" rIns="27432" bIns="27432" anchor="t">
             <a:spAutoFit/>
           </a:bodyPr>
           <a:lstStyle/>
@@ -28348,6 +28782,7 @@
           <a:lstStyle/>
           <a:p>
             <a:pPr algn="ctr"/>
+            <a:endParaRPr/>
           </a:p>
         </p:txBody>
       </p:sp>
@@ -28368,7 +28803,7 @@
           <a:noFill/>
         </p:spPr>
         <p:txBody>
-          <a:bodyPr wrap="square" lIns="27432" rIns="27432" tIns="27432" bIns="27432" anchor="t">
+          <a:bodyPr wrap="square" lIns="27432" tIns="27432" rIns="27432" bIns="27432" anchor="t">
             <a:spAutoFit/>
           </a:bodyPr>
           <a:lstStyle/>
@@ -28403,7 +28838,7 @@
           <a:noFill/>
         </p:spPr>
         <p:txBody>
-          <a:bodyPr wrap="square" lIns="27432" rIns="27432" tIns="27432" bIns="27432" anchor="t">
+          <a:bodyPr wrap="square" lIns="27432" tIns="27432" rIns="27432" bIns="27432" anchor="t">
             <a:spAutoFit/>
           </a:bodyPr>
           <a:lstStyle/>
@@ -28464,7 +28899,7 @@
 </file>
 
 <file path=ppt/slides/slide44.xml><?xml version="1.0" encoding="utf-8"?>
-<p:sld xmlns:a="http://schemas.openxmlformats.org/drawingml/2006/main" xmlns:p="http://schemas.openxmlformats.org/presentationml/2006/main" xmlns:r="http://schemas.openxmlformats.org/officeDocument/2006/relationships">
+<p:sld xmlns:a="http://schemas.openxmlformats.org/drawingml/2006/main" xmlns:r="http://schemas.openxmlformats.org/officeDocument/2006/relationships" xmlns:p="http://schemas.openxmlformats.org/presentationml/2006/main">
   <p:cSld>
     <p:spTree>
       <p:nvGrpSpPr>
@@ -28472,7 +28907,14 @@
         <p:cNvGrpSpPr/>
         <p:nvPr/>
       </p:nvGrpSpPr>
-      <p:grpSpPr/>
+      <p:grpSpPr>
+        <a:xfrm>
+          <a:off x="0" y="0"/>
+          <a:ext cx="0" cy="0"/>
+          <a:chOff x="0" y="0"/>
+          <a:chExt cx="0" cy="0"/>
+        </a:xfrm>
+      </p:grpSpPr>
       <p:sp>
         <p:nvSpPr>
           <p:cNvPr id="2" name="Rectangle 1"/>
@@ -28513,6 +28955,7 @@
           <a:lstStyle/>
           <a:p>
             <a:pPr algn="ctr"/>
+            <a:endParaRPr/>
           </a:p>
         </p:txBody>
       </p:sp>
@@ -28556,6 +28999,7 @@
           <a:lstStyle/>
           <a:p>
             <a:pPr algn="ctr"/>
+            <a:endParaRPr/>
           </a:p>
         </p:txBody>
       </p:sp>
@@ -28704,6 +29148,7 @@
           <a:lstStyle/>
           <a:p>
             <a:pPr algn="ctr"/>
+            <a:endParaRPr/>
           </a:p>
         </p:txBody>
       </p:sp>
@@ -28747,6 +29192,7 @@
           <a:lstStyle/>
           <a:p>
             <a:pPr algn="ctr"/>
+            <a:endParaRPr/>
           </a:p>
         </p:txBody>
       </p:sp>
@@ -28767,7 +29213,7 @@
           <a:noFill/>
         </p:spPr>
         <p:txBody>
-          <a:bodyPr wrap="square" lIns="27432" rIns="27432" tIns="27432" bIns="27432" anchor="t">
+          <a:bodyPr wrap="square" lIns="27432" tIns="27432" rIns="27432" bIns="27432" anchor="t">
             <a:spAutoFit/>
           </a:bodyPr>
           <a:lstStyle/>
@@ -28802,7 +29248,7 @@
           <a:noFill/>
         </p:spPr>
         <p:txBody>
-          <a:bodyPr wrap="square" lIns="27432" rIns="27432" tIns="27432" bIns="27432" anchor="t">
+          <a:bodyPr wrap="square" lIns="27432" tIns="27432" rIns="27432" bIns="27432" anchor="t">
             <a:spAutoFit/>
           </a:bodyPr>
           <a:lstStyle/>
@@ -28862,6 +29308,7 @@
           <a:lstStyle/>
           <a:p>
             <a:pPr algn="ctr"/>
+            <a:endParaRPr/>
           </a:p>
         </p:txBody>
       </p:sp>
@@ -28905,6 +29352,7 @@
           <a:lstStyle/>
           <a:p>
             <a:pPr algn="ctr"/>
+            <a:endParaRPr/>
           </a:p>
         </p:txBody>
       </p:sp>
@@ -28925,7 +29373,7 @@
           <a:noFill/>
         </p:spPr>
         <p:txBody>
-          <a:bodyPr wrap="square" lIns="27432" rIns="27432" tIns="27432" bIns="27432" anchor="t">
+          <a:bodyPr wrap="square" lIns="27432" tIns="27432" rIns="27432" bIns="27432" anchor="t">
             <a:spAutoFit/>
           </a:bodyPr>
           <a:lstStyle/>
@@ -28960,7 +29408,7 @@
           <a:noFill/>
         </p:spPr>
         <p:txBody>
-          <a:bodyPr wrap="square" lIns="27432" rIns="27432" tIns="27432" bIns="27432" anchor="t">
+          <a:bodyPr wrap="square" lIns="27432" tIns="27432" rIns="27432" bIns="27432" anchor="t">
             <a:spAutoFit/>
           </a:bodyPr>
           <a:lstStyle/>
@@ -29020,6 +29468,7 @@
           <a:lstStyle/>
           <a:p>
             <a:pPr algn="ctr"/>
+            <a:endParaRPr/>
           </a:p>
         </p:txBody>
       </p:sp>
@@ -29063,6 +29512,7 @@
           <a:lstStyle/>
           <a:p>
             <a:pPr algn="ctr"/>
+            <a:endParaRPr/>
           </a:p>
         </p:txBody>
       </p:sp>
@@ -29083,7 +29533,7 @@
           <a:noFill/>
         </p:spPr>
         <p:txBody>
-          <a:bodyPr wrap="square" lIns="27432" rIns="27432" tIns="27432" bIns="27432" anchor="t">
+          <a:bodyPr wrap="square" lIns="27432" tIns="27432" rIns="27432" bIns="27432" anchor="t">
             <a:spAutoFit/>
           </a:bodyPr>
           <a:lstStyle/>
@@ -29118,7 +29568,7 @@
           <a:noFill/>
         </p:spPr>
         <p:txBody>
-          <a:bodyPr wrap="square" lIns="27432" rIns="27432" tIns="27432" bIns="27432" anchor="t">
+          <a:bodyPr wrap="square" lIns="27432" tIns="27432" rIns="27432" bIns="27432" anchor="t">
             <a:spAutoFit/>
           </a:bodyPr>
           <a:lstStyle/>
@@ -29178,6 +29628,7 @@
           <a:lstStyle/>
           <a:p>
             <a:pPr algn="ctr"/>
+            <a:endParaRPr/>
           </a:p>
         </p:txBody>
       </p:sp>
@@ -29221,6 +29672,7 @@
           <a:lstStyle/>
           <a:p>
             <a:pPr algn="ctr"/>
+            <a:endParaRPr/>
           </a:p>
         </p:txBody>
       </p:sp>
@@ -29241,7 +29693,7 @@
           <a:noFill/>
         </p:spPr>
         <p:txBody>
-          <a:bodyPr wrap="square" lIns="27432" rIns="27432" tIns="27432" bIns="27432" anchor="t">
+          <a:bodyPr wrap="square" lIns="27432" tIns="27432" rIns="27432" bIns="27432" anchor="t">
             <a:spAutoFit/>
           </a:bodyPr>
           <a:lstStyle/>
@@ -29276,7 +29728,7 @@
           <a:noFill/>
         </p:spPr>
         <p:txBody>
-          <a:bodyPr wrap="square" lIns="27432" rIns="27432" tIns="27432" bIns="27432" anchor="t">
+          <a:bodyPr wrap="square" lIns="27432" tIns="27432" rIns="27432" bIns="27432" anchor="t">
             <a:spAutoFit/>
           </a:bodyPr>
           <a:lstStyle/>
@@ -29337,7 +29789,7 @@
 </file>
 
 <file path=ppt/slides/slide45.xml><?xml version="1.0" encoding="utf-8"?>
-<p:sld xmlns:a="http://schemas.openxmlformats.org/drawingml/2006/main" xmlns:p="http://schemas.openxmlformats.org/presentationml/2006/main" xmlns:r="http://schemas.openxmlformats.org/officeDocument/2006/relationships">
+<p:sld xmlns:a="http://schemas.openxmlformats.org/drawingml/2006/main" xmlns:r="http://schemas.openxmlformats.org/officeDocument/2006/relationships" xmlns:p="http://schemas.openxmlformats.org/presentationml/2006/main">
   <p:cSld>
     <p:spTree>
       <p:nvGrpSpPr>
@@ -29345,7 +29797,14 @@
         <p:cNvGrpSpPr/>
         <p:nvPr/>
       </p:nvGrpSpPr>
-      <p:grpSpPr/>
+      <p:grpSpPr>
+        <a:xfrm>
+          <a:off x="0" y="0"/>
+          <a:ext cx="0" cy="0"/>
+          <a:chOff x="0" y="0"/>
+          <a:chExt cx="0" cy="0"/>
+        </a:xfrm>
+      </p:grpSpPr>
       <p:sp>
         <p:nvSpPr>
           <p:cNvPr id="2" name="Rectangle 1"/>
@@ -29386,6 +29845,7 @@
           <a:lstStyle/>
           <a:p>
             <a:pPr algn="ctr"/>
+            <a:endParaRPr/>
           </a:p>
         </p:txBody>
       </p:sp>
@@ -29429,6 +29889,7 @@
           <a:lstStyle/>
           <a:p>
             <a:pPr algn="ctr"/>
+            <a:endParaRPr/>
           </a:p>
         </p:txBody>
       </p:sp>
@@ -29575,6 +30036,7 @@
           <a:lstStyle/>
           <a:p>
             <a:pPr algn="ctr"/>
+            <a:endParaRPr/>
           </a:p>
         </p:txBody>
       </p:sp>
@@ -29595,7 +30057,7 @@
           <a:noFill/>
         </p:spPr>
         <p:txBody>
-          <a:bodyPr wrap="square" lIns="27432" rIns="27432" tIns="27432" bIns="27432" anchor="ctr">
+          <a:bodyPr wrap="square" lIns="27432" tIns="27432" rIns="27432" bIns="27432" anchor="ctr">
             <a:spAutoFit/>
           </a:bodyPr>
           <a:lstStyle/>
@@ -29630,7 +30092,7 @@
           <a:noFill/>
         </p:spPr>
         <p:txBody>
-          <a:bodyPr wrap="square" lIns="36576" rIns="36576" tIns="27432" bIns="27432">
+          <a:bodyPr wrap="square" lIns="36576" tIns="27432" rIns="36576" bIns="27432">
             <a:spAutoFit/>
           </a:bodyPr>
           <a:lstStyle/>
@@ -29743,7 +30205,7 @@
 </file>
 
 <file path=ppt/slides/slide46.xml><?xml version="1.0" encoding="utf-8"?>
-<p:sld xmlns:a="http://schemas.openxmlformats.org/drawingml/2006/main" xmlns:p="http://schemas.openxmlformats.org/presentationml/2006/main" xmlns:r="http://schemas.openxmlformats.org/officeDocument/2006/relationships">
+<p:sld xmlns:a="http://schemas.openxmlformats.org/drawingml/2006/main" xmlns:r="http://schemas.openxmlformats.org/officeDocument/2006/relationships" xmlns:p="http://schemas.openxmlformats.org/presentationml/2006/main">
   <p:cSld>
     <p:spTree>
       <p:nvGrpSpPr>
@@ -29751,7 +30213,14 @@
         <p:cNvGrpSpPr/>
         <p:nvPr/>
       </p:nvGrpSpPr>
-      <p:grpSpPr/>
+      <p:grpSpPr>
+        <a:xfrm>
+          <a:off x="0" y="0"/>
+          <a:ext cx="0" cy="0"/>
+          <a:chOff x="0" y="0"/>
+          <a:chExt cx="0" cy="0"/>
+        </a:xfrm>
+      </p:grpSpPr>
       <p:sp>
         <p:nvSpPr>
           <p:cNvPr id="2" name="Rectangle 1"/>
@@ -29792,6 +30261,7 @@
           <a:lstStyle/>
           <a:p>
             <a:pPr algn="ctr"/>
+            <a:endParaRPr/>
           </a:p>
         </p:txBody>
       </p:sp>
@@ -29835,6 +30305,7 @@
           <a:lstStyle/>
           <a:p>
             <a:pPr algn="ctr"/>
+            <a:endParaRPr/>
           </a:p>
         </p:txBody>
       </p:sp>
@@ -29983,6 +30454,7 @@
           <a:lstStyle/>
           <a:p>
             <a:pPr algn="ctr"/>
+            <a:endParaRPr/>
           </a:p>
         </p:txBody>
       </p:sp>
@@ -30026,6 +30498,7 @@
           <a:lstStyle/>
           <a:p>
             <a:pPr algn="ctr"/>
+            <a:endParaRPr/>
           </a:p>
         </p:txBody>
       </p:sp>
@@ -30046,7 +30519,7 @@
           <a:noFill/>
         </p:spPr>
         <p:txBody>
-          <a:bodyPr wrap="square" lIns="27432" rIns="27432" tIns="27432" bIns="27432" anchor="t">
+          <a:bodyPr wrap="square" lIns="27432" tIns="27432" rIns="27432" bIns="27432" anchor="t">
             <a:spAutoFit/>
           </a:bodyPr>
           <a:lstStyle/>
@@ -30081,7 +30554,7 @@
           <a:noFill/>
         </p:spPr>
         <p:txBody>
-          <a:bodyPr wrap="square" lIns="27432" rIns="27432" tIns="27432" bIns="27432" anchor="t">
+          <a:bodyPr wrap="square" lIns="27432" tIns="27432" rIns="27432" bIns="27432" anchor="t">
             <a:spAutoFit/>
           </a:bodyPr>
           <a:lstStyle/>
@@ -30141,6 +30614,7 @@
           <a:lstStyle/>
           <a:p>
             <a:pPr algn="ctr"/>
+            <a:endParaRPr/>
           </a:p>
         </p:txBody>
       </p:sp>
@@ -30184,6 +30658,7 @@
           <a:lstStyle/>
           <a:p>
             <a:pPr algn="ctr"/>
+            <a:endParaRPr/>
           </a:p>
         </p:txBody>
       </p:sp>
@@ -30204,7 +30679,7 @@
           <a:noFill/>
         </p:spPr>
         <p:txBody>
-          <a:bodyPr wrap="square" lIns="27432" rIns="27432" tIns="27432" bIns="27432" anchor="t">
+          <a:bodyPr wrap="square" lIns="27432" tIns="27432" rIns="27432" bIns="27432" anchor="t">
             <a:spAutoFit/>
           </a:bodyPr>
           <a:lstStyle/>
@@ -30239,7 +30714,7 @@
           <a:noFill/>
         </p:spPr>
         <p:txBody>
-          <a:bodyPr wrap="square" lIns="27432" rIns="27432" tIns="27432" bIns="27432" anchor="t">
+          <a:bodyPr wrap="square" lIns="27432" tIns="27432" rIns="27432" bIns="27432" anchor="t">
             <a:spAutoFit/>
           </a:bodyPr>
           <a:lstStyle/>
@@ -30299,6 +30774,7 @@
           <a:lstStyle/>
           <a:p>
             <a:pPr algn="ctr"/>
+            <a:endParaRPr/>
           </a:p>
         </p:txBody>
       </p:sp>
@@ -30342,6 +30818,7 @@
           <a:lstStyle/>
           <a:p>
             <a:pPr algn="ctr"/>
+            <a:endParaRPr/>
           </a:p>
         </p:txBody>
       </p:sp>
@@ -30362,7 +30839,7 @@
           <a:noFill/>
         </p:spPr>
         <p:txBody>
-          <a:bodyPr wrap="square" lIns="27432" rIns="27432" tIns="27432" bIns="27432" anchor="t">
+          <a:bodyPr wrap="square" lIns="27432" tIns="27432" rIns="27432" bIns="27432" anchor="t">
             <a:spAutoFit/>
           </a:bodyPr>
           <a:lstStyle/>
@@ -30397,7 +30874,7 @@
           <a:noFill/>
         </p:spPr>
         <p:txBody>
-          <a:bodyPr wrap="square" lIns="27432" rIns="27432" tIns="27432" bIns="27432" anchor="t">
+          <a:bodyPr wrap="square" lIns="27432" tIns="27432" rIns="27432" bIns="27432" anchor="t">
             <a:spAutoFit/>
           </a:bodyPr>
           <a:lstStyle/>
@@ -30457,6 +30934,7 @@
           <a:lstStyle/>
           <a:p>
             <a:pPr algn="ctr"/>
+            <a:endParaRPr/>
           </a:p>
         </p:txBody>
       </p:sp>
@@ -30500,6 +30978,7 @@
           <a:lstStyle/>
           <a:p>
             <a:pPr algn="ctr"/>
+            <a:endParaRPr/>
           </a:p>
         </p:txBody>
       </p:sp>
@@ -30520,7 +30999,7 @@
           <a:noFill/>
         </p:spPr>
         <p:txBody>
-          <a:bodyPr wrap="square" lIns="27432" rIns="27432" tIns="27432" bIns="27432" anchor="t">
+          <a:bodyPr wrap="square" lIns="27432" tIns="27432" rIns="27432" bIns="27432" anchor="t">
             <a:spAutoFit/>
           </a:bodyPr>
           <a:lstStyle/>
@@ -30555,7 +31034,7 @@
           <a:noFill/>
         </p:spPr>
         <p:txBody>
-          <a:bodyPr wrap="square" lIns="27432" rIns="27432" tIns="27432" bIns="27432" anchor="t">
+          <a:bodyPr wrap="square" lIns="27432" tIns="27432" rIns="27432" bIns="27432" anchor="t">
             <a:spAutoFit/>
           </a:bodyPr>
           <a:lstStyle/>
@@ -30590,7 +31069,7 @@
           <a:noFill/>
         </p:spPr>
         <p:txBody>
-          <a:bodyPr wrap="square" lIns="27432" rIns="27432" tIns="27432" bIns="27432" anchor="t">
+          <a:bodyPr wrap="square" lIns="27432" tIns="27432" rIns="27432" bIns="27432" anchor="t">
             <a:spAutoFit/>
           </a:bodyPr>
           <a:lstStyle/>
@@ -30651,7 +31130,7 @@
 </file>
 
 <file path=ppt/slides/slide47.xml><?xml version="1.0" encoding="utf-8"?>
-<p:sld xmlns:a="http://schemas.openxmlformats.org/drawingml/2006/main" xmlns:p="http://schemas.openxmlformats.org/presentationml/2006/main" xmlns:r="http://schemas.openxmlformats.org/officeDocument/2006/relationships">
+<p:sld xmlns:a="http://schemas.openxmlformats.org/drawingml/2006/main" xmlns:r="http://schemas.openxmlformats.org/officeDocument/2006/relationships" xmlns:p="http://schemas.openxmlformats.org/presentationml/2006/main">
   <p:cSld>
     <p:spTree>
       <p:nvGrpSpPr>
@@ -30659,7 +31138,14 @@
         <p:cNvGrpSpPr/>
         <p:nvPr/>
       </p:nvGrpSpPr>
-      <p:grpSpPr/>
+      <p:grpSpPr>
+        <a:xfrm>
+          <a:off x="0" y="0"/>
+          <a:ext cx="0" cy="0"/>
+          <a:chOff x="0" y="0"/>
+          <a:chExt cx="0" cy="0"/>
+        </a:xfrm>
+      </p:grpSpPr>
       <p:sp>
         <p:nvSpPr>
           <p:cNvPr id="2" name="Rectangle 1"/>
@@ -30700,6 +31186,7 @@
           <a:lstStyle/>
           <a:p>
             <a:pPr algn="ctr"/>
+            <a:endParaRPr/>
           </a:p>
         </p:txBody>
       </p:sp>
@@ -30743,6 +31230,7 @@
           <a:lstStyle/>
           <a:p>
             <a:pPr algn="ctr"/>
+            <a:endParaRPr/>
           </a:p>
         </p:txBody>
       </p:sp>
@@ -30891,6 +31379,7 @@
           <a:lstStyle/>
           <a:p>
             <a:pPr algn="ctr"/>
+            <a:endParaRPr/>
           </a:p>
         </p:txBody>
       </p:sp>
@@ -30934,6 +31423,7 @@
           <a:lstStyle/>
           <a:p>
             <a:pPr algn="ctr"/>
+            <a:endParaRPr/>
           </a:p>
         </p:txBody>
       </p:sp>
@@ -30954,7 +31444,7 @@
           <a:noFill/>
         </p:spPr>
         <p:txBody>
-          <a:bodyPr wrap="square" lIns="27432" rIns="27432" tIns="27432" bIns="27432" anchor="t">
+          <a:bodyPr wrap="square" lIns="27432" tIns="27432" rIns="27432" bIns="27432" anchor="t">
             <a:spAutoFit/>
           </a:bodyPr>
           <a:lstStyle/>
@@ -30989,7 +31479,7 @@
           <a:noFill/>
         </p:spPr>
         <p:txBody>
-          <a:bodyPr wrap="square" lIns="27432" rIns="27432" tIns="27432" bIns="27432" anchor="t">
+          <a:bodyPr wrap="square" lIns="27432" tIns="27432" rIns="27432" bIns="27432" anchor="t">
             <a:spAutoFit/>
           </a:bodyPr>
           <a:lstStyle/>
@@ -31049,6 +31539,7 @@
           <a:lstStyle/>
           <a:p>
             <a:pPr algn="ctr"/>
+            <a:endParaRPr/>
           </a:p>
         </p:txBody>
       </p:sp>
@@ -31092,6 +31583,7 @@
           <a:lstStyle/>
           <a:p>
             <a:pPr algn="ctr"/>
+            <a:endParaRPr/>
           </a:p>
         </p:txBody>
       </p:sp>
@@ -31112,7 +31604,7 @@
           <a:noFill/>
         </p:spPr>
         <p:txBody>
-          <a:bodyPr wrap="square" lIns="27432" rIns="27432" tIns="27432" bIns="27432" anchor="t">
+          <a:bodyPr wrap="square" lIns="27432" tIns="27432" rIns="27432" bIns="27432" anchor="t">
             <a:spAutoFit/>
           </a:bodyPr>
           <a:lstStyle/>
@@ -31147,7 +31639,7 @@
           <a:noFill/>
         </p:spPr>
         <p:txBody>
-          <a:bodyPr wrap="square" lIns="27432" rIns="27432" tIns="27432" bIns="27432" anchor="t">
+          <a:bodyPr wrap="square" lIns="27432" tIns="27432" rIns="27432" bIns="27432" anchor="t">
             <a:spAutoFit/>
           </a:bodyPr>
           <a:lstStyle/>
@@ -31207,6 +31699,7 @@
           <a:lstStyle/>
           <a:p>
             <a:pPr algn="ctr"/>
+            <a:endParaRPr/>
           </a:p>
         </p:txBody>
       </p:sp>
@@ -31250,6 +31743,7 @@
           <a:lstStyle/>
           <a:p>
             <a:pPr algn="ctr"/>
+            <a:endParaRPr/>
           </a:p>
         </p:txBody>
       </p:sp>
@@ -31270,7 +31764,7 @@
           <a:noFill/>
         </p:spPr>
         <p:txBody>
-          <a:bodyPr wrap="square" lIns="27432" rIns="27432" tIns="27432" bIns="27432" anchor="t">
+          <a:bodyPr wrap="square" lIns="27432" tIns="27432" rIns="27432" bIns="27432" anchor="t">
             <a:spAutoFit/>
           </a:bodyPr>
           <a:lstStyle/>
@@ -31305,7 +31799,7 @@
           <a:noFill/>
         </p:spPr>
         <p:txBody>
-          <a:bodyPr wrap="square" lIns="27432" rIns="27432" tIns="27432" bIns="27432" anchor="t">
+          <a:bodyPr wrap="square" lIns="27432" tIns="27432" rIns="27432" bIns="27432" anchor="t">
             <a:spAutoFit/>
           </a:bodyPr>
           <a:lstStyle/>
@@ -31340,7 +31834,7 @@
           <a:noFill/>
         </p:spPr>
         <p:txBody>
-          <a:bodyPr wrap="square" lIns="27432" rIns="27432" tIns="27432" bIns="27432" anchor="t">
+          <a:bodyPr wrap="square" lIns="27432" tIns="27432" rIns="27432" bIns="27432" anchor="t">
             <a:spAutoFit/>
           </a:bodyPr>
           <a:lstStyle/>
@@ -31375,7 +31869,7 @@
           <a:noFill/>
         </p:spPr>
         <p:txBody>
-          <a:bodyPr wrap="square" lIns="27432" rIns="27432" tIns="27432" bIns="27432" anchor="t">
+          <a:bodyPr wrap="square" lIns="27432" tIns="27432" rIns="27432" bIns="27432" anchor="t">
             <a:spAutoFit/>
           </a:bodyPr>
           <a:lstStyle/>
@@ -31433,6 +31927,7 @@
           <a:lstStyle/>
           <a:p>
             <a:pPr algn="ctr"/>
+            <a:endParaRPr/>
           </a:p>
         </p:txBody>
       </p:sp>
@@ -31453,7 +31948,7 @@
           <a:noFill/>
         </p:spPr>
         <p:txBody>
-          <a:bodyPr wrap="square" lIns="27432" rIns="27432" tIns="27432" bIns="27432" anchor="ctr">
+          <a:bodyPr wrap="square" lIns="27432" tIns="27432" rIns="27432" bIns="27432" anchor="ctr">
             <a:spAutoFit/>
           </a:bodyPr>
           <a:lstStyle/>
@@ -31514,7 +32009,7 @@
 </file>
 
 <file path=ppt/slides/slide48.xml><?xml version="1.0" encoding="utf-8"?>
-<p:sld xmlns:a="http://schemas.openxmlformats.org/drawingml/2006/main" xmlns:p="http://schemas.openxmlformats.org/presentationml/2006/main" xmlns:r="http://schemas.openxmlformats.org/officeDocument/2006/relationships">
+<p:sld xmlns:a="http://schemas.openxmlformats.org/drawingml/2006/main" xmlns:r="http://schemas.openxmlformats.org/officeDocument/2006/relationships" xmlns:p="http://schemas.openxmlformats.org/presentationml/2006/main">
   <p:cSld>
     <p:spTree>
       <p:nvGrpSpPr>
@@ -31522,7 +32017,14 @@
         <p:cNvGrpSpPr/>
         <p:nvPr/>
       </p:nvGrpSpPr>
-      <p:grpSpPr/>
+      <p:grpSpPr>
+        <a:xfrm>
+          <a:off x="0" y="0"/>
+          <a:ext cx="0" cy="0"/>
+          <a:chOff x="0" y="0"/>
+          <a:chExt cx="0" cy="0"/>
+        </a:xfrm>
+      </p:grpSpPr>
       <p:sp>
         <p:nvSpPr>
           <p:cNvPr id="2" name="Rectangle 1"/>
@@ -31563,6 +32065,7 @@
           <a:lstStyle/>
           <a:p>
             <a:pPr algn="ctr"/>
+            <a:endParaRPr/>
           </a:p>
         </p:txBody>
       </p:sp>
@@ -31606,6 +32109,7 @@
           <a:lstStyle/>
           <a:p>
             <a:pPr algn="ctr"/>
+            <a:endParaRPr/>
           </a:p>
         </p:txBody>
       </p:sp>
@@ -31754,6 +32258,7 @@
           <a:lstStyle/>
           <a:p>
             <a:pPr algn="ctr"/>
+            <a:endParaRPr/>
           </a:p>
         </p:txBody>
       </p:sp>
@@ -31797,6 +32302,7 @@
           <a:lstStyle/>
           <a:p>
             <a:pPr algn="ctr"/>
+            <a:endParaRPr/>
           </a:p>
         </p:txBody>
       </p:sp>
@@ -31817,7 +32323,7 @@
           <a:noFill/>
         </p:spPr>
         <p:txBody>
-          <a:bodyPr wrap="square" lIns="27432" rIns="27432" tIns="27432" bIns="27432" anchor="t">
+          <a:bodyPr wrap="square" lIns="27432" tIns="27432" rIns="27432" bIns="27432" anchor="t">
             <a:spAutoFit/>
           </a:bodyPr>
           <a:lstStyle/>
@@ -31852,7 +32358,7 @@
           <a:noFill/>
         </p:spPr>
         <p:txBody>
-          <a:bodyPr wrap="square" lIns="27432" rIns="27432" tIns="27432" bIns="27432" anchor="t">
+          <a:bodyPr wrap="square" lIns="27432" tIns="27432" rIns="27432" bIns="27432" anchor="t">
             <a:spAutoFit/>
           </a:bodyPr>
           <a:lstStyle/>
@@ -31912,6 +32418,7 @@
           <a:lstStyle/>
           <a:p>
             <a:pPr algn="ctr"/>
+            <a:endParaRPr/>
           </a:p>
         </p:txBody>
       </p:sp>
@@ -31955,6 +32462,7 @@
           <a:lstStyle/>
           <a:p>
             <a:pPr algn="ctr"/>
+            <a:endParaRPr/>
           </a:p>
         </p:txBody>
       </p:sp>
@@ -31975,7 +32483,7 @@
           <a:noFill/>
         </p:spPr>
         <p:txBody>
-          <a:bodyPr wrap="square" lIns="27432" rIns="27432" tIns="27432" bIns="27432" anchor="t">
+          <a:bodyPr wrap="square" lIns="27432" tIns="27432" rIns="27432" bIns="27432" anchor="t">
             <a:spAutoFit/>
           </a:bodyPr>
           <a:lstStyle/>
@@ -32010,7 +32518,7 @@
           <a:noFill/>
         </p:spPr>
         <p:txBody>
-          <a:bodyPr wrap="square" lIns="27432" rIns="27432" tIns="27432" bIns="27432" anchor="t">
+          <a:bodyPr wrap="square" lIns="27432" tIns="27432" rIns="27432" bIns="27432" anchor="t">
             <a:spAutoFit/>
           </a:bodyPr>
           <a:lstStyle/>
@@ -32070,6 +32578,7 @@
           <a:lstStyle/>
           <a:p>
             <a:pPr algn="ctr"/>
+            <a:endParaRPr/>
           </a:p>
         </p:txBody>
       </p:sp>
@@ -32113,6 +32622,7 @@
           <a:lstStyle/>
           <a:p>
             <a:pPr algn="ctr"/>
+            <a:endParaRPr/>
           </a:p>
         </p:txBody>
       </p:sp>
@@ -32133,7 +32643,7 @@
           <a:noFill/>
         </p:spPr>
         <p:txBody>
-          <a:bodyPr wrap="square" lIns="27432" rIns="27432" tIns="27432" bIns="27432" anchor="t">
+          <a:bodyPr wrap="square" lIns="27432" tIns="27432" rIns="27432" bIns="27432" anchor="t">
             <a:spAutoFit/>
           </a:bodyPr>
           <a:lstStyle/>
@@ -32168,7 +32678,7 @@
           <a:noFill/>
         </p:spPr>
         <p:txBody>
-          <a:bodyPr wrap="square" lIns="27432" rIns="27432" tIns="27432" bIns="27432" anchor="t">
+          <a:bodyPr wrap="square" lIns="27432" tIns="27432" rIns="27432" bIns="27432" anchor="t">
             <a:spAutoFit/>
           </a:bodyPr>
           <a:lstStyle/>
@@ -32228,6 +32738,7 @@
           <a:lstStyle/>
           <a:p>
             <a:pPr algn="ctr"/>
+            <a:endParaRPr/>
           </a:p>
         </p:txBody>
       </p:sp>
@@ -32271,6 +32782,7 @@
           <a:lstStyle/>
           <a:p>
             <a:pPr algn="ctr"/>
+            <a:endParaRPr/>
           </a:p>
         </p:txBody>
       </p:sp>
@@ -32291,7 +32803,7 @@
           <a:noFill/>
         </p:spPr>
         <p:txBody>
-          <a:bodyPr wrap="square" lIns="27432" rIns="27432" tIns="27432" bIns="27432" anchor="t">
+          <a:bodyPr wrap="square" lIns="27432" tIns="27432" rIns="27432" bIns="27432" anchor="t">
             <a:spAutoFit/>
           </a:bodyPr>
           <a:lstStyle/>
@@ -32326,7 +32838,7 @@
           <a:noFill/>
         </p:spPr>
         <p:txBody>
-          <a:bodyPr wrap="square" lIns="27432" rIns="27432" tIns="27432" bIns="27432" anchor="t">
+          <a:bodyPr wrap="square" lIns="27432" tIns="27432" rIns="27432" bIns="27432" anchor="t">
             <a:spAutoFit/>
           </a:bodyPr>
           <a:lstStyle/>
@@ -32361,7 +32873,7 @@
           <a:noFill/>
         </p:spPr>
         <p:txBody>
-          <a:bodyPr wrap="square" lIns="27432" rIns="27432" tIns="27432" bIns="27432" anchor="t">
+          <a:bodyPr wrap="square" lIns="27432" tIns="27432" rIns="27432" bIns="27432" anchor="t">
             <a:spAutoFit/>
           </a:bodyPr>
           <a:lstStyle/>
@@ -32396,7 +32908,7 @@
           <a:noFill/>
         </p:spPr>
         <p:txBody>
-          <a:bodyPr wrap="square" lIns="27432" rIns="27432" tIns="27432" bIns="27432" anchor="t">
+          <a:bodyPr wrap="square" lIns="27432" tIns="27432" rIns="27432" bIns="27432" anchor="t">
             <a:spAutoFit/>
           </a:bodyPr>
           <a:lstStyle/>
@@ -32454,6 +32966,7 @@
           <a:lstStyle/>
           <a:p>
             <a:pPr algn="ctr"/>
+            <a:endParaRPr/>
           </a:p>
         </p:txBody>
       </p:sp>
@@ -32474,7 +32987,7 @@
           <a:noFill/>
         </p:spPr>
         <p:txBody>
-          <a:bodyPr wrap="square" lIns="27432" rIns="27432" tIns="27432" bIns="27432" anchor="ctr">
+          <a:bodyPr wrap="square" lIns="27432" tIns="27432" rIns="27432" bIns="27432" anchor="ctr">
             <a:spAutoFit/>
           </a:bodyPr>
           <a:lstStyle/>
@@ -32535,7 +33048,7 @@
 </file>
 
 <file path=ppt/slides/slide5.xml><?xml version="1.0" encoding="utf-8"?>
-<p:sld xmlns:a="http://schemas.openxmlformats.org/drawingml/2006/main" xmlns:p="http://schemas.openxmlformats.org/presentationml/2006/main" xmlns:r="http://schemas.openxmlformats.org/officeDocument/2006/relationships">
+<p:sld xmlns:a="http://schemas.openxmlformats.org/drawingml/2006/main" xmlns:r="http://schemas.openxmlformats.org/officeDocument/2006/relationships" xmlns:p="http://schemas.openxmlformats.org/presentationml/2006/main">
   <p:cSld>
     <p:spTree>
       <p:nvGrpSpPr>
@@ -32543,7 +33056,14 @@
         <p:cNvGrpSpPr/>
         <p:nvPr/>
       </p:nvGrpSpPr>
-      <p:grpSpPr/>
+      <p:grpSpPr>
+        <a:xfrm>
+          <a:off x="0" y="0"/>
+          <a:ext cx="0" cy="0"/>
+          <a:chOff x="0" y="0"/>
+          <a:chExt cx="0" cy="0"/>
+        </a:xfrm>
+      </p:grpSpPr>
       <p:sp>
         <p:nvSpPr>
           <p:cNvPr id="2" name="Rectangle 1"/>
@@ -32584,6 +33104,7 @@
           <a:lstStyle/>
           <a:p>
             <a:pPr algn="ctr"/>
+            <a:endParaRPr/>
           </a:p>
         </p:txBody>
       </p:sp>
@@ -32627,6 +33148,7 @@
           <a:lstStyle/>
           <a:p>
             <a:pPr algn="ctr"/>
+            <a:endParaRPr/>
           </a:p>
         </p:txBody>
       </p:sp>
@@ -32773,6 +33295,7 @@
           <a:lstStyle/>
           <a:p>
             <a:pPr algn="ctr"/>
+            <a:endParaRPr/>
           </a:p>
         </p:txBody>
       </p:sp>
@@ -32793,7 +33316,7 @@
           <a:noFill/>
         </p:spPr>
         <p:txBody>
-          <a:bodyPr wrap="square" lIns="27432" rIns="27432" tIns="27432" bIns="27432" anchor="ctr">
+          <a:bodyPr wrap="square" lIns="27432" tIns="27432" rIns="27432" bIns="27432" anchor="ctr">
             <a:spAutoFit/>
           </a:bodyPr>
           <a:lstStyle/>
@@ -32853,6 +33376,7 @@
           <a:lstStyle/>
           <a:p>
             <a:pPr algn="ctr"/>
+            <a:endParaRPr/>
           </a:p>
         </p:txBody>
       </p:sp>
@@ -32896,6 +33420,7 @@
           <a:lstStyle/>
           <a:p>
             <a:pPr algn="ctr"/>
+            <a:endParaRPr/>
           </a:p>
         </p:txBody>
       </p:sp>
@@ -32916,7 +33441,7 @@
           <a:noFill/>
         </p:spPr>
         <p:txBody>
-          <a:bodyPr wrap="square" lIns="27432" rIns="27432" tIns="27432" bIns="27432" anchor="t">
+          <a:bodyPr wrap="square" lIns="27432" tIns="27432" rIns="27432" bIns="27432" anchor="t">
             <a:spAutoFit/>
           </a:bodyPr>
           <a:lstStyle/>
@@ -32951,7 +33476,7 @@
           <a:noFill/>
         </p:spPr>
         <p:txBody>
-          <a:bodyPr wrap="square" lIns="27432" rIns="27432" tIns="27432" bIns="27432" anchor="t">
+          <a:bodyPr wrap="square" lIns="27432" tIns="27432" rIns="27432" bIns="27432" anchor="t">
             <a:spAutoFit/>
           </a:bodyPr>
           <a:lstStyle/>
@@ -32986,7 +33511,7 @@
           <a:noFill/>
         </p:spPr>
         <p:txBody>
-          <a:bodyPr wrap="square" lIns="27432" rIns="27432" tIns="27432" bIns="27432" anchor="t">
+          <a:bodyPr wrap="square" lIns="27432" tIns="27432" rIns="27432" bIns="27432" anchor="t">
             <a:spAutoFit/>
           </a:bodyPr>
           <a:lstStyle/>
@@ -33044,6 +33569,7 @@
           <a:lstStyle/>
           <a:p>
             <a:pPr algn="ctr"/>
+            <a:endParaRPr/>
           </a:p>
         </p:txBody>
       </p:sp>
@@ -33064,7 +33590,7 @@
           <a:noFill/>
         </p:spPr>
         <p:txBody>
-          <a:bodyPr wrap="square" lIns="27432" rIns="27432" tIns="27432" bIns="27432" anchor="ctr">
+          <a:bodyPr wrap="square" lIns="27432" tIns="27432" rIns="27432" bIns="27432" anchor="ctr">
             <a:spAutoFit/>
           </a:bodyPr>
           <a:lstStyle/>
@@ -33124,6 +33650,7 @@
           <a:lstStyle/>
           <a:p>
             <a:pPr algn="ctr"/>
+            <a:endParaRPr/>
           </a:p>
         </p:txBody>
       </p:sp>
@@ -33167,6 +33694,7 @@
           <a:lstStyle/>
           <a:p>
             <a:pPr algn="ctr"/>
+            <a:endParaRPr/>
           </a:p>
         </p:txBody>
       </p:sp>
@@ -33187,7 +33715,7 @@
           <a:noFill/>
         </p:spPr>
         <p:txBody>
-          <a:bodyPr wrap="square" lIns="27432" rIns="27432" tIns="27432" bIns="27432" anchor="t">
+          <a:bodyPr wrap="square" lIns="27432" tIns="27432" rIns="27432" bIns="27432" anchor="t">
             <a:spAutoFit/>
           </a:bodyPr>
           <a:lstStyle/>
@@ -33213,7 +33741,7 @@
         </p:nvSpPr>
         <p:spPr>
           <a:xfrm>
-            <a:off x="3008376" y="2267712"/>
+            <a:off x="2990088" y="2368712"/>
             <a:ext cx="1600200" cy="2496312"/>
           </a:xfrm>
           <a:prstGeom prst="rect">
@@ -33222,14 +33750,14 @@
           <a:noFill/>
         </p:spPr>
         <p:txBody>
-          <a:bodyPr wrap="square" lIns="27432" rIns="27432" tIns="27432" bIns="27432" anchor="t">
+          <a:bodyPr wrap="square" lIns="27432" tIns="27432" rIns="27432" bIns="27432" anchor="t">
             <a:spAutoFit/>
           </a:bodyPr>
           <a:lstStyle/>
           <a:p>
             <a:pPr algn="l"/>
             <a:r>
-              <a:rPr sz="1400" b="0">
+              <a:rPr sz="1400" b="0" dirty="0">
                 <a:solidFill>
                   <a:srgbClr val="26303A"/>
                 </a:solidFill>
@@ -33257,7 +33785,7 @@
           <a:noFill/>
         </p:spPr>
         <p:txBody>
-          <a:bodyPr wrap="square" lIns="27432" rIns="27432" tIns="27432" bIns="27432" anchor="t">
+          <a:bodyPr wrap="square" lIns="27432" tIns="27432" rIns="27432" bIns="27432" anchor="t">
             <a:spAutoFit/>
           </a:bodyPr>
           <a:lstStyle/>
@@ -33315,6 +33843,7 @@
           <a:lstStyle/>
           <a:p>
             <a:pPr algn="ctr"/>
+            <a:endParaRPr/>
           </a:p>
         </p:txBody>
       </p:sp>
@@ -33335,7 +33864,7 @@
           <a:noFill/>
         </p:spPr>
         <p:txBody>
-          <a:bodyPr wrap="square" lIns="27432" rIns="27432" tIns="27432" bIns="27432" anchor="ctr">
+          <a:bodyPr wrap="square" lIns="27432" tIns="27432" rIns="27432" bIns="27432" anchor="ctr">
             <a:spAutoFit/>
           </a:bodyPr>
           <a:lstStyle/>
@@ -33395,6 +33924,7 @@
           <a:lstStyle/>
           <a:p>
             <a:pPr algn="ctr"/>
+            <a:endParaRPr/>
           </a:p>
         </p:txBody>
       </p:sp>
@@ -33438,6 +33968,7 @@
           <a:lstStyle/>
           <a:p>
             <a:pPr algn="ctr"/>
+            <a:endParaRPr/>
           </a:p>
         </p:txBody>
       </p:sp>
@@ -33458,7 +33989,7 @@
           <a:noFill/>
         </p:spPr>
         <p:txBody>
-          <a:bodyPr wrap="square" lIns="27432" rIns="27432" tIns="27432" bIns="27432" anchor="t">
+          <a:bodyPr wrap="square" lIns="27432" tIns="27432" rIns="27432" bIns="27432" anchor="t">
             <a:spAutoFit/>
           </a:bodyPr>
           <a:lstStyle/>
@@ -33493,7 +34024,7 @@
           <a:noFill/>
         </p:spPr>
         <p:txBody>
-          <a:bodyPr wrap="square" lIns="27432" rIns="27432" tIns="27432" bIns="27432" anchor="t">
+          <a:bodyPr wrap="square" lIns="27432" tIns="27432" rIns="27432" bIns="27432" anchor="t">
             <a:spAutoFit/>
           </a:bodyPr>
           <a:lstStyle/>
@@ -33528,7 +34059,7 @@
           <a:noFill/>
         </p:spPr>
         <p:txBody>
-          <a:bodyPr wrap="square" lIns="27432" rIns="27432" tIns="27432" bIns="27432" anchor="t">
+          <a:bodyPr wrap="square" lIns="27432" tIns="27432" rIns="27432" bIns="27432" anchor="t">
             <a:spAutoFit/>
           </a:bodyPr>
           <a:lstStyle/>
@@ -33586,6 +34117,7 @@
           <a:lstStyle/>
           <a:p>
             <a:pPr algn="ctr"/>
+            <a:endParaRPr/>
           </a:p>
         </p:txBody>
       </p:sp>
@@ -33606,7 +34138,7 @@
           <a:noFill/>
         </p:spPr>
         <p:txBody>
-          <a:bodyPr wrap="square" lIns="27432" rIns="27432" tIns="27432" bIns="27432" anchor="ctr">
+          <a:bodyPr wrap="square" lIns="27432" tIns="27432" rIns="27432" bIns="27432" anchor="ctr">
             <a:spAutoFit/>
           </a:bodyPr>
           <a:lstStyle/>
@@ -33666,6 +34198,7 @@
           <a:lstStyle/>
           <a:p>
             <a:pPr algn="ctr"/>
+            <a:endParaRPr/>
           </a:p>
         </p:txBody>
       </p:sp>
@@ -33709,6 +34242,7 @@
           <a:lstStyle/>
           <a:p>
             <a:pPr algn="ctr"/>
+            <a:endParaRPr/>
           </a:p>
         </p:txBody>
       </p:sp>
@@ -33729,7 +34263,7 @@
           <a:noFill/>
         </p:spPr>
         <p:txBody>
-          <a:bodyPr wrap="square" lIns="27432" rIns="27432" tIns="27432" bIns="27432" anchor="t">
+          <a:bodyPr wrap="square" lIns="27432" tIns="27432" rIns="27432" bIns="27432" anchor="t">
             <a:spAutoFit/>
           </a:bodyPr>
           <a:lstStyle/>
@@ -33764,7 +34298,7 @@
           <a:noFill/>
         </p:spPr>
         <p:txBody>
-          <a:bodyPr wrap="square" lIns="27432" rIns="27432" tIns="27432" bIns="27432" anchor="t">
+          <a:bodyPr wrap="square" lIns="27432" tIns="27432" rIns="27432" bIns="27432" anchor="t">
             <a:spAutoFit/>
           </a:bodyPr>
           <a:lstStyle/>
@@ -33799,7 +34333,7 @@
           <a:noFill/>
         </p:spPr>
         <p:txBody>
-          <a:bodyPr wrap="square" lIns="27432" rIns="27432" tIns="27432" bIns="27432" anchor="t">
+          <a:bodyPr wrap="square" lIns="27432" tIns="27432" rIns="27432" bIns="27432" anchor="t">
             <a:spAutoFit/>
           </a:bodyPr>
           <a:lstStyle/>
@@ -33857,6 +34391,7 @@
           <a:lstStyle/>
           <a:p>
             <a:pPr algn="ctr"/>
+            <a:endParaRPr/>
           </a:p>
         </p:txBody>
       </p:sp>
@@ -33877,7 +34412,7 @@
           <a:noFill/>
         </p:spPr>
         <p:txBody>
-          <a:bodyPr wrap="square" lIns="27432" rIns="27432" tIns="27432" bIns="27432" anchor="ctr">
+          <a:bodyPr wrap="square" lIns="27432" tIns="27432" rIns="27432" bIns="27432" anchor="ctr">
             <a:spAutoFit/>
           </a:bodyPr>
           <a:lstStyle/>
@@ -33937,6 +34472,7 @@
           <a:lstStyle/>
           <a:p>
             <a:pPr algn="ctr"/>
+            <a:endParaRPr/>
           </a:p>
         </p:txBody>
       </p:sp>
@@ -33980,6 +34516,7 @@
           <a:lstStyle/>
           <a:p>
             <a:pPr algn="ctr"/>
+            <a:endParaRPr/>
           </a:p>
         </p:txBody>
       </p:sp>
@@ -34000,7 +34537,7 @@
           <a:noFill/>
         </p:spPr>
         <p:txBody>
-          <a:bodyPr wrap="square" lIns="27432" rIns="27432" tIns="27432" bIns="27432" anchor="t">
+          <a:bodyPr wrap="square" lIns="27432" tIns="27432" rIns="27432" bIns="27432" anchor="t">
             <a:spAutoFit/>
           </a:bodyPr>
           <a:lstStyle/>
@@ -34026,7 +34563,7 @@
         </p:nvSpPr>
         <p:spPr>
           <a:xfrm>
-            <a:off x="9921240" y="2267712"/>
+            <a:off x="9902952" y="2368712"/>
             <a:ext cx="1600200" cy="2496312"/>
           </a:xfrm>
           <a:prstGeom prst="rect">
@@ -34035,14 +34572,14 @@
           <a:noFill/>
         </p:spPr>
         <p:txBody>
-          <a:bodyPr wrap="square" lIns="27432" rIns="27432" tIns="27432" bIns="27432" anchor="t">
+          <a:bodyPr wrap="square" lIns="27432" tIns="27432" rIns="27432" bIns="27432" anchor="t">
             <a:spAutoFit/>
           </a:bodyPr>
           <a:lstStyle/>
           <a:p>
             <a:pPr algn="l"/>
             <a:r>
-              <a:rPr sz="1400" b="0">
+              <a:rPr sz="1400" b="0" dirty="0">
                 <a:solidFill>
                   <a:srgbClr val="26303A"/>
                 </a:solidFill>
@@ -34070,7 +34607,7 @@
           <a:noFill/>
         </p:spPr>
         <p:txBody>
-          <a:bodyPr wrap="square" lIns="27432" rIns="27432" tIns="27432" bIns="27432" anchor="t">
+          <a:bodyPr wrap="square" lIns="27432" tIns="27432" rIns="27432" bIns="27432" anchor="t">
             <a:spAutoFit/>
           </a:bodyPr>
           <a:lstStyle/>
@@ -34131,7 +34668,7 @@
 </file>
 
 <file path=ppt/slides/slide6.xml><?xml version="1.0" encoding="utf-8"?>
-<p:sld xmlns:a="http://schemas.openxmlformats.org/drawingml/2006/main" xmlns:p="http://schemas.openxmlformats.org/presentationml/2006/main" xmlns:r="http://schemas.openxmlformats.org/officeDocument/2006/relationships">
+<p:sld xmlns:a="http://schemas.openxmlformats.org/drawingml/2006/main" xmlns:r="http://schemas.openxmlformats.org/officeDocument/2006/relationships" xmlns:p="http://schemas.openxmlformats.org/presentationml/2006/main">
   <p:cSld>
     <p:spTree>
       <p:nvGrpSpPr>
@@ -34139,7 +34676,14 @@
         <p:cNvGrpSpPr/>
         <p:nvPr/>
       </p:nvGrpSpPr>
-      <p:grpSpPr/>
+      <p:grpSpPr>
+        <a:xfrm>
+          <a:off x="0" y="0"/>
+          <a:ext cx="0" cy="0"/>
+          <a:chOff x="0" y="0"/>
+          <a:chExt cx="0" cy="0"/>
+        </a:xfrm>
+      </p:grpSpPr>
       <p:sp>
         <p:nvSpPr>
           <p:cNvPr id="2" name="Rectangle 1"/>
@@ -34180,6 +34724,7 @@
           <a:lstStyle/>
           <a:p>
             <a:pPr algn="ctr"/>
+            <a:endParaRPr/>
           </a:p>
         </p:txBody>
       </p:sp>
@@ -34223,6 +34768,7 @@
           <a:lstStyle/>
           <a:p>
             <a:pPr algn="ctr"/>
+            <a:endParaRPr/>
           </a:p>
         </p:txBody>
       </p:sp>
@@ -34371,6 +34917,7 @@
           <a:lstStyle/>
           <a:p>
             <a:pPr algn="ctr"/>
+            <a:endParaRPr/>
           </a:p>
         </p:txBody>
       </p:sp>
@@ -34414,6 +34961,7 @@
           <a:lstStyle/>
           <a:p>
             <a:pPr algn="ctr"/>
+            <a:endParaRPr/>
           </a:p>
         </p:txBody>
       </p:sp>
@@ -34434,7 +34982,7 @@
           <a:noFill/>
         </p:spPr>
         <p:txBody>
-          <a:bodyPr wrap="square" lIns="27432" rIns="27432" tIns="27432" bIns="27432" anchor="t">
+          <a:bodyPr wrap="square" lIns="27432" tIns="27432" rIns="27432" bIns="27432" anchor="t">
             <a:spAutoFit/>
           </a:bodyPr>
           <a:lstStyle/>
@@ -34469,7 +35017,7 @@
           <a:noFill/>
         </p:spPr>
         <p:txBody>
-          <a:bodyPr wrap="square" lIns="27432" rIns="27432" tIns="27432" bIns="27432" anchor="t">
+          <a:bodyPr wrap="square" lIns="27432" tIns="27432" rIns="27432" bIns="27432" anchor="t">
             <a:spAutoFit/>
           </a:bodyPr>
           <a:lstStyle/>
@@ -34528,6 +35076,7 @@
           <a:lstStyle/>
           <a:p>
             <a:pPr algn="ctr"/>
+            <a:endParaRPr/>
           </a:p>
         </p:txBody>
       </p:sp>
@@ -34571,6 +35120,7 @@
           <a:lstStyle/>
           <a:p>
             <a:pPr algn="ctr"/>
+            <a:endParaRPr/>
           </a:p>
         </p:txBody>
       </p:sp>
@@ -34614,6 +35164,7 @@
           <a:lstStyle/>
           <a:p>
             <a:pPr algn="ctr"/>
+            <a:endParaRPr/>
           </a:p>
         </p:txBody>
       </p:sp>
@@ -34657,6 +35208,7 @@
           <a:lstStyle/>
           <a:p>
             <a:pPr algn="ctr"/>
+            <a:endParaRPr/>
           </a:p>
         </p:txBody>
       </p:sp>
@@ -34700,6 +35252,7 @@
           <a:lstStyle/>
           <a:p>
             <a:pPr algn="ctr"/>
+            <a:endParaRPr/>
           </a:p>
         </p:txBody>
       </p:sp>
@@ -34743,6 +35296,7 @@
           <a:lstStyle/>
           <a:p>
             <a:pPr algn="ctr"/>
+            <a:endParaRPr/>
           </a:p>
         </p:txBody>
       </p:sp>
@@ -34763,7 +35317,7 @@
           <a:noFill/>
         </p:spPr>
         <p:txBody>
-          <a:bodyPr wrap="square" lIns="27432" rIns="27432" tIns="27432" bIns="27432" anchor="t">
+          <a:bodyPr wrap="square" lIns="27432" tIns="27432" rIns="27432" bIns="27432" anchor="t">
             <a:spAutoFit/>
           </a:bodyPr>
           <a:lstStyle/>
@@ -34798,7 +35352,7 @@
           <a:noFill/>
         </p:spPr>
         <p:txBody>
-          <a:bodyPr wrap="square" lIns="27432" rIns="27432" tIns="27432" bIns="27432" anchor="t">
+          <a:bodyPr wrap="square" lIns="27432" tIns="27432" rIns="27432" bIns="27432" anchor="t">
             <a:spAutoFit/>
           </a:bodyPr>
           <a:lstStyle/>
@@ -34824,7 +35378,7 @@
         </p:nvSpPr>
         <p:spPr>
           <a:xfrm>
-            <a:off x="640080" y="5257800"/>
+            <a:off x="676656" y="5266944"/>
             <a:ext cx="10515600" cy="658368"/>
           </a:xfrm>
           <a:prstGeom prst="roundRect">
@@ -34858,6 +35412,7 @@
           <a:lstStyle/>
           <a:p>
             <a:pPr algn="ctr"/>
+            <a:endParaRPr/>
           </a:p>
         </p:txBody>
       </p:sp>
@@ -34901,6 +35456,7 @@
           <a:lstStyle/>
           <a:p>
             <a:pPr algn="ctr"/>
+            <a:endParaRPr/>
           </a:p>
         </p:txBody>
       </p:sp>
@@ -34912,7 +35468,7 @@
         </p:nvSpPr>
         <p:spPr>
           <a:xfrm>
-            <a:off x="841247" y="5394960"/>
+            <a:off x="841247" y="5301442"/>
             <a:ext cx="10149840" cy="320040"/>
           </a:xfrm>
           <a:prstGeom prst="rect">
@@ -34921,14 +35477,14 @@
           <a:noFill/>
         </p:spPr>
         <p:txBody>
-          <a:bodyPr wrap="square" lIns="27432" rIns="27432" tIns="27432" bIns="27432" anchor="t">
+          <a:bodyPr wrap="square" lIns="27432" tIns="27432" rIns="27432" bIns="27432" anchor="t">
             <a:spAutoFit/>
           </a:bodyPr>
           <a:lstStyle/>
           <a:p>
             <a:pPr algn="l"/>
             <a:r>
-              <a:rPr sz="1300" b="1">
+              <a:rPr sz="1300" b="1" dirty="0">
                 <a:solidFill>
                   <a:srgbClr val="122A42"/>
                 </a:solidFill>
@@ -34947,7 +35503,7 @@
         </p:nvSpPr>
         <p:spPr>
           <a:xfrm>
-            <a:off x="841247" y="5788152"/>
+            <a:off x="822960" y="5554980"/>
             <a:ext cx="10149840" cy="0"/>
           </a:xfrm>
           <a:prstGeom prst="rect">
@@ -34956,14 +35512,14 @@
           <a:noFill/>
         </p:spPr>
         <p:txBody>
-          <a:bodyPr wrap="square" lIns="27432" rIns="27432" tIns="27432" bIns="27432" anchor="t">
+          <a:bodyPr wrap="square" lIns="27432" tIns="27432" rIns="27432" bIns="27432" anchor="t">
             <a:spAutoFit/>
           </a:bodyPr>
           <a:lstStyle/>
           <a:p>
             <a:pPr algn="l"/>
             <a:r>
-              <a:rPr sz="1200" b="0">
+              <a:rPr sz="1200" b="0" dirty="0">
                 <a:solidFill>
                   <a:srgbClr val="26303A"/>
                 </a:solidFill>
@@ -35017,7 +35573,7 @@
 </file>
 
 <file path=ppt/slides/slide7.xml><?xml version="1.0" encoding="utf-8"?>
-<p:sld xmlns:a="http://schemas.openxmlformats.org/drawingml/2006/main" xmlns:p="http://schemas.openxmlformats.org/presentationml/2006/main" xmlns:r="http://schemas.openxmlformats.org/officeDocument/2006/relationships">
+<p:sld xmlns:a="http://schemas.openxmlformats.org/drawingml/2006/main" xmlns:r="http://schemas.openxmlformats.org/officeDocument/2006/relationships" xmlns:p="http://schemas.openxmlformats.org/presentationml/2006/main">
   <p:cSld>
     <p:spTree>
       <p:nvGrpSpPr>
@@ -35025,7 +35581,14 @@
         <p:cNvGrpSpPr/>
         <p:nvPr/>
       </p:nvGrpSpPr>
-      <p:grpSpPr/>
+      <p:grpSpPr>
+        <a:xfrm>
+          <a:off x="0" y="0"/>
+          <a:ext cx="0" cy="0"/>
+          <a:chOff x="0" y="0"/>
+          <a:chExt cx="0" cy="0"/>
+        </a:xfrm>
+      </p:grpSpPr>
       <p:sp>
         <p:nvSpPr>
           <p:cNvPr id="2" name="Rectangle 1"/>
@@ -35066,6 +35629,7 @@
           <a:lstStyle/>
           <a:p>
             <a:pPr algn="ctr"/>
+            <a:endParaRPr/>
           </a:p>
         </p:txBody>
       </p:sp>
@@ -35109,6 +35673,7 @@
           <a:lstStyle/>
           <a:p>
             <a:pPr algn="ctr"/>
+            <a:endParaRPr/>
           </a:p>
         </p:txBody>
       </p:sp>
@@ -35257,6 +35822,7 @@
           <a:lstStyle/>
           <a:p>
             <a:pPr algn="ctr"/>
+            <a:endParaRPr/>
           </a:p>
         </p:txBody>
       </p:sp>
@@ -35300,6 +35866,7 @@
           <a:lstStyle/>
           <a:p>
             <a:pPr algn="ctr"/>
+            <a:endParaRPr/>
           </a:p>
         </p:txBody>
       </p:sp>
@@ -35320,7 +35887,7 @@
           <a:noFill/>
         </p:spPr>
         <p:txBody>
-          <a:bodyPr wrap="square" lIns="27432" rIns="27432" tIns="27432" bIns="27432" anchor="t">
+          <a:bodyPr wrap="square" lIns="27432" tIns="27432" rIns="27432" bIns="27432" anchor="t">
             <a:spAutoFit/>
           </a:bodyPr>
           <a:lstStyle/>
@@ -35355,7 +35922,7 @@
           <a:noFill/>
         </p:spPr>
         <p:txBody>
-          <a:bodyPr wrap="square" lIns="27432" rIns="27432" tIns="27432" bIns="27432" anchor="t">
+          <a:bodyPr wrap="square" lIns="27432" tIns="27432" rIns="27432" bIns="27432" anchor="t">
             <a:spAutoFit/>
           </a:bodyPr>
           <a:lstStyle/>
@@ -35415,6 +35982,7 @@
           <a:lstStyle/>
           <a:p>
             <a:pPr algn="ctr"/>
+            <a:endParaRPr/>
           </a:p>
         </p:txBody>
       </p:sp>
@@ -35458,6 +36026,7 @@
           <a:lstStyle/>
           <a:p>
             <a:pPr algn="ctr"/>
+            <a:endParaRPr/>
           </a:p>
         </p:txBody>
       </p:sp>
@@ -35478,7 +36047,7 @@
           <a:noFill/>
         </p:spPr>
         <p:txBody>
-          <a:bodyPr wrap="square" lIns="27432" rIns="27432" tIns="27432" bIns="27432" anchor="t">
+          <a:bodyPr wrap="square" lIns="27432" tIns="27432" rIns="27432" bIns="27432" anchor="t">
             <a:spAutoFit/>
           </a:bodyPr>
           <a:lstStyle/>
@@ -35513,7 +36082,7 @@
           <a:noFill/>
         </p:spPr>
         <p:txBody>
-          <a:bodyPr wrap="square" lIns="27432" rIns="27432" tIns="27432" bIns="27432" anchor="t">
+          <a:bodyPr wrap="square" lIns="27432" tIns="27432" rIns="27432" bIns="27432" anchor="t">
             <a:spAutoFit/>
           </a:bodyPr>
           <a:lstStyle/>
@@ -35573,6 +36142,7 @@
           <a:lstStyle/>
           <a:p>
             <a:pPr algn="ctr"/>
+            <a:endParaRPr/>
           </a:p>
         </p:txBody>
       </p:sp>
@@ -35616,6 +36186,7 @@
           <a:lstStyle/>
           <a:p>
             <a:pPr algn="ctr"/>
+            <a:endParaRPr/>
           </a:p>
         </p:txBody>
       </p:sp>
@@ -35636,7 +36207,7 @@
           <a:noFill/>
         </p:spPr>
         <p:txBody>
-          <a:bodyPr wrap="square" lIns="27432" rIns="27432" tIns="27432" bIns="27432" anchor="t">
+          <a:bodyPr wrap="square" lIns="27432" tIns="27432" rIns="27432" bIns="27432" anchor="t">
             <a:spAutoFit/>
           </a:bodyPr>
           <a:lstStyle/>
@@ -35671,7 +36242,7 @@
           <a:noFill/>
         </p:spPr>
         <p:txBody>
-          <a:bodyPr wrap="square" lIns="27432" rIns="27432" tIns="27432" bIns="27432" anchor="t">
+          <a:bodyPr wrap="square" lIns="27432" tIns="27432" rIns="27432" bIns="27432" anchor="t">
             <a:spAutoFit/>
           </a:bodyPr>
           <a:lstStyle/>
@@ -35731,6 +36302,7 @@
           <a:lstStyle/>
           <a:p>
             <a:pPr algn="ctr"/>
+            <a:endParaRPr/>
           </a:p>
         </p:txBody>
       </p:sp>
@@ -35774,6 +36346,7 @@
           <a:lstStyle/>
           <a:p>
             <a:pPr algn="ctr"/>
+            <a:endParaRPr/>
           </a:p>
         </p:txBody>
       </p:sp>
@@ -35794,7 +36367,7 @@
           <a:noFill/>
         </p:spPr>
         <p:txBody>
-          <a:bodyPr wrap="square" lIns="27432" rIns="27432" tIns="27432" bIns="27432" anchor="t">
+          <a:bodyPr wrap="square" lIns="27432" tIns="27432" rIns="27432" bIns="27432" anchor="t">
             <a:spAutoFit/>
           </a:bodyPr>
           <a:lstStyle/>
@@ -35829,7 +36402,7 @@
           <a:noFill/>
         </p:spPr>
         <p:txBody>
-          <a:bodyPr wrap="square" lIns="27432" rIns="27432" tIns="27432" bIns="27432" anchor="t">
+          <a:bodyPr wrap="square" lIns="27432" tIns="27432" rIns="27432" bIns="27432" anchor="t">
             <a:spAutoFit/>
           </a:bodyPr>
           <a:lstStyle/>
@@ -35889,6 +36462,7 @@
           <a:lstStyle/>
           <a:p>
             <a:pPr algn="ctr"/>
+            <a:endParaRPr/>
           </a:p>
         </p:txBody>
       </p:sp>
@@ -35932,6 +36506,7 @@
           <a:lstStyle/>
           <a:p>
             <a:pPr algn="ctr"/>
+            <a:endParaRPr/>
           </a:p>
         </p:txBody>
       </p:sp>
@@ -35952,7 +36527,7 @@
           <a:noFill/>
         </p:spPr>
         <p:txBody>
-          <a:bodyPr wrap="square" lIns="27432" rIns="27432" tIns="27432" bIns="27432" anchor="t">
+          <a:bodyPr wrap="square" lIns="27432" tIns="27432" rIns="27432" bIns="27432" anchor="t">
             <a:spAutoFit/>
           </a:bodyPr>
           <a:lstStyle/>
@@ -35987,7 +36562,7 @@
           <a:noFill/>
         </p:spPr>
         <p:txBody>
-          <a:bodyPr wrap="square" lIns="27432" rIns="27432" tIns="27432" bIns="27432" anchor="t">
+          <a:bodyPr wrap="square" lIns="27432" tIns="27432" rIns="27432" bIns="27432" anchor="t">
             <a:spAutoFit/>
           </a:bodyPr>
           <a:lstStyle/>
@@ -36022,7 +36597,7 @@
           <a:noFill/>
         </p:spPr>
         <p:txBody>
-          <a:bodyPr wrap="square" lIns="27432" rIns="27432" tIns="27432" bIns="27432" anchor="t">
+          <a:bodyPr wrap="square" lIns="27432" tIns="27432" rIns="27432" bIns="27432" anchor="t">
             <a:spAutoFit/>
           </a:bodyPr>
           <a:lstStyle/>
@@ -36083,7 +36658,7 @@
 </file>
 
 <file path=ppt/slides/slide8.xml><?xml version="1.0" encoding="utf-8"?>
-<p:sld xmlns:a="http://schemas.openxmlformats.org/drawingml/2006/main" xmlns:p="http://schemas.openxmlformats.org/presentationml/2006/main" xmlns:r="http://schemas.openxmlformats.org/officeDocument/2006/relationships">
+<p:sld xmlns:a="http://schemas.openxmlformats.org/drawingml/2006/main" xmlns:r="http://schemas.openxmlformats.org/officeDocument/2006/relationships" xmlns:p="http://schemas.openxmlformats.org/presentationml/2006/main">
   <p:cSld>
     <p:spTree>
       <p:nvGrpSpPr>
@@ -36091,7 +36666,14 @@
         <p:cNvGrpSpPr/>
         <p:nvPr/>
       </p:nvGrpSpPr>
-      <p:grpSpPr/>
+      <p:grpSpPr>
+        <a:xfrm>
+          <a:off x="0" y="0"/>
+          <a:ext cx="0" cy="0"/>
+          <a:chOff x="0" y="0"/>
+          <a:chExt cx="0" cy="0"/>
+        </a:xfrm>
+      </p:grpSpPr>
       <p:sp>
         <p:nvSpPr>
           <p:cNvPr id="2" name="Rectangle 1"/>
@@ -36132,6 +36714,7 @@
           <a:lstStyle/>
           <a:p>
             <a:pPr algn="ctr"/>
+            <a:endParaRPr/>
           </a:p>
         </p:txBody>
       </p:sp>
@@ -36175,6 +36758,7 @@
           <a:lstStyle/>
           <a:p>
             <a:pPr algn="ctr"/>
+            <a:endParaRPr/>
           </a:p>
         </p:txBody>
       </p:sp>
@@ -36323,6 +36907,7 @@
           <a:lstStyle/>
           <a:p>
             <a:pPr algn="ctr"/>
+            <a:endParaRPr/>
           </a:p>
         </p:txBody>
       </p:sp>
@@ -36366,6 +36951,7 @@
           <a:lstStyle/>
           <a:p>
             <a:pPr algn="ctr"/>
+            <a:endParaRPr/>
           </a:p>
         </p:txBody>
       </p:sp>
@@ -36386,7 +36972,7 @@
           <a:noFill/>
         </p:spPr>
         <p:txBody>
-          <a:bodyPr wrap="square" lIns="27432" rIns="27432" tIns="27432" bIns="27432" anchor="t">
+          <a:bodyPr wrap="square" lIns="27432" tIns="27432" rIns="27432" bIns="27432" anchor="t">
             <a:spAutoFit/>
           </a:bodyPr>
           <a:lstStyle/>
@@ -36421,7 +37007,7 @@
           <a:noFill/>
         </p:spPr>
         <p:txBody>
-          <a:bodyPr wrap="square" lIns="27432" rIns="27432" tIns="27432" bIns="27432" anchor="t">
+          <a:bodyPr wrap="square" lIns="27432" tIns="27432" rIns="27432" bIns="27432" anchor="t">
             <a:spAutoFit/>
           </a:bodyPr>
           <a:lstStyle/>
@@ -36481,6 +37067,7 @@
           <a:lstStyle/>
           <a:p>
             <a:pPr algn="ctr"/>
+            <a:endParaRPr/>
           </a:p>
         </p:txBody>
       </p:sp>
@@ -36524,6 +37111,7 @@
           <a:lstStyle/>
           <a:p>
             <a:pPr algn="ctr"/>
+            <a:endParaRPr/>
           </a:p>
         </p:txBody>
       </p:sp>
@@ -36544,7 +37132,7 @@
           <a:noFill/>
         </p:spPr>
         <p:txBody>
-          <a:bodyPr wrap="square" lIns="27432" rIns="27432" tIns="27432" bIns="27432" anchor="t">
+          <a:bodyPr wrap="square" lIns="27432" tIns="27432" rIns="27432" bIns="27432" anchor="t">
             <a:spAutoFit/>
           </a:bodyPr>
           <a:lstStyle/>
@@ -36579,7 +37167,7 @@
           <a:noFill/>
         </p:spPr>
         <p:txBody>
-          <a:bodyPr wrap="square" lIns="27432" rIns="27432" tIns="27432" bIns="27432" anchor="t">
+          <a:bodyPr wrap="square" lIns="27432" tIns="27432" rIns="27432" bIns="27432" anchor="t">
             <a:spAutoFit/>
           </a:bodyPr>
           <a:lstStyle/>
@@ -36639,6 +37227,7 @@
           <a:lstStyle/>
           <a:p>
             <a:pPr algn="ctr"/>
+            <a:endParaRPr/>
           </a:p>
         </p:txBody>
       </p:sp>
@@ -36682,6 +37271,7 @@
           <a:lstStyle/>
           <a:p>
             <a:pPr algn="ctr"/>
+            <a:endParaRPr/>
           </a:p>
         </p:txBody>
       </p:sp>
@@ -36702,7 +37292,7 @@
           <a:noFill/>
         </p:spPr>
         <p:txBody>
-          <a:bodyPr wrap="square" lIns="27432" rIns="27432" tIns="27432" bIns="27432" anchor="t">
+          <a:bodyPr wrap="square" lIns="27432" tIns="27432" rIns="27432" bIns="27432" anchor="t">
             <a:spAutoFit/>
           </a:bodyPr>
           <a:lstStyle/>
@@ -36737,7 +37327,7 @@
           <a:noFill/>
         </p:spPr>
         <p:txBody>
-          <a:bodyPr wrap="square" lIns="27432" rIns="27432" tIns="27432" bIns="27432" anchor="t">
+          <a:bodyPr wrap="square" lIns="27432" tIns="27432" rIns="27432" bIns="27432" anchor="t">
             <a:spAutoFit/>
           </a:bodyPr>
           <a:lstStyle/>
@@ -36772,7 +37362,7 @@
           <a:noFill/>
         </p:spPr>
         <p:txBody>
-          <a:bodyPr wrap="square" lIns="27432" rIns="27432" tIns="27432" bIns="27432" anchor="t">
+          <a:bodyPr wrap="square" lIns="27432" tIns="27432" rIns="27432" bIns="27432" anchor="t">
             <a:spAutoFit/>
           </a:bodyPr>
           <a:lstStyle/>
@@ -36807,7 +37397,7 @@
           <a:noFill/>
         </p:spPr>
         <p:txBody>
-          <a:bodyPr wrap="square" lIns="36576" rIns="36576" tIns="27432" bIns="27432">
+          <a:bodyPr wrap="square" lIns="36576" tIns="27432" rIns="36576" bIns="27432">
             <a:spAutoFit/>
           </a:bodyPr>
           <a:lstStyle/>
@@ -36904,7 +37494,7 @@
 </file>
 
 <file path=ppt/slides/slide9.xml><?xml version="1.0" encoding="utf-8"?>
-<p:sld xmlns:a="http://schemas.openxmlformats.org/drawingml/2006/main" xmlns:p="http://schemas.openxmlformats.org/presentationml/2006/main" xmlns:r="http://schemas.openxmlformats.org/officeDocument/2006/relationships">
+<p:sld xmlns:a="http://schemas.openxmlformats.org/drawingml/2006/main" xmlns:r="http://schemas.openxmlformats.org/officeDocument/2006/relationships" xmlns:p="http://schemas.openxmlformats.org/presentationml/2006/main">
   <p:cSld>
     <p:spTree>
       <p:nvGrpSpPr>
@@ -36912,7 +37502,14 @@
         <p:cNvGrpSpPr/>
         <p:nvPr/>
       </p:nvGrpSpPr>
-      <p:grpSpPr/>
+      <p:grpSpPr>
+        <a:xfrm>
+          <a:off x="0" y="0"/>
+          <a:ext cx="0" cy="0"/>
+          <a:chOff x="0" y="0"/>
+          <a:chExt cx="0" cy="0"/>
+        </a:xfrm>
+      </p:grpSpPr>
       <p:sp>
         <p:nvSpPr>
           <p:cNvPr id="2" name="Rectangle 1"/>
@@ -36953,6 +37550,7 @@
           <a:lstStyle/>
           <a:p>
             <a:pPr algn="ctr"/>
+            <a:endParaRPr/>
           </a:p>
         </p:txBody>
       </p:sp>
@@ -36996,6 +37594,7 @@
           <a:lstStyle/>
           <a:p>
             <a:pPr algn="ctr"/>
+            <a:endParaRPr/>
           </a:p>
         </p:txBody>
       </p:sp>
@@ -37144,6 +37743,7 @@
           <a:lstStyle/>
           <a:p>
             <a:pPr algn="ctr"/>
+            <a:endParaRPr/>
           </a:p>
         </p:txBody>
       </p:sp>
@@ -37187,6 +37787,7 @@
           <a:lstStyle/>
           <a:p>
             <a:pPr algn="ctr"/>
+            <a:endParaRPr/>
           </a:p>
         </p:txBody>
       </p:sp>
@@ -37207,7 +37808,7 @@
           <a:noFill/>
         </p:spPr>
         <p:txBody>
-          <a:bodyPr wrap="square" lIns="27432" rIns="27432" tIns="27432" bIns="27432" anchor="t">
+          <a:bodyPr wrap="square" lIns="27432" tIns="27432" rIns="27432" bIns="27432" anchor="t">
             <a:spAutoFit/>
           </a:bodyPr>
           <a:lstStyle/>
@@ -37242,7 +37843,7 @@
           <a:noFill/>
         </p:spPr>
         <p:txBody>
-          <a:bodyPr wrap="square" lIns="27432" rIns="27432" tIns="27432" bIns="27432" anchor="t">
+          <a:bodyPr wrap="square" lIns="27432" tIns="27432" rIns="27432" bIns="27432" anchor="t">
             <a:spAutoFit/>
           </a:bodyPr>
           <a:lstStyle/>
@@ -37278,7 +37879,7 @@
           <a:noFill/>
         </p:spPr>
         <p:txBody>
-          <a:bodyPr wrap="square" lIns="27432" rIns="27432" tIns="27432" bIns="27432" anchor="t">
+          <a:bodyPr wrap="square" lIns="27432" tIns="27432" rIns="27432" bIns="27432" anchor="t">
             <a:spAutoFit/>
           </a:bodyPr>
           <a:lstStyle/>
@@ -37338,6 +37939,7 @@
           <a:lstStyle/>
           <a:p>
             <a:pPr algn="ctr"/>
+            <a:endParaRPr/>
           </a:p>
         </p:txBody>
       </p:sp>
@@ -37381,6 +37983,7 @@
           <a:lstStyle/>
           <a:p>
             <a:pPr algn="ctr"/>
+            <a:endParaRPr/>
           </a:p>
         </p:txBody>
       </p:sp>
@@ -37401,7 +38004,7 @@
           <a:noFill/>
         </p:spPr>
         <p:txBody>
-          <a:bodyPr wrap="square" lIns="27432" rIns="27432" tIns="27432" bIns="27432" anchor="t">
+          <a:bodyPr wrap="square" lIns="27432" tIns="27432" rIns="27432" bIns="27432" anchor="t">
             <a:spAutoFit/>
           </a:bodyPr>
           <a:lstStyle/>
@@ -37436,7 +38039,7 @@
           <a:noFill/>
         </p:spPr>
         <p:txBody>
-          <a:bodyPr wrap="square" lIns="27432" rIns="27432" tIns="27432" bIns="27432" anchor="t">
+          <a:bodyPr wrap="square" lIns="27432" tIns="27432" rIns="27432" bIns="27432" anchor="t">
             <a:spAutoFit/>
           </a:bodyPr>
           <a:lstStyle/>
@@ -37496,6 +38099,7 @@
           <a:lstStyle/>
           <a:p>
             <a:pPr algn="ctr"/>
+            <a:endParaRPr/>
           </a:p>
         </p:txBody>
       </p:sp>
@@ -37516,7 +38120,7 @@
           <a:noFill/>
         </p:spPr>
         <p:txBody>
-          <a:bodyPr wrap="square" lIns="27432" rIns="27432" tIns="27432" bIns="27432" anchor="ctr">
+          <a:bodyPr wrap="square" lIns="27432" tIns="27432" rIns="27432" bIns="27432" anchor="ctr">
             <a:spAutoFit/>
           </a:bodyPr>
           <a:lstStyle/>
@@ -37551,7 +38155,7 @@
           <a:noFill/>
         </p:spPr>
         <p:txBody>
-          <a:bodyPr wrap="square" lIns="27432" rIns="27432" tIns="27432" bIns="27432" anchor="t">
+          <a:bodyPr wrap="square" lIns="27432" tIns="27432" rIns="27432" bIns="27432" anchor="t">
             <a:spAutoFit/>
           </a:bodyPr>
           <a:lstStyle/>
